--- a/PPTs/Lecture 7 - Routers Exercises ANS.pptx
+++ b/PPTs/Lecture 7 - Routers Exercises ANS.pptx
@@ -13969,6 +13969,88 @@
           </a:prstGeom>
         </p:spPr>
       </p:pic>
+      <p:cxnSp>
+        <p:nvCxnSpPr>
+          <p:cNvPr id="4" name="Straight Connector 3">
+            <a:extLst>
+              <a:ext uri="{FF2B5EF4-FFF2-40B4-BE49-F238E27FC236}">
+                <a16:creationId xmlns:a16="http://schemas.microsoft.com/office/drawing/2014/main" id="{23EEDB88-BCE7-3B16-C11D-3DCE5C125E78}"/>
+              </a:ext>
+            </a:extLst>
+          </p:cNvPr>
+          <p:cNvCxnSpPr>
+            <a:cxnSpLocks/>
+          </p:cNvCxnSpPr>
+          <p:nvPr/>
+        </p:nvCxnSpPr>
+        <p:spPr>
+          <a:xfrm flipH="1">
+            <a:off x="5239285" y="3177083"/>
+            <a:ext cx="237892" cy="208156"/>
+          </a:xfrm>
+          <a:prstGeom prst="line">
+            <a:avLst/>
+          </a:prstGeom>
+          <a:ln w="12700">
+            <a:prstDash val="dash"/>
+          </a:ln>
+        </p:spPr>
+        <p:style>
+          <a:lnRef idx="1">
+            <a:schemeClr val="accent2"/>
+          </a:lnRef>
+          <a:fillRef idx="0">
+            <a:schemeClr val="accent2"/>
+          </a:fillRef>
+          <a:effectRef idx="0">
+            <a:schemeClr val="accent2"/>
+          </a:effectRef>
+          <a:fontRef idx="minor">
+            <a:schemeClr val="tx1"/>
+          </a:fontRef>
+        </p:style>
+      </p:cxnSp>
+      <p:sp>
+        <p:nvSpPr>
+          <p:cNvPr id="6" name="TextBox 5">
+            <a:extLst>
+              <a:ext uri="{FF2B5EF4-FFF2-40B4-BE49-F238E27FC236}">
+                <a16:creationId xmlns:a16="http://schemas.microsoft.com/office/drawing/2014/main" id="{6AA6935D-F054-B9E3-AD49-8C5FE6652814}"/>
+              </a:ext>
+            </a:extLst>
+          </p:cNvPr>
+          <p:cNvSpPr txBox="1"/>
+          <p:nvPr/>
+        </p:nvSpPr>
+        <p:spPr>
+          <a:xfrm>
+            <a:off x="4838711" y="2965224"/>
+            <a:ext cx="607859" cy="430887"/>
+          </a:xfrm>
+          <a:prstGeom prst="rect">
+            <a:avLst/>
+          </a:prstGeom>
+          <a:noFill/>
+        </p:spPr>
+        <p:txBody>
+          <a:bodyPr wrap="none" rtlCol="0">
+            <a:spAutoFit/>
+          </a:bodyPr>
+          <a:lstStyle/>
+          <a:p>
+            <a:r>
+              <a:rPr lang="en-US" sz="1100" dirty="0"/>
+              <a:t>10..</a:t>
+            </a:r>
+          </a:p>
+          <a:p>
+            <a:r>
+              <a:rPr lang="en-US" sz="1100" dirty="0"/>
+              <a:t>default</a:t>
+            </a:r>
+          </a:p>
+        </p:txBody>
+      </p:sp>
     </p:spTree>
     <p:extLst>
       <p:ext uri="{BB962C8B-B14F-4D97-AF65-F5344CB8AC3E}">
@@ -14212,7 +14294,15 @@
             </a:r>
             <a:r>
               <a:rPr lang="en-US" dirty="0"/>
-              <a:t> addresses), since they get forwarded out of ports 5 and 9, respectively. This gives us a total of 2</a:t>
+              <a:t> addresses), since they get forwarded out of ports 5 and 9, respectively (</a:t>
+            </a:r>
+            <a:r>
+              <a:rPr lang="en-US" altLang="zh-CN" dirty="0"/>
+              <a:t>based on longest-prefix matching)</a:t>
+            </a:r>
+            <a:r>
+              <a:rPr lang="en-US" dirty="0"/>
+              <a:t>. This gives us a total of 2</a:t>
             </a:r>
             <a:r>
               <a:rPr lang="en-US" baseline="30000" dirty="0"/>
@@ -14253,7 +14343,15 @@
             </a:pPr>
             <a:r>
               <a:rPr lang="en-US" dirty="0"/>
-              <a:t>Another method is by realizing that only IPv4 addresses with 0110 as its prefix will be forwarded along Port 3. This means the next 28 bits can each be either 0 or 1, </a:t>
+              <a:t>Another method is by realizing that only IPv4 addresses with 0110 as its prefix will be forwarded along Port 3 </a:t>
+            </a:r>
+            <a:r>
+              <a:rPr lang="en-US" altLang="zh-CN" dirty="0"/>
+              <a:t>(based on longest-prefix matching)</a:t>
+            </a:r>
+            <a:r>
+              <a:rPr lang="en-US" dirty="0"/>
+              <a:t>. This means the next 28 bits can each be either 0 or 1, </a:t>
             </a:r>
             <a:r>
               <a:rPr lang="en-US" dirty="0" err="1"/>
@@ -14547,6 +14645,627 @@
   <p:clrMapOvr>
     <a:masterClrMapping/>
   </p:clrMapOvr>
+  <p:timing>
+    <p:tnLst>
+      <p:par>
+        <p:cTn id="1" dur="indefinite" restart="never" nodeType="tmRoot">
+          <p:childTnLst>
+            <p:seq concurrent="1" nextAc="seek">
+              <p:cTn id="2" dur="indefinite" nodeType="mainSeq">
+                <p:childTnLst>
+                  <p:par>
+                    <p:cTn id="3" fill="hold">
+                      <p:stCondLst>
+                        <p:cond delay="indefinite"/>
+                      </p:stCondLst>
+                      <p:childTnLst>
+                        <p:par>
+                          <p:cTn id="4" fill="hold">
+                            <p:stCondLst>
+                              <p:cond delay="0"/>
+                            </p:stCondLst>
+                            <p:childTnLst>
+                              <p:par>
+                                <p:cTn id="5" presetID="1" presetClass="entr" presetSubtype="0" fill="hold" grpId="0" nodeType="clickEffect">
+                                  <p:stCondLst>
+                                    <p:cond delay="0"/>
+                                  </p:stCondLst>
+                                  <p:childTnLst>
+                                    <p:set>
+                                      <p:cBhvr>
+                                        <p:cTn id="6" dur="1" fill="hold">
+                                          <p:stCondLst>
+                                            <p:cond delay="0"/>
+                                          </p:stCondLst>
+                                        </p:cTn>
+                                        <p:tgtEl>
+                                          <p:spTgt spid="3">
+                                            <p:txEl>
+                                              <p:pRg st="0" end="0"/>
+                                            </p:txEl>
+                                          </p:spTgt>
+                                        </p:tgtEl>
+                                        <p:attrNameLst>
+                                          <p:attrName>style.visibility</p:attrName>
+                                        </p:attrNameLst>
+                                      </p:cBhvr>
+                                      <p:to>
+                                        <p:strVal val="visible"/>
+                                      </p:to>
+                                    </p:set>
+                                  </p:childTnLst>
+                                </p:cTn>
+                              </p:par>
+                            </p:childTnLst>
+                          </p:cTn>
+                        </p:par>
+                      </p:childTnLst>
+                    </p:cTn>
+                  </p:par>
+                  <p:par>
+                    <p:cTn id="7" fill="hold">
+                      <p:stCondLst>
+                        <p:cond delay="indefinite"/>
+                      </p:stCondLst>
+                      <p:childTnLst>
+                        <p:par>
+                          <p:cTn id="8" fill="hold">
+                            <p:stCondLst>
+                              <p:cond delay="0"/>
+                            </p:stCondLst>
+                            <p:childTnLst>
+                              <p:par>
+                                <p:cTn id="9" presetID="1" presetClass="entr" presetSubtype="0" fill="hold" grpId="0" nodeType="clickEffect">
+                                  <p:stCondLst>
+                                    <p:cond delay="0"/>
+                                  </p:stCondLst>
+                                  <p:childTnLst>
+                                    <p:set>
+                                      <p:cBhvr>
+                                        <p:cTn id="10" dur="1" fill="hold">
+                                          <p:stCondLst>
+                                            <p:cond delay="0"/>
+                                          </p:stCondLst>
+                                        </p:cTn>
+                                        <p:tgtEl>
+                                          <p:spTgt spid="3">
+                                            <p:txEl>
+                                              <p:pRg st="1" end="1"/>
+                                            </p:txEl>
+                                          </p:spTgt>
+                                        </p:tgtEl>
+                                        <p:attrNameLst>
+                                          <p:attrName>style.visibility</p:attrName>
+                                        </p:attrNameLst>
+                                      </p:cBhvr>
+                                      <p:to>
+                                        <p:strVal val="visible"/>
+                                      </p:to>
+                                    </p:set>
+                                  </p:childTnLst>
+                                </p:cTn>
+                              </p:par>
+                            </p:childTnLst>
+                          </p:cTn>
+                        </p:par>
+                      </p:childTnLst>
+                    </p:cTn>
+                  </p:par>
+                  <p:par>
+                    <p:cTn id="11" fill="hold">
+                      <p:stCondLst>
+                        <p:cond delay="indefinite"/>
+                      </p:stCondLst>
+                      <p:childTnLst>
+                        <p:par>
+                          <p:cTn id="12" fill="hold">
+                            <p:stCondLst>
+                              <p:cond delay="0"/>
+                            </p:stCondLst>
+                            <p:childTnLst>
+                              <p:par>
+                                <p:cTn id="13" presetID="1" presetClass="entr" presetSubtype="0" fill="hold" grpId="0" nodeType="clickEffect">
+                                  <p:stCondLst>
+                                    <p:cond delay="0"/>
+                                  </p:stCondLst>
+                                  <p:childTnLst>
+                                    <p:set>
+                                      <p:cBhvr>
+                                        <p:cTn id="14" dur="1" fill="hold">
+                                          <p:stCondLst>
+                                            <p:cond delay="0"/>
+                                          </p:stCondLst>
+                                        </p:cTn>
+                                        <p:tgtEl>
+                                          <p:spTgt spid="3">
+                                            <p:txEl>
+                                              <p:pRg st="2" end="2"/>
+                                            </p:txEl>
+                                          </p:spTgt>
+                                        </p:tgtEl>
+                                        <p:attrNameLst>
+                                          <p:attrName>style.visibility</p:attrName>
+                                        </p:attrNameLst>
+                                      </p:cBhvr>
+                                      <p:to>
+                                        <p:strVal val="visible"/>
+                                      </p:to>
+                                    </p:set>
+                                  </p:childTnLst>
+                                </p:cTn>
+                              </p:par>
+                            </p:childTnLst>
+                          </p:cTn>
+                        </p:par>
+                      </p:childTnLst>
+                    </p:cTn>
+                  </p:par>
+                  <p:par>
+                    <p:cTn id="15" fill="hold">
+                      <p:stCondLst>
+                        <p:cond delay="indefinite"/>
+                      </p:stCondLst>
+                      <p:childTnLst>
+                        <p:par>
+                          <p:cTn id="16" fill="hold">
+                            <p:stCondLst>
+                              <p:cond delay="0"/>
+                            </p:stCondLst>
+                            <p:childTnLst>
+                              <p:par>
+                                <p:cTn id="17" presetID="1" presetClass="entr" presetSubtype="0" fill="hold" grpId="0" nodeType="clickEffect">
+                                  <p:stCondLst>
+                                    <p:cond delay="0"/>
+                                  </p:stCondLst>
+                                  <p:childTnLst>
+                                    <p:set>
+                                      <p:cBhvr>
+                                        <p:cTn id="18" dur="1" fill="hold">
+                                          <p:stCondLst>
+                                            <p:cond delay="0"/>
+                                          </p:stCondLst>
+                                        </p:cTn>
+                                        <p:tgtEl>
+                                          <p:spTgt spid="3">
+                                            <p:txEl>
+                                              <p:pRg st="3" end="3"/>
+                                            </p:txEl>
+                                          </p:spTgt>
+                                        </p:tgtEl>
+                                        <p:attrNameLst>
+                                          <p:attrName>style.visibility</p:attrName>
+                                        </p:attrNameLst>
+                                      </p:cBhvr>
+                                      <p:to>
+                                        <p:strVal val="visible"/>
+                                      </p:to>
+                                    </p:set>
+                                  </p:childTnLst>
+                                </p:cTn>
+                              </p:par>
+                            </p:childTnLst>
+                          </p:cTn>
+                        </p:par>
+                      </p:childTnLst>
+                    </p:cTn>
+                  </p:par>
+                  <p:par>
+                    <p:cTn id="19" fill="hold">
+                      <p:stCondLst>
+                        <p:cond delay="indefinite"/>
+                      </p:stCondLst>
+                      <p:childTnLst>
+                        <p:par>
+                          <p:cTn id="20" fill="hold">
+                            <p:stCondLst>
+                              <p:cond delay="0"/>
+                            </p:stCondLst>
+                            <p:childTnLst>
+                              <p:par>
+                                <p:cTn id="21" presetID="1" presetClass="entr" presetSubtype="0" fill="hold" grpId="0" nodeType="clickEffect">
+                                  <p:stCondLst>
+                                    <p:cond delay="0"/>
+                                  </p:stCondLst>
+                                  <p:childTnLst>
+                                    <p:set>
+                                      <p:cBhvr>
+                                        <p:cTn id="22" dur="1" fill="hold">
+                                          <p:stCondLst>
+                                            <p:cond delay="0"/>
+                                          </p:stCondLst>
+                                        </p:cTn>
+                                        <p:tgtEl>
+                                          <p:spTgt spid="3">
+                                            <p:txEl>
+                                              <p:pRg st="4" end="4"/>
+                                            </p:txEl>
+                                          </p:spTgt>
+                                        </p:tgtEl>
+                                        <p:attrNameLst>
+                                          <p:attrName>style.visibility</p:attrName>
+                                        </p:attrNameLst>
+                                      </p:cBhvr>
+                                      <p:to>
+                                        <p:strVal val="visible"/>
+                                      </p:to>
+                                    </p:set>
+                                  </p:childTnLst>
+                                </p:cTn>
+                              </p:par>
+                            </p:childTnLst>
+                          </p:cTn>
+                        </p:par>
+                      </p:childTnLst>
+                    </p:cTn>
+                  </p:par>
+                  <p:par>
+                    <p:cTn id="23" fill="hold">
+                      <p:stCondLst>
+                        <p:cond delay="indefinite"/>
+                      </p:stCondLst>
+                      <p:childTnLst>
+                        <p:par>
+                          <p:cTn id="24" fill="hold">
+                            <p:stCondLst>
+                              <p:cond delay="0"/>
+                            </p:stCondLst>
+                            <p:childTnLst>
+                              <p:par>
+                                <p:cTn id="25" presetID="1" presetClass="entr" presetSubtype="0" fill="hold" grpId="0" nodeType="clickEffect">
+                                  <p:stCondLst>
+                                    <p:cond delay="0"/>
+                                  </p:stCondLst>
+                                  <p:childTnLst>
+                                    <p:set>
+                                      <p:cBhvr>
+                                        <p:cTn id="26" dur="1" fill="hold">
+                                          <p:stCondLst>
+                                            <p:cond delay="0"/>
+                                          </p:stCondLst>
+                                        </p:cTn>
+                                        <p:tgtEl>
+                                          <p:spTgt spid="3">
+                                            <p:txEl>
+                                              <p:pRg st="5" end="5"/>
+                                            </p:txEl>
+                                          </p:spTgt>
+                                        </p:tgtEl>
+                                        <p:attrNameLst>
+                                          <p:attrName>style.visibility</p:attrName>
+                                        </p:attrNameLst>
+                                      </p:cBhvr>
+                                      <p:to>
+                                        <p:strVal val="visible"/>
+                                      </p:to>
+                                    </p:set>
+                                  </p:childTnLst>
+                                </p:cTn>
+                              </p:par>
+                            </p:childTnLst>
+                          </p:cTn>
+                        </p:par>
+                      </p:childTnLst>
+                    </p:cTn>
+                  </p:par>
+                  <p:par>
+                    <p:cTn id="27" fill="hold">
+                      <p:stCondLst>
+                        <p:cond delay="indefinite"/>
+                      </p:stCondLst>
+                      <p:childTnLst>
+                        <p:par>
+                          <p:cTn id="28" fill="hold">
+                            <p:stCondLst>
+                              <p:cond delay="0"/>
+                            </p:stCondLst>
+                            <p:childTnLst>
+                              <p:par>
+                                <p:cTn id="29" presetID="1" presetClass="entr" presetSubtype="0" fill="hold" grpId="0" nodeType="clickEffect">
+                                  <p:stCondLst>
+                                    <p:cond delay="0"/>
+                                  </p:stCondLst>
+                                  <p:childTnLst>
+                                    <p:set>
+                                      <p:cBhvr>
+                                        <p:cTn id="30" dur="1" fill="hold">
+                                          <p:stCondLst>
+                                            <p:cond delay="0"/>
+                                          </p:stCondLst>
+                                        </p:cTn>
+                                        <p:tgtEl>
+                                          <p:spTgt spid="3">
+                                            <p:txEl>
+                                              <p:pRg st="6" end="6"/>
+                                            </p:txEl>
+                                          </p:spTgt>
+                                        </p:tgtEl>
+                                        <p:attrNameLst>
+                                          <p:attrName>style.visibility</p:attrName>
+                                        </p:attrNameLst>
+                                      </p:cBhvr>
+                                      <p:to>
+                                        <p:strVal val="visible"/>
+                                      </p:to>
+                                    </p:set>
+                                  </p:childTnLst>
+                                </p:cTn>
+                              </p:par>
+                            </p:childTnLst>
+                          </p:cTn>
+                        </p:par>
+                      </p:childTnLst>
+                    </p:cTn>
+                  </p:par>
+                  <p:par>
+                    <p:cTn id="31" fill="hold">
+                      <p:stCondLst>
+                        <p:cond delay="indefinite"/>
+                      </p:stCondLst>
+                      <p:childTnLst>
+                        <p:par>
+                          <p:cTn id="32" fill="hold">
+                            <p:stCondLst>
+                              <p:cond delay="0"/>
+                            </p:stCondLst>
+                            <p:childTnLst>
+                              <p:par>
+                                <p:cTn id="33" presetID="1" presetClass="entr" presetSubtype="0" fill="hold" grpId="0" nodeType="clickEffect">
+                                  <p:stCondLst>
+                                    <p:cond delay="0"/>
+                                  </p:stCondLst>
+                                  <p:childTnLst>
+                                    <p:set>
+                                      <p:cBhvr>
+                                        <p:cTn id="34" dur="1" fill="hold">
+                                          <p:stCondLst>
+                                            <p:cond delay="0"/>
+                                          </p:stCondLst>
+                                        </p:cTn>
+                                        <p:tgtEl>
+                                          <p:spTgt spid="3">
+                                            <p:txEl>
+                                              <p:pRg st="7" end="7"/>
+                                            </p:txEl>
+                                          </p:spTgt>
+                                        </p:tgtEl>
+                                        <p:attrNameLst>
+                                          <p:attrName>style.visibility</p:attrName>
+                                        </p:attrNameLst>
+                                      </p:cBhvr>
+                                      <p:to>
+                                        <p:strVal val="visible"/>
+                                      </p:to>
+                                    </p:set>
+                                  </p:childTnLst>
+                                </p:cTn>
+                              </p:par>
+                            </p:childTnLst>
+                          </p:cTn>
+                        </p:par>
+                      </p:childTnLst>
+                    </p:cTn>
+                  </p:par>
+                  <p:par>
+                    <p:cTn id="35" fill="hold">
+                      <p:stCondLst>
+                        <p:cond delay="indefinite"/>
+                      </p:stCondLst>
+                      <p:childTnLst>
+                        <p:par>
+                          <p:cTn id="36" fill="hold">
+                            <p:stCondLst>
+                              <p:cond delay="0"/>
+                            </p:stCondLst>
+                            <p:childTnLst>
+                              <p:par>
+                                <p:cTn id="37" presetID="1" presetClass="entr" presetSubtype="0" fill="hold" grpId="0" nodeType="clickEffect">
+                                  <p:stCondLst>
+                                    <p:cond delay="0"/>
+                                  </p:stCondLst>
+                                  <p:childTnLst>
+                                    <p:set>
+                                      <p:cBhvr>
+                                        <p:cTn id="38" dur="1" fill="hold">
+                                          <p:stCondLst>
+                                            <p:cond delay="0"/>
+                                          </p:stCondLst>
+                                        </p:cTn>
+                                        <p:tgtEl>
+                                          <p:spTgt spid="3">
+                                            <p:txEl>
+                                              <p:pRg st="8" end="8"/>
+                                            </p:txEl>
+                                          </p:spTgt>
+                                        </p:tgtEl>
+                                        <p:attrNameLst>
+                                          <p:attrName>style.visibility</p:attrName>
+                                        </p:attrNameLst>
+                                      </p:cBhvr>
+                                      <p:to>
+                                        <p:strVal val="visible"/>
+                                      </p:to>
+                                    </p:set>
+                                  </p:childTnLst>
+                                </p:cTn>
+                              </p:par>
+                            </p:childTnLst>
+                          </p:cTn>
+                        </p:par>
+                      </p:childTnLst>
+                    </p:cTn>
+                  </p:par>
+                  <p:par>
+                    <p:cTn id="39" fill="hold">
+                      <p:stCondLst>
+                        <p:cond delay="indefinite"/>
+                      </p:stCondLst>
+                      <p:childTnLst>
+                        <p:par>
+                          <p:cTn id="40" fill="hold">
+                            <p:stCondLst>
+                              <p:cond delay="0"/>
+                            </p:stCondLst>
+                            <p:childTnLst>
+                              <p:par>
+                                <p:cTn id="41" presetID="1" presetClass="entr" presetSubtype="0" fill="hold" grpId="0" nodeType="clickEffect">
+                                  <p:stCondLst>
+                                    <p:cond delay="0"/>
+                                  </p:stCondLst>
+                                  <p:childTnLst>
+                                    <p:set>
+                                      <p:cBhvr>
+                                        <p:cTn id="42" dur="1" fill="hold">
+                                          <p:stCondLst>
+                                            <p:cond delay="0"/>
+                                          </p:stCondLst>
+                                        </p:cTn>
+                                        <p:tgtEl>
+                                          <p:spTgt spid="3">
+                                            <p:txEl>
+                                              <p:pRg st="9" end="9"/>
+                                            </p:txEl>
+                                          </p:spTgt>
+                                        </p:tgtEl>
+                                        <p:attrNameLst>
+                                          <p:attrName>style.visibility</p:attrName>
+                                        </p:attrNameLst>
+                                      </p:cBhvr>
+                                      <p:to>
+                                        <p:strVal val="visible"/>
+                                      </p:to>
+                                    </p:set>
+                                  </p:childTnLst>
+                                </p:cTn>
+                              </p:par>
+                            </p:childTnLst>
+                          </p:cTn>
+                        </p:par>
+                      </p:childTnLst>
+                    </p:cTn>
+                  </p:par>
+                  <p:par>
+                    <p:cTn id="43" fill="hold">
+                      <p:stCondLst>
+                        <p:cond delay="indefinite"/>
+                      </p:stCondLst>
+                      <p:childTnLst>
+                        <p:par>
+                          <p:cTn id="44" fill="hold">
+                            <p:stCondLst>
+                              <p:cond delay="0"/>
+                            </p:stCondLst>
+                            <p:childTnLst>
+                              <p:par>
+                                <p:cTn id="45" presetID="1" presetClass="entr" presetSubtype="0" fill="hold" grpId="0" nodeType="clickEffect">
+                                  <p:stCondLst>
+                                    <p:cond delay="0"/>
+                                  </p:stCondLst>
+                                  <p:childTnLst>
+                                    <p:set>
+                                      <p:cBhvr>
+                                        <p:cTn id="46" dur="1" fill="hold">
+                                          <p:stCondLst>
+                                            <p:cond delay="0"/>
+                                          </p:stCondLst>
+                                        </p:cTn>
+                                        <p:tgtEl>
+                                          <p:spTgt spid="3">
+                                            <p:txEl>
+                                              <p:pRg st="10" end="10"/>
+                                            </p:txEl>
+                                          </p:spTgt>
+                                        </p:tgtEl>
+                                        <p:attrNameLst>
+                                          <p:attrName>style.visibility</p:attrName>
+                                        </p:attrNameLst>
+                                      </p:cBhvr>
+                                      <p:to>
+                                        <p:strVal val="visible"/>
+                                      </p:to>
+                                    </p:set>
+                                  </p:childTnLst>
+                                </p:cTn>
+                              </p:par>
+                            </p:childTnLst>
+                          </p:cTn>
+                        </p:par>
+                      </p:childTnLst>
+                    </p:cTn>
+                  </p:par>
+                  <p:par>
+                    <p:cTn id="47" fill="hold">
+                      <p:stCondLst>
+                        <p:cond delay="indefinite"/>
+                      </p:stCondLst>
+                      <p:childTnLst>
+                        <p:par>
+                          <p:cTn id="48" fill="hold">
+                            <p:stCondLst>
+                              <p:cond delay="0"/>
+                            </p:stCondLst>
+                            <p:childTnLst>
+                              <p:par>
+                                <p:cTn id="49" presetID="1" presetClass="entr" presetSubtype="0" fill="hold" grpId="0" nodeType="clickEffect">
+                                  <p:stCondLst>
+                                    <p:cond delay="0"/>
+                                  </p:stCondLst>
+                                  <p:childTnLst>
+                                    <p:set>
+                                      <p:cBhvr>
+                                        <p:cTn id="50" dur="1" fill="hold">
+                                          <p:stCondLst>
+                                            <p:cond delay="0"/>
+                                          </p:stCondLst>
+                                        </p:cTn>
+                                        <p:tgtEl>
+                                          <p:spTgt spid="3">
+                                            <p:txEl>
+                                              <p:pRg st="11" end="11"/>
+                                            </p:txEl>
+                                          </p:spTgt>
+                                        </p:tgtEl>
+                                        <p:attrNameLst>
+                                          <p:attrName>style.visibility</p:attrName>
+                                        </p:attrNameLst>
+                                      </p:cBhvr>
+                                      <p:to>
+                                        <p:strVal val="visible"/>
+                                      </p:to>
+                                    </p:set>
+                                  </p:childTnLst>
+                                </p:cTn>
+                              </p:par>
+                            </p:childTnLst>
+                          </p:cTn>
+                        </p:par>
+                      </p:childTnLst>
+                    </p:cTn>
+                  </p:par>
+                </p:childTnLst>
+              </p:cTn>
+              <p:prevCondLst>
+                <p:cond evt="onPrev" delay="0">
+                  <p:tgtEl>
+                    <p:sldTgt/>
+                  </p:tgtEl>
+                </p:cond>
+              </p:prevCondLst>
+              <p:nextCondLst>
+                <p:cond evt="onNext" delay="0">
+                  <p:tgtEl>
+                    <p:sldTgt/>
+                  </p:tgtEl>
+                </p:cond>
+              </p:nextCondLst>
+            </p:seq>
+          </p:childTnLst>
+        </p:cTn>
+      </p:par>
+    </p:tnLst>
+    <p:bldLst>
+      <p:bldP spid="3" grpId="0" build="p"/>
+    </p:bldLst>
+  </p:timing>
 </p:sld>
 </file>
 

--- a/PPTs/Lecture 7 - Routers Exercises ANS.pptx
+++ b/PPTs/Lecture 7 - Routers Exercises ANS.pptx
@@ -3,38 +3,60 @@
 <p:presentation xmlns:a="http://schemas.openxmlformats.org/drawingml/2006/main" xmlns:r="http://schemas.openxmlformats.org/officeDocument/2006/relationships" xmlns:p="http://schemas.openxmlformats.org/presentationml/2006/main" strictFirstAndLastChars="0" embedTrueTypeFonts="1" saveSubsetFonts="1" autoCompressPictures="0">
   <p:sldMasterIdLst>
     <p:sldMasterId id="2147483670" r:id="rId1"/>
+    <p:sldMasterId id="2147483672" r:id="rId2"/>
   </p:sldMasterIdLst>
   <p:notesMasterIdLst>
-    <p:notesMasterId r:id="rId5"/>
+    <p:notesMasterId r:id="rId9"/>
   </p:notesMasterIdLst>
   <p:sldIdLst>
-    <p:sldId id="256" r:id="rId2"/>
-    <p:sldId id="298" r:id="rId3"/>
-    <p:sldId id="299" r:id="rId4"/>
+    <p:sldId id="256" r:id="rId3"/>
+    <p:sldId id="298" r:id="rId4"/>
+    <p:sldId id="299" r:id="rId5"/>
+    <p:sldId id="265" r:id="rId6"/>
+    <p:sldId id="308" r:id="rId7"/>
+    <p:sldId id="309" r:id="rId8"/>
   </p:sldIdLst>
   <p:sldSz cx="9144000" cy="5143500" type="screen16x9"/>
   <p:notesSz cx="6858000" cy="9144000"/>
   <p:embeddedFontLst>
     <p:embeddedFont>
-      <p:font typeface="Roboto" panose="02000000000000000000" pitchFamily="2" charset="0"/>
-      <p:regular r:id="rId6"/>
-      <p:bold r:id="rId7"/>
-      <p:italic r:id="rId8"/>
-      <p:boldItalic r:id="rId9"/>
-    </p:embeddedFont>
-    <p:embeddedFont>
-      <p:font typeface="Roboto Light" panose="02000000000000000000" pitchFamily="2" charset="0"/>
+      <p:font typeface="Bookman Old Style" panose="02050604050505020204" pitchFamily="18" charset="0"/>
       <p:regular r:id="rId10"/>
       <p:bold r:id="rId11"/>
       <p:italic r:id="rId12"/>
       <p:boldItalic r:id="rId13"/>
     </p:embeddedFont>
     <p:embeddedFont>
-      <p:font typeface="Roboto Medium" panose="02000000000000000000" pitchFamily="2" charset="0"/>
+      <p:font typeface="Gill Sans MT" panose="020B0502020104020203" pitchFamily="34" charset="0"/>
       <p:regular r:id="rId14"/>
       <p:bold r:id="rId15"/>
       <p:italic r:id="rId16"/>
       <p:boldItalic r:id="rId17"/>
+    </p:embeddedFont>
+    <p:embeddedFont>
+      <p:font typeface="Roboto" panose="02000000000000000000" pitchFamily="2" charset="0"/>
+      <p:regular r:id="rId18"/>
+      <p:bold r:id="rId19"/>
+      <p:italic r:id="rId20"/>
+      <p:boldItalic r:id="rId21"/>
+    </p:embeddedFont>
+    <p:embeddedFont>
+      <p:font typeface="Roboto Light" panose="02000000000000000000" pitchFamily="2" charset="0"/>
+      <p:regular r:id="rId22"/>
+      <p:bold r:id="rId23"/>
+      <p:italic r:id="rId24"/>
+      <p:boldItalic r:id="rId25"/>
+    </p:embeddedFont>
+    <p:embeddedFont>
+      <p:font typeface="Roboto Medium" panose="02000000000000000000" pitchFamily="2" charset="0"/>
+      <p:regular r:id="rId26"/>
+      <p:bold r:id="rId27"/>
+      <p:italic r:id="rId28"/>
+      <p:boldItalic r:id="rId29"/>
+    </p:embeddedFont>
+    <p:embeddedFont>
+      <p:font typeface="Wingdings 3" panose="05040102010807070707" pitchFamily="18" charset="2"/>
+      <p:regular r:id="rId30"/>
     </p:embeddedFont>
   </p:embeddedFontLst>
   <p:defaultTextStyle>
@@ -1873,6 +1895,170 @@
 </p:notes>
 </file>
 
+<file path=ppt/notesSlides/notesSlide2.xml><?xml version="1.0" encoding="utf-8"?>
+<p:notes xmlns:a="http://schemas.openxmlformats.org/drawingml/2006/main" xmlns:r="http://schemas.openxmlformats.org/officeDocument/2006/relationships" xmlns:p="http://schemas.openxmlformats.org/presentationml/2006/main">
+  <p:cSld>
+    <p:spTree>
+      <p:nvGrpSpPr>
+        <p:cNvPr id="1" name=""/>
+        <p:cNvGrpSpPr/>
+        <p:nvPr/>
+      </p:nvGrpSpPr>
+      <p:grpSpPr>
+        <a:xfrm>
+          <a:off x="0" y="0"/>
+          <a:ext cx="0" cy="0"/>
+          <a:chOff x="0" y="0"/>
+          <a:chExt cx="0" cy="0"/>
+        </a:xfrm>
+      </p:grpSpPr>
+      <p:sp>
+        <p:nvSpPr>
+          <p:cNvPr id="2" name="Slide Image Placeholder 1"/>
+          <p:cNvSpPr>
+            <a:spLocks noGrp="1" noRot="1" noChangeAspect="1"/>
+          </p:cNvSpPr>
+          <p:nvPr>
+            <p:ph type="sldImg"/>
+          </p:nvPr>
+        </p:nvSpPr>
+        <p:spPr>
+          <a:xfrm>
+            <a:off x="381000" y="685800"/>
+            <a:ext cx="6096000" cy="3429000"/>
+          </a:xfrm>
+        </p:spPr>
+      </p:sp>
+      <p:sp>
+        <p:nvSpPr>
+          <p:cNvPr id="3" name="Notes Placeholder 2"/>
+          <p:cNvSpPr>
+            <a:spLocks noGrp="1"/>
+          </p:cNvSpPr>
+          <p:nvPr>
+            <p:ph type="body" idx="1"/>
+          </p:nvPr>
+        </p:nvSpPr>
+        <p:spPr/>
+        <p:txBody>
+          <a:bodyPr/>
+          <a:lstStyle/>
+          <a:p>
+            <a:r>
+              <a:rPr lang="en-US" altLang="zh-CN" dirty="0"/>
+              <a:t>0.0.0.0/0 1</a:t>
+            </a:r>
+            <a:br>
+              <a:rPr lang="en-US" altLang="zh-CN" dirty="0"/>
+            </a:br>
+            <a:r>
+              <a:rPr lang="en-US" altLang="zh-CN" dirty="0"/>
+              <a:t>32.0.0.0/3 2</a:t>
+            </a:r>
+            <a:br>
+              <a:rPr lang="en-US" altLang="zh-CN" dirty="0"/>
+            </a:br>
+            <a:r>
+              <a:rPr lang="en-US" altLang="zh-CN" dirty="0"/>
+              <a:t>64.0.0.0/3 2</a:t>
+            </a:r>
+            <a:br>
+              <a:rPr lang="en-US" altLang="zh-CN" dirty="0"/>
+            </a:br>
+            <a:r>
+              <a:rPr lang="en-US" altLang="zh-CN" dirty="0"/>
+              <a:t>96.0.0.0/3 3</a:t>
+            </a:r>
+            <a:br>
+              <a:rPr lang="en-US" altLang="zh-CN" dirty="0"/>
+            </a:br>
+            <a:r>
+              <a:rPr lang="en-US" altLang="zh-CN" dirty="0"/>
+              <a:t>128.0.0.0/3 4</a:t>
+            </a:r>
+            <a:endParaRPr lang="zh-CN" altLang="en-US" dirty="0"/>
+          </a:p>
+        </p:txBody>
+      </p:sp>
+    </p:spTree>
+    <p:extLst>
+      <p:ext uri="{BB962C8B-B14F-4D97-AF65-F5344CB8AC3E}">
+        <p14:creationId xmlns:p14="http://schemas.microsoft.com/office/powerpoint/2010/main" val="456440067"/>
+      </p:ext>
+    </p:extLst>
+  </p:cSld>
+  <p:clrMapOvr>
+    <a:masterClrMapping/>
+  </p:clrMapOvr>
+</p:notes>
+</file>
+
+<file path=ppt/notesSlides/notesSlide3.xml><?xml version="1.0" encoding="utf-8"?>
+<p:notes xmlns:a="http://schemas.openxmlformats.org/drawingml/2006/main" xmlns:r="http://schemas.openxmlformats.org/officeDocument/2006/relationships" xmlns:p="http://schemas.openxmlformats.org/presentationml/2006/main">
+  <p:cSld>
+    <p:spTree>
+      <p:nvGrpSpPr>
+        <p:cNvPr id="1" name=""/>
+        <p:cNvGrpSpPr/>
+        <p:nvPr/>
+      </p:nvGrpSpPr>
+      <p:grpSpPr>
+        <a:xfrm>
+          <a:off x="0" y="0"/>
+          <a:ext cx="0" cy="0"/>
+          <a:chOff x="0" y="0"/>
+          <a:chExt cx="0" cy="0"/>
+        </a:xfrm>
+      </p:grpSpPr>
+      <p:sp>
+        <p:nvSpPr>
+          <p:cNvPr id="2" name="Slide Image Placeholder 1"/>
+          <p:cNvSpPr>
+            <a:spLocks noGrp="1" noRot="1" noChangeAspect="1"/>
+          </p:cNvSpPr>
+          <p:nvPr>
+            <p:ph type="sldImg"/>
+          </p:nvPr>
+        </p:nvSpPr>
+        <p:spPr>
+          <a:xfrm>
+            <a:off x="381000" y="685800"/>
+            <a:ext cx="6096000" cy="3429000"/>
+          </a:xfrm>
+        </p:spPr>
+      </p:sp>
+      <p:sp>
+        <p:nvSpPr>
+          <p:cNvPr id="3" name="Notes Placeholder 2"/>
+          <p:cNvSpPr>
+            <a:spLocks noGrp="1"/>
+          </p:cNvSpPr>
+          <p:nvPr>
+            <p:ph type="body" idx="1"/>
+          </p:nvPr>
+        </p:nvSpPr>
+        <p:spPr/>
+        <p:txBody>
+          <a:bodyPr/>
+          <a:lstStyle/>
+          <a:p>
+            <a:endParaRPr lang="zh-CN" altLang="en-US" dirty="0"/>
+          </a:p>
+        </p:txBody>
+      </p:sp>
+    </p:spTree>
+    <p:extLst>
+      <p:ext uri="{BB962C8B-B14F-4D97-AF65-F5344CB8AC3E}">
+        <p14:creationId xmlns:p14="http://schemas.microsoft.com/office/powerpoint/2010/main" val="1058018573"/>
+      </p:ext>
+    </p:extLst>
+  </p:cSld>
+  <p:clrMapOvr>
+    <a:masterClrMapping/>
+  </p:clrMapOvr>
+</p:notes>
+</file>
+
 <file path=ppt/slideLayouts/slideLayout1.xml><?xml version="1.0" encoding="utf-8"?>
 <p:sldLayout xmlns:a="http://schemas.openxmlformats.org/drawingml/2006/main" xmlns:r="http://schemas.openxmlformats.org/officeDocument/2006/relationships" xmlns:p="http://schemas.openxmlformats.org/presentationml/2006/main" matchingName="Title slide" type="title">
   <p:cSld name="TITLE">
@@ -7527,6 +7713,2604 @@
 </p:sldLayout>
 </file>
 
+<file path=ppt/slideLayouts/slideLayout21.xml><?xml version="1.0" encoding="utf-8"?>
+<p:sldLayout xmlns:a="http://schemas.openxmlformats.org/drawingml/2006/main" xmlns:r="http://schemas.openxmlformats.org/officeDocument/2006/relationships" xmlns:p="http://schemas.openxmlformats.org/presentationml/2006/main" showMasterSp="0" type="title" preserve="1">
+  <p:cSld name="Title Slide">
+    <p:spTree>
+      <p:nvGrpSpPr>
+        <p:cNvPr id="1" name=""/>
+        <p:cNvGrpSpPr/>
+        <p:nvPr/>
+      </p:nvGrpSpPr>
+      <p:grpSpPr>
+        <a:xfrm>
+          <a:off x="0" y="0"/>
+          <a:ext cx="0" cy="0"/>
+          <a:chOff x="0" y="0"/>
+          <a:chExt cx="0" cy="0"/>
+        </a:xfrm>
+      </p:grpSpPr>
+      <p:sp>
+        <p:nvSpPr>
+          <p:cNvPr id="8" name="Title 7"/>
+          <p:cNvSpPr>
+            <a:spLocks noGrp="1"/>
+          </p:cNvSpPr>
+          <p:nvPr>
+            <p:ph type="ctrTitle"/>
+          </p:nvPr>
+        </p:nvSpPr>
+        <p:spPr>
+          <a:xfrm>
+            <a:off x="1219200" y="2914650"/>
+            <a:ext cx="6858000" cy="742950"/>
+          </a:xfrm>
+        </p:spPr>
+        <p:txBody>
+          <a:bodyPr anchor="t" anchorCtr="0"/>
+          <a:lstStyle>
+            <a:lvl1pPr algn="r">
+              <a:defRPr sz="2400">
+                <a:solidFill>
+                  <a:schemeClr val="tx1"/>
+                </a:solidFill>
+              </a:defRPr>
+            </a:lvl1pPr>
+          </a:lstStyle>
+          <a:p>
+            <a:r>
+              <a:rPr kumimoji="0" lang="en-US"/>
+              <a:t>Click to edit Master title style</a:t>
+            </a:r>
+          </a:p>
+        </p:txBody>
+      </p:sp>
+      <p:sp>
+        <p:nvSpPr>
+          <p:cNvPr id="9" name="Subtitle 8"/>
+          <p:cNvSpPr>
+            <a:spLocks noGrp="1"/>
+          </p:cNvSpPr>
+          <p:nvPr>
+            <p:ph type="subTitle" idx="1"/>
+          </p:nvPr>
+        </p:nvSpPr>
+        <p:spPr>
+          <a:xfrm>
+            <a:off x="1219200" y="3843338"/>
+            <a:ext cx="6858000" cy="400050"/>
+          </a:xfrm>
+        </p:spPr>
+        <p:txBody>
+          <a:bodyPr/>
+          <a:lstStyle>
+            <a:lvl1pPr marL="0" indent="0" algn="r">
+              <a:buNone/>
+              <a:defRPr sz="1500">
+                <a:solidFill>
+                  <a:schemeClr val="tx2"/>
+                </a:solidFill>
+                <a:latin typeface="+mj-lt"/>
+                <a:ea typeface="+mj-ea"/>
+                <a:cs typeface="+mj-cs"/>
+              </a:defRPr>
+            </a:lvl1pPr>
+            <a:lvl2pPr marL="342900" indent="0" algn="ctr">
+              <a:buNone/>
+            </a:lvl2pPr>
+            <a:lvl3pPr marL="685800" indent="0" algn="ctr">
+              <a:buNone/>
+            </a:lvl3pPr>
+            <a:lvl4pPr marL="1028700" indent="0" algn="ctr">
+              <a:buNone/>
+            </a:lvl4pPr>
+            <a:lvl5pPr marL="1371600" indent="0" algn="ctr">
+              <a:buNone/>
+            </a:lvl5pPr>
+            <a:lvl6pPr marL="1714500" indent="0" algn="ctr">
+              <a:buNone/>
+            </a:lvl6pPr>
+            <a:lvl7pPr marL="2057400" indent="0" algn="ctr">
+              <a:buNone/>
+            </a:lvl7pPr>
+            <a:lvl8pPr marL="2400300" indent="0" algn="ctr">
+              <a:buNone/>
+            </a:lvl8pPr>
+            <a:lvl9pPr marL="2743200" indent="0" algn="ctr">
+              <a:buNone/>
+            </a:lvl9pPr>
+          </a:lstStyle>
+          <a:p>
+            <a:r>
+              <a:rPr kumimoji="0" lang="en-US"/>
+              <a:t>Click to edit Master subtitle style</a:t>
+            </a:r>
+          </a:p>
+        </p:txBody>
+      </p:sp>
+      <p:sp>
+        <p:nvSpPr>
+          <p:cNvPr id="28" name="Date Placeholder 27"/>
+          <p:cNvSpPr>
+            <a:spLocks noGrp="1"/>
+          </p:cNvSpPr>
+          <p:nvPr>
+            <p:ph type="dt" sz="half" idx="10"/>
+          </p:nvPr>
+        </p:nvSpPr>
+        <p:spPr>
+          <a:xfrm>
+            <a:off x="6400800" y="4766310"/>
+            <a:ext cx="2286000" cy="274320"/>
+          </a:xfrm>
+        </p:spPr>
+        <p:txBody>
+          <a:bodyPr/>
+          <a:lstStyle>
+            <a:lvl1pPr>
+              <a:defRPr sz="1050"/>
+            </a:lvl1pPr>
+          </a:lstStyle>
+          <a:p>
+            <a:pPr eaLnBrk="1" latinLnBrk="0" hangingPunct="1"/>
+            <a:fld id="{2E26774B-6488-4259-9342-6CBDB2BFD4E4}" type="datetime1">
+              <a:rPr lang="en-US" smtClean="0"/>
+              <a:pPr eaLnBrk="1" latinLnBrk="0" hangingPunct="1"/>
+              <a:t>3/30/2026</a:t>
+            </a:fld>
+            <a:endParaRPr lang="en-US" sz="1200" dirty="0"/>
+          </a:p>
+        </p:txBody>
+      </p:sp>
+      <p:sp>
+        <p:nvSpPr>
+          <p:cNvPr id="17" name="Footer Placeholder 16"/>
+          <p:cNvSpPr>
+            <a:spLocks noGrp="1"/>
+          </p:cNvSpPr>
+          <p:nvPr>
+            <p:ph type="ftr" sz="quarter" idx="11"/>
+          </p:nvPr>
+        </p:nvSpPr>
+        <p:spPr>
+          <a:xfrm>
+            <a:off x="2898648" y="4766310"/>
+            <a:ext cx="3474720" cy="274320"/>
+          </a:xfrm>
+        </p:spPr>
+        <p:txBody>
+          <a:bodyPr/>
+          <a:lstStyle/>
+          <a:p>
+            <a:endParaRPr kumimoji="0" lang="en-US" dirty="0"/>
+          </a:p>
+        </p:txBody>
+      </p:sp>
+      <p:sp>
+        <p:nvSpPr>
+          <p:cNvPr id="29" name="Slide Number Placeholder 28"/>
+          <p:cNvSpPr>
+            <a:spLocks noGrp="1"/>
+          </p:cNvSpPr>
+          <p:nvPr>
+            <p:ph type="sldNum" sz="quarter" idx="12"/>
+          </p:nvPr>
+        </p:nvSpPr>
+        <p:spPr>
+          <a:xfrm>
+            <a:off x="1216152" y="4766310"/>
+            <a:ext cx="1219200" cy="274320"/>
+          </a:xfrm>
+        </p:spPr>
+        <p:txBody>
+          <a:bodyPr/>
+          <a:lstStyle/>
+          <a:p>
+            <a:fld id="{EA7C8D44-3667-46F6-9772-CC52308E2A7F}" type="slidenum">
+              <a:rPr kumimoji="0" lang="en-US" smtClean="0"/>
+              <a:pPr/>
+              <a:t>‹#›</a:t>
+            </a:fld>
+            <a:endParaRPr kumimoji="0" lang="en-US" dirty="0"/>
+          </a:p>
+        </p:txBody>
+      </p:sp>
+      <p:sp>
+        <p:nvSpPr>
+          <p:cNvPr id="21" name="Rectangle 20"/>
+          <p:cNvSpPr/>
+          <p:nvPr/>
+        </p:nvSpPr>
+        <p:spPr>
+          <a:xfrm>
+            <a:off x="904875" y="2736056"/>
+            <a:ext cx="7315200" cy="960120"/>
+          </a:xfrm>
+          <a:prstGeom prst="rect">
+            <a:avLst/>
+          </a:prstGeom>
+          <a:noFill/>
+          <a:ln w="6350" cap="rnd" cmpd="sng" algn="ctr">
+            <a:solidFill>
+              <a:schemeClr val="accent1"/>
+            </a:solidFill>
+            <a:prstDash val="solid"/>
+          </a:ln>
+          <a:effectLst/>
+        </p:spPr>
+        <p:style>
+          <a:lnRef idx="3">
+            <a:schemeClr val="lt1"/>
+          </a:lnRef>
+          <a:fillRef idx="1">
+            <a:schemeClr val="accent1"/>
+          </a:fillRef>
+          <a:effectRef idx="1">
+            <a:schemeClr val="accent1"/>
+          </a:effectRef>
+          <a:fontRef idx="minor">
+            <a:schemeClr val="lt1"/>
+          </a:fontRef>
+        </p:style>
+        <p:txBody>
+          <a:bodyPr anchor="ctr"/>
+          <a:lstStyle/>
+          <a:p>
+            <a:pPr algn="ctr" eaLnBrk="1" latinLnBrk="0" hangingPunct="1"/>
+            <a:endParaRPr kumimoji="0" lang="en-US" sz="1350"/>
+          </a:p>
+        </p:txBody>
+      </p:sp>
+      <p:sp>
+        <p:nvSpPr>
+          <p:cNvPr id="33" name="Rectangle 32"/>
+          <p:cNvSpPr/>
+          <p:nvPr/>
+        </p:nvSpPr>
+        <p:spPr>
+          <a:xfrm>
+            <a:off x="914400" y="3786188"/>
+            <a:ext cx="7315200" cy="514350"/>
+          </a:xfrm>
+          <a:prstGeom prst="rect">
+            <a:avLst/>
+          </a:prstGeom>
+          <a:noFill/>
+          <a:ln w="6350" cap="rnd" cmpd="sng" algn="ctr">
+            <a:solidFill>
+              <a:schemeClr val="accent2"/>
+            </a:solidFill>
+            <a:prstDash val="solid"/>
+          </a:ln>
+          <a:effectLst/>
+        </p:spPr>
+        <p:style>
+          <a:lnRef idx="3">
+            <a:schemeClr val="lt1"/>
+          </a:lnRef>
+          <a:fillRef idx="1">
+            <a:schemeClr val="accent1"/>
+          </a:fillRef>
+          <a:effectRef idx="1">
+            <a:schemeClr val="accent1"/>
+          </a:effectRef>
+          <a:fontRef idx="minor">
+            <a:schemeClr val="lt1"/>
+          </a:fontRef>
+        </p:style>
+        <p:txBody>
+          <a:bodyPr anchor="ctr"/>
+          <a:lstStyle/>
+          <a:p>
+            <a:pPr algn="ctr" eaLnBrk="1" latinLnBrk="0" hangingPunct="1"/>
+            <a:endParaRPr kumimoji="0" lang="en-US" sz="1350"/>
+          </a:p>
+        </p:txBody>
+      </p:sp>
+      <p:sp>
+        <p:nvSpPr>
+          <p:cNvPr id="22" name="Rectangle 21"/>
+          <p:cNvSpPr/>
+          <p:nvPr/>
+        </p:nvSpPr>
+        <p:spPr>
+          <a:xfrm>
+            <a:off x="904875" y="2736056"/>
+            <a:ext cx="228600" cy="960120"/>
+          </a:xfrm>
+          <a:prstGeom prst="rect">
+            <a:avLst/>
+          </a:prstGeom>
+          <a:solidFill>
+            <a:schemeClr val="accent1"/>
+          </a:solidFill>
+          <a:ln w="6350" cap="rnd" cmpd="sng" algn="ctr">
+            <a:noFill/>
+            <a:prstDash val="solid"/>
+          </a:ln>
+          <a:effectLst/>
+        </p:spPr>
+        <p:style>
+          <a:lnRef idx="3">
+            <a:schemeClr val="lt1"/>
+          </a:lnRef>
+          <a:fillRef idx="1">
+            <a:schemeClr val="accent1"/>
+          </a:fillRef>
+          <a:effectRef idx="1">
+            <a:schemeClr val="accent1"/>
+          </a:effectRef>
+          <a:fontRef idx="minor">
+            <a:schemeClr val="lt1"/>
+          </a:fontRef>
+        </p:style>
+        <p:txBody>
+          <a:bodyPr anchor="ctr"/>
+          <a:lstStyle/>
+          <a:p>
+            <a:pPr algn="ctr" eaLnBrk="1" latinLnBrk="0" hangingPunct="1"/>
+            <a:endParaRPr kumimoji="0" lang="en-US" sz="1350"/>
+          </a:p>
+        </p:txBody>
+      </p:sp>
+      <p:sp>
+        <p:nvSpPr>
+          <p:cNvPr id="32" name="Rectangle 31"/>
+          <p:cNvSpPr/>
+          <p:nvPr/>
+        </p:nvSpPr>
+        <p:spPr>
+          <a:xfrm>
+            <a:off x="914400" y="3786188"/>
+            <a:ext cx="228600" cy="514350"/>
+          </a:xfrm>
+          <a:prstGeom prst="rect">
+            <a:avLst/>
+          </a:prstGeom>
+          <a:solidFill>
+            <a:schemeClr val="accent2"/>
+          </a:solidFill>
+          <a:ln w="6350" cap="rnd" cmpd="sng" algn="ctr">
+            <a:noFill/>
+            <a:prstDash val="solid"/>
+          </a:ln>
+          <a:effectLst/>
+        </p:spPr>
+        <p:style>
+          <a:lnRef idx="3">
+            <a:schemeClr val="lt1"/>
+          </a:lnRef>
+          <a:fillRef idx="1">
+            <a:schemeClr val="accent1"/>
+          </a:fillRef>
+          <a:effectRef idx="1">
+            <a:schemeClr val="accent1"/>
+          </a:effectRef>
+          <a:fontRef idx="minor">
+            <a:schemeClr val="lt1"/>
+          </a:fontRef>
+        </p:style>
+        <p:txBody>
+          <a:bodyPr anchor="ctr"/>
+          <a:lstStyle/>
+          <a:p>
+            <a:pPr algn="ctr" eaLnBrk="1" latinLnBrk="0" hangingPunct="1"/>
+            <a:endParaRPr kumimoji="0" lang="en-US" sz="1350"/>
+          </a:p>
+        </p:txBody>
+      </p:sp>
+    </p:spTree>
+    <p:extLst>
+      <p:ext uri="{BB962C8B-B14F-4D97-AF65-F5344CB8AC3E}">
+        <p14:creationId xmlns:p14="http://schemas.microsoft.com/office/powerpoint/2010/main" val="3193623203"/>
+      </p:ext>
+    </p:extLst>
+  </p:cSld>
+  <p:clrMapOvr>
+    <a:masterClrMapping/>
+  </p:clrMapOvr>
+</p:sldLayout>
+</file>
+
+<file path=ppt/slideLayouts/slideLayout22.xml><?xml version="1.0" encoding="utf-8"?>
+<p:sldLayout xmlns:a="http://schemas.openxmlformats.org/drawingml/2006/main" xmlns:r="http://schemas.openxmlformats.org/officeDocument/2006/relationships" xmlns:p="http://schemas.openxmlformats.org/presentationml/2006/main" type="obj" preserve="1">
+  <p:cSld name="Title and Content">
+    <p:spTree>
+      <p:nvGrpSpPr>
+        <p:cNvPr id="1" name=""/>
+        <p:cNvGrpSpPr/>
+        <p:nvPr/>
+      </p:nvGrpSpPr>
+      <p:grpSpPr>
+        <a:xfrm>
+          <a:off x="0" y="0"/>
+          <a:ext cx="0" cy="0"/>
+          <a:chOff x="0" y="0"/>
+          <a:chExt cx="0" cy="0"/>
+        </a:xfrm>
+      </p:grpSpPr>
+      <p:sp>
+        <p:nvSpPr>
+          <p:cNvPr id="2" name="Title 1"/>
+          <p:cNvSpPr>
+            <a:spLocks noGrp="1"/>
+          </p:cNvSpPr>
+          <p:nvPr>
+            <p:ph type="title"/>
+          </p:nvPr>
+        </p:nvSpPr>
+        <p:spPr/>
+        <p:txBody>
+          <a:bodyPr/>
+          <a:lstStyle/>
+          <a:p>
+            <a:r>
+              <a:rPr kumimoji="0" lang="en-US"/>
+              <a:t>Click to edit Master title style</a:t>
+            </a:r>
+          </a:p>
+        </p:txBody>
+      </p:sp>
+      <p:sp>
+        <p:nvSpPr>
+          <p:cNvPr id="4" name="Date Placeholder 3"/>
+          <p:cNvSpPr>
+            <a:spLocks noGrp="1"/>
+          </p:cNvSpPr>
+          <p:nvPr>
+            <p:ph type="dt" sz="half" idx="10"/>
+          </p:nvPr>
+        </p:nvSpPr>
+        <p:spPr/>
+        <p:txBody>
+          <a:bodyPr/>
+          <a:lstStyle/>
+          <a:p>
+            <a:pPr eaLnBrk="1" latinLnBrk="0" hangingPunct="1"/>
+            <a:fld id="{B0F52420-10F8-488E-969A-A9BE388BE9C4}" type="datetime1">
+              <a:rPr lang="en-US" smtClean="0"/>
+              <a:pPr eaLnBrk="1" latinLnBrk="0" hangingPunct="1"/>
+              <a:t>3/30/2026</a:t>
+            </a:fld>
+            <a:endParaRPr lang="en-US" dirty="0"/>
+          </a:p>
+        </p:txBody>
+      </p:sp>
+      <p:sp>
+        <p:nvSpPr>
+          <p:cNvPr id="5" name="Footer Placeholder 4"/>
+          <p:cNvSpPr>
+            <a:spLocks noGrp="1"/>
+          </p:cNvSpPr>
+          <p:nvPr>
+            <p:ph type="ftr" sz="quarter" idx="11"/>
+          </p:nvPr>
+        </p:nvSpPr>
+        <p:spPr/>
+        <p:txBody>
+          <a:bodyPr/>
+          <a:lstStyle/>
+          <a:p>
+            <a:endParaRPr kumimoji="0" lang="en-US"/>
+          </a:p>
+        </p:txBody>
+      </p:sp>
+      <p:sp>
+        <p:nvSpPr>
+          <p:cNvPr id="6" name="Slide Number Placeholder 5"/>
+          <p:cNvSpPr>
+            <a:spLocks noGrp="1"/>
+          </p:cNvSpPr>
+          <p:nvPr>
+            <p:ph type="sldNum" sz="quarter" idx="12"/>
+          </p:nvPr>
+        </p:nvSpPr>
+        <p:spPr/>
+        <p:txBody>
+          <a:bodyPr/>
+          <a:lstStyle/>
+          <a:p>
+            <a:fld id="{EA7C8D44-3667-46F6-9772-CC52308E2A7F}" type="slidenum">
+              <a:rPr kumimoji="0" lang="en-US" smtClean="0"/>
+              <a:pPr/>
+              <a:t>‹#›</a:t>
+            </a:fld>
+            <a:endParaRPr kumimoji="0" lang="en-US" dirty="0"/>
+          </a:p>
+        </p:txBody>
+      </p:sp>
+      <p:sp>
+        <p:nvSpPr>
+          <p:cNvPr id="8" name="Content Placeholder 7"/>
+          <p:cNvSpPr>
+            <a:spLocks noGrp="1"/>
+          </p:cNvSpPr>
+          <p:nvPr>
+            <p:ph sz="quarter" idx="1"/>
+          </p:nvPr>
+        </p:nvSpPr>
+        <p:spPr>
+          <a:xfrm>
+            <a:off x="457200" y="914400"/>
+            <a:ext cx="8229600" cy="3703320"/>
+          </a:xfrm>
+        </p:spPr>
+        <p:txBody>
+          <a:bodyPr/>
+          <a:lstStyle/>
+          <a:p>
+            <a:pPr lvl="0" eaLnBrk="1" latinLnBrk="0" hangingPunct="1"/>
+            <a:r>
+              <a:rPr lang="en-US"/>
+              <a:t>Click to edit Master text styles</a:t>
+            </a:r>
+          </a:p>
+          <a:p>
+            <a:pPr lvl="1" eaLnBrk="1" latinLnBrk="0" hangingPunct="1"/>
+            <a:r>
+              <a:rPr lang="en-US"/>
+              <a:t>Second level</a:t>
+            </a:r>
+          </a:p>
+          <a:p>
+            <a:pPr lvl="2" eaLnBrk="1" latinLnBrk="0" hangingPunct="1"/>
+            <a:r>
+              <a:rPr lang="en-US"/>
+              <a:t>Third level</a:t>
+            </a:r>
+          </a:p>
+          <a:p>
+            <a:pPr lvl="3" eaLnBrk="1" latinLnBrk="0" hangingPunct="1"/>
+            <a:r>
+              <a:rPr lang="en-US"/>
+              <a:t>Fourth level</a:t>
+            </a:r>
+          </a:p>
+          <a:p>
+            <a:pPr lvl="4" eaLnBrk="1" latinLnBrk="0" hangingPunct="1"/>
+            <a:r>
+              <a:rPr lang="en-US"/>
+              <a:t>Fifth level</a:t>
+            </a:r>
+            <a:endParaRPr kumimoji="0" lang="en-US"/>
+          </a:p>
+        </p:txBody>
+      </p:sp>
+    </p:spTree>
+    <p:extLst>
+      <p:ext uri="{BB962C8B-B14F-4D97-AF65-F5344CB8AC3E}">
+        <p14:creationId xmlns:p14="http://schemas.microsoft.com/office/powerpoint/2010/main" val="3251701438"/>
+      </p:ext>
+    </p:extLst>
+  </p:cSld>
+  <p:clrMapOvr>
+    <a:masterClrMapping/>
+  </p:clrMapOvr>
+</p:sldLayout>
+</file>
+
+<file path=ppt/slideLayouts/slideLayout23.xml><?xml version="1.0" encoding="utf-8"?>
+<p:sldLayout xmlns:a="http://schemas.openxmlformats.org/drawingml/2006/main" xmlns:r="http://schemas.openxmlformats.org/officeDocument/2006/relationships" xmlns:p="http://schemas.openxmlformats.org/presentationml/2006/main" showMasterSp="0" type="secHead" preserve="1">
+  <p:cSld name="Section Header">
+    <p:bg>
+      <p:bgRef idx="1001">
+        <a:schemeClr val="bg2"/>
+      </p:bgRef>
+    </p:bg>
+    <p:spTree>
+      <p:nvGrpSpPr>
+        <p:cNvPr id="1" name=""/>
+        <p:cNvGrpSpPr/>
+        <p:nvPr/>
+      </p:nvGrpSpPr>
+      <p:grpSpPr>
+        <a:xfrm>
+          <a:off x="0" y="0"/>
+          <a:ext cx="0" cy="0"/>
+          <a:chOff x="0" y="0"/>
+          <a:chExt cx="0" cy="0"/>
+        </a:xfrm>
+      </p:grpSpPr>
+      <p:sp>
+        <p:nvSpPr>
+          <p:cNvPr id="2" name="Title 1"/>
+          <p:cNvSpPr>
+            <a:spLocks noGrp="1"/>
+          </p:cNvSpPr>
+          <p:nvPr>
+            <p:ph type="title"/>
+          </p:nvPr>
+        </p:nvSpPr>
+        <p:spPr>
+          <a:xfrm>
+            <a:off x="1219200" y="2228850"/>
+            <a:ext cx="6858000" cy="800100"/>
+          </a:xfrm>
+        </p:spPr>
+        <p:txBody>
+          <a:bodyPr anchor="t" anchorCtr="0"/>
+          <a:lstStyle>
+            <a:lvl1pPr algn="r">
+              <a:buNone/>
+              <a:defRPr sz="2400" b="0" cap="none" baseline="0"/>
+            </a:lvl1pPr>
+          </a:lstStyle>
+          <a:p>
+            <a:r>
+              <a:rPr kumimoji="0" lang="en-US"/>
+              <a:t>Click to edit Master title style</a:t>
+            </a:r>
+          </a:p>
+        </p:txBody>
+      </p:sp>
+      <p:sp>
+        <p:nvSpPr>
+          <p:cNvPr id="3" name="Text Placeholder 2"/>
+          <p:cNvSpPr>
+            <a:spLocks noGrp="1"/>
+          </p:cNvSpPr>
+          <p:nvPr>
+            <p:ph type="body" idx="1"/>
+          </p:nvPr>
+        </p:nvSpPr>
+        <p:spPr>
+          <a:xfrm>
+            <a:off x="1295400" y="3200400"/>
+            <a:ext cx="6781800" cy="857250"/>
+          </a:xfrm>
+        </p:spPr>
+        <p:txBody>
+          <a:bodyPr anchor="t" anchorCtr="0"/>
+          <a:lstStyle>
+            <a:lvl1pPr marL="0" indent="0" algn="r">
+              <a:buNone/>
+              <a:defRPr sz="1500">
+                <a:solidFill>
+                  <a:schemeClr val="tx1">
+                    <a:tint val="75000"/>
+                  </a:schemeClr>
+                </a:solidFill>
+              </a:defRPr>
+            </a:lvl1pPr>
+            <a:lvl2pPr>
+              <a:buNone/>
+              <a:defRPr sz="1350">
+                <a:solidFill>
+                  <a:schemeClr val="tx1">
+                    <a:tint val="75000"/>
+                  </a:schemeClr>
+                </a:solidFill>
+              </a:defRPr>
+            </a:lvl2pPr>
+            <a:lvl3pPr>
+              <a:buNone/>
+              <a:defRPr sz="1200">
+                <a:solidFill>
+                  <a:schemeClr val="tx1">
+                    <a:tint val="75000"/>
+                  </a:schemeClr>
+                </a:solidFill>
+              </a:defRPr>
+            </a:lvl3pPr>
+            <a:lvl4pPr>
+              <a:buNone/>
+              <a:defRPr sz="1050">
+                <a:solidFill>
+                  <a:schemeClr val="tx1">
+                    <a:tint val="75000"/>
+                  </a:schemeClr>
+                </a:solidFill>
+              </a:defRPr>
+            </a:lvl4pPr>
+            <a:lvl5pPr>
+              <a:buNone/>
+              <a:defRPr sz="1050">
+                <a:solidFill>
+                  <a:schemeClr val="tx1">
+                    <a:tint val="75000"/>
+                  </a:schemeClr>
+                </a:solidFill>
+              </a:defRPr>
+            </a:lvl5pPr>
+          </a:lstStyle>
+          <a:p>
+            <a:pPr lvl="0" eaLnBrk="1" latinLnBrk="0" hangingPunct="1"/>
+            <a:r>
+              <a:rPr kumimoji="0" lang="en-US"/>
+              <a:t>Click to edit Master text styles</a:t>
+            </a:r>
+          </a:p>
+        </p:txBody>
+      </p:sp>
+      <p:sp>
+        <p:nvSpPr>
+          <p:cNvPr id="4" name="Date Placeholder 3"/>
+          <p:cNvSpPr>
+            <a:spLocks noGrp="1"/>
+          </p:cNvSpPr>
+          <p:nvPr>
+            <p:ph type="dt" sz="half" idx="10"/>
+          </p:nvPr>
+        </p:nvSpPr>
+        <p:spPr>
+          <a:xfrm>
+            <a:off x="6400800" y="4766310"/>
+            <a:ext cx="2286000" cy="274320"/>
+          </a:xfrm>
+        </p:spPr>
+        <p:txBody>
+          <a:bodyPr/>
+          <a:lstStyle/>
+          <a:p>
+            <a:pPr eaLnBrk="1" latinLnBrk="0" hangingPunct="1"/>
+            <a:fld id="{96E96F24-58CF-47DA-907C-A9CD6353E425}" type="datetime1">
+              <a:rPr lang="en-US" smtClean="0"/>
+              <a:pPr eaLnBrk="1" latinLnBrk="0" hangingPunct="1"/>
+              <a:t>3/30/2026</a:t>
+            </a:fld>
+            <a:endParaRPr lang="en-US" dirty="0"/>
+          </a:p>
+        </p:txBody>
+      </p:sp>
+      <p:sp>
+        <p:nvSpPr>
+          <p:cNvPr id="5" name="Footer Placeholder 4"/>
+          <p:cNvSpPr>
+            <a:spLocks noGrp="1"/>
+          </p:cNvSpPr>
+          <p:nvPr>
+            <p:ph type="ftr" sz="quarter" idx="11"/>
+          </p:nvPr>
+        </p:nvSpPr>
+        <p:spPr>
+          <a:xfrm>
+            <a:off x="2898648" y="4766310"/>
+            <a:ext cx="3474720" cy="274320"/>
+          </a:xfrm>
+        </p:spPr>
+        <p:txBody>
+          <a:bodyPr/>
+          <a:lstStyle/>
+          <a:p>
+            <a:endParaRPr kumimoji="0" lang="en-US" dirty="0"/>
+          </a:p>
+        </p:txBody>
+      </p:sp>
+      <p:sp>
+        <p:nvSpPr>
+          <p:cNvPr id="6" name="Slide Number Placeholder 5"/>
+          <p:cNvSpPr>
+            <a:spLocks noGrp="1"/>
+          </p:cNvSpPr>
+          <p:nvPr>
+            <p:ph type="sldNum" sz="quarter" idx="12"/>
+          </p:nvPr>
+        </p:nvSpPr>
+        <p:spPr>
+          <a:xfrm>
+            <a:off x="1069848" y="4766310"/>
+            <a:ext cx="1520952" cy="274320"/>
+          </a:xfrm>
+        </p:spPr>
+        <p:txBody>
+          <a:bodyPr/>
+          <a:lstStyle/>
+          <a:p>
+            <a:fld id="{EA7C8D44-3667-46F6-9772-CC52308E2A7F}" type="slidenum">
+              <a:rPr kumimoji="0" lang="en-US" smtClean="0"/>
+              <a:pPr/>
+              <a:t>‹#›</a:t>
+            </a:fld>
+            <a:endParaRPr kumimoji="0" lang="en-US" dirty="0"/>
+          </a:p>
+        </p:txBody>
+      </p:sp>
+      <p:sp>
+        <p:nvSpPr>
+          <p:cNvPr id="7" name="Rectangle 6"/>
+          <p:cNvSpPr/>
+          <p:nvPr/>
+        </p:nvSpPr>
+        <p:spPr>
+          <a:xfrm>
+            <a:off x="914400" y="2114550"/>
+            <a:ext cx="7315200" cy="960120"/>
+          </a:xfrm>
+          <a:prstGeom prst="rect">
+            <a:avLst/>
+          </a:prstGeom>
+          <a:noFill/>
+          <a:ln w="6350" cap="rnd" cmpd="sng" algn="ctr">
+            <a:solidFill>
+              <a:schemeClr val="accent1"/>
+            </a:solidFill>
+            <a:prstDash val="solid"/>
+          </a:ln>
+          <a:effectLst/>
+        </p:spPr>
+        <p:style>
+          <a:lnRef idx="3">
+            <a:schemeClr val="lt1"/>
+          </a:lnRef>
+          <a:fillRef idx="1">
+            <a:schemeClr val="accent1"/>
+          </a:fillRef>
+          <a:effectRef idx="1">
+            <a:schemeClr val="accent1"/>
+          </a:effectRef>
+          <a:fontRef idx="minor">
+            <a:schemeClr val="lt1"/>
+          </a:fontRef>
+        </p:style>
+        <p:txBody>
+          <a:bodyPr anchor="ctr"/>
+          <a:lstStyle/>
+          <a:p>
+            <a:pPr algn="ctr" eaLnBrk="1" latinLnBrk="0" hangingPunct="1"/>
+            <a:endParaRPr kumimoji="0" lang="en-US" sz="1350"/>
+          </a:p>
+        </p:txBody>
+      </p:sp>
+      <p:sp>
+        <p:nvSpPr>
+          <p:cNvPr id="8" name="Rectangle 7"/>
+          <p:cNvSpPr/>
+          <p:nvPr/>
+        </p:nvSpPr>
+        <p:spPr>
+          <a:xfrm>
+            <a:off x="914400" y="2114550"/>
+            <a:ext cx="228600" cy="960120"/>
+          </a:xfrm>
+          <a:prstGeom prst="rect">
+            <a:avLst/>
+          </a:prstGeom>
+          <a:solidFill>
+            <a:schemeClr val="accent1"/>
+          </a:solidFill>
+          <a:ln w="6350" cap="rnd" cmpd="sng" algn="ctr">
+            <a:noFill/>
+            <a:prstDash val="solid"/>
+          </a:ln>
+          <a:effectLst/>
+        </p:spPr>
+        <p:style>
+          <a:lnRef idx="3">
+            <a:schemeClr val="lt1"/>
+          </a:lnRef>
+          <a:fillRef idx="1">
+            <a:schemeClr val="accent1"/>
+          </a:fillRef>
+          <a:effectRef idx="1">
+            <a:schemeClr val="accent1"/>
+          </a:effectRef>
+          <a:fontRef idx="minor">
+            <a:schemeClr val="lt1"/>
+          </a:fontRef>
+        </p:style>
+        <p:txBody>
+          <a:bodyPr anchor="ctr"/>
+          <a:lstStyle/>
+          <a:p>
+            <a:pPr algn="ctr" eaLnBrk="1" latinLnBrk="0" hangingPunct="1"/>
+            <a:endParaRPr kumimoji="0" lang="en-US" sz="1350"/>
+          </a:p>
+        </p:txBody>
+      </p:sp>
+    </p:spTree>
+    <p:extLst>
+      <p:ext uri="{BB962C8B-B14F-4D97-AF65-F5344CB8AC3E}">
+        <p14:creationId xmlns:p14="http://schemas.microsoft.com/office/powerpoint/2010/main" val="2295234855"/>
+      </p:ext>
+    </p:extLst>
+  </p:cSld>
+  <p:clrMapOvr>
+    <a:overrideClrMapping bg1="dk1" tx1="lt1" bg2="dk2" tx2="lt2" accent1="accent1" accent2="accent2" accent3="accent3" accent4="accent4" accent5="accent5" accent6="accent6" hlink="hlink" folHlink="folHlink"/>
+  </p:clrMapOvr>
+</p:sldLayout>
+</file>
+
+<file path=ppt/slideLayouts/slideLayout24.xml><?xml version="1.0" encoding="utf-8"?>
+<p:sldLayout xmlns:a="http://schemas.openxmlformats.org/drawingml/2006/main" xmlns:r="http://schemas.openxmlformats.org/officeDocument/2006/relationships" xmlns:p="http://schemas.openxmlformats.org/presentationml/2006/main" type="twoObj" preserve="1">
+  <p:cSld name="Two Content">
+    <p:spTree>
+      <p:nvGrpSpPr>
+        <p:cNvPr id="1" name=""/>
+        <p:cNvGrpSpPr/>
+        <p:nvPr/>
+      </p:nvGrpSpPr>
+      <p:grpSpPr>
+        <a:xfrm>
+          <a:off x="0" y="0"/>
+          <a:ext cx="0" cy="0"/>
+          <a:chOff x="0" y="0"/>
+          <a:chExt cx="0" cy="0"/>
+        </a:xfrm>
+      </p:grpSpPr>
+      <p:sp>
+        <p:nvSpPr>
+          <p:cNvPr id="2" name="Title 1"/>
+          <p:cNvSpPr>
+            <a:spLocks noGrp="1"/>
+          </p:cNvSpPr>
+          <p:nvPr>
+            <p:ph type="title"/>
+          </p:nvPr>
+        </p:nvSpPr>
+        <p:spPr>
+          <a:xfrm>
+            <a:off x="457200" y="171450"/>
+            <a:ext cx="8229600" cy="685800"/>
+          </a:xfrm>
+        </p:spPr>
+        <p:txBody>
+          <a:bodyPr/>
+          <a:lstStyle/>
+          <a:p>
+            <a:r>
+              <a:rPr kumimoji="0" lang="en-US"/>
+              <a:t>Click to edit Master title style</a:t>
+            </a:r>
+          </a:p>
+        </p:txBody>
+      </p:sp>
+      <p:sp>
+        <p:nvSpPr>
+          <p:cNvPr id="5" name="Date Placeholder 4"/>
+          <p:cNvSpPr>
+            <a:spLocks noGrp="1"/>
+          </p:cNvSpPr>
+          <p:nvPr>
+            <p:ph type="dt" sz="half" idx="10"/>
+          </p:nvPr>
+        </p:nvSpPr>
+        <p:spPr/>
+        <p:txBody>
+          <a:bodyPr/>
+          <a:lstStyle/>
+          <a:p>
+            <a:pPr eaLnBrk="1" latinLnBrk="0" hangingPunct="1"/>
+            <a:fld id="{53AE4463-726A-4A35-9F46-98893432A3F9}" type="datetime1">
+              <a:rPr lang="en-US" smtClean="0"/>
+              <a:pPr eaLnBrk="1" latinLnBrk="0" hangingPunct="1"/>
+              <a:t>3/30/2026</a:t>
+            </a:fld>
+            <a:endParaRPr lang="en-US"/>
+          </a:p>
+        </p:txBody>
+      </p:sp>
+      <p:sp>
+        <p:nvSpPr>
+          <p:cNvPr id="6" name="Footer Placeholder 5"/>
+          <p:cNvSpPr>
+            <a:spLocks noGrp="1"/>
+          </p:cNvSpPr>
+          <p:nvPr>
+            <p:ph type="ftr" sz="quarter" idx="11"/>
+          </p:nvPr>
+        </p:nvSpPr>
+        <p:spPr/>
+        <p:txBody>
+          <a:bodyPr/>
+          <a:lstStyle/>
+          <a:p>
+            <a:endParaRPr kumimoji="0" lang="en-US"/>
+          </a:p>
+        </p:txBody>
+      </p:sp>
+      <p:sp>
+        <p:nvSpPr>
+          <p:cNvPr id="7" name="Slide Number Placeholder 6"/>
+          <p:cNvSpPr>
+            <a:spLocks noGrp="1"/>
+          </p:cNvSpPr>
+          <p:nvPr>
+            <p:ph type="sldNum" sz="quarter" idx="12"/>
+          </p:nvPr>
+        </p:nvSpPr>
+        <p:spPr/>
+        <p:txBody>
+          <a:bodyPr/>
+          <a:lstStyle/>
+          <a:p>
+            <a:fld id="{EA7C8D44-3667-46F6-9772-CC52308E2A7F}" type="slidenum">
+              <a:rPr kumimoji="0" lang="en-US" smtClean="0"/>
+              <a:pPr/>
+              <a:t>‹#›</a:t>
+            </a:fld>
+            <a:endParaRPr kumimoji="0" lang="en-US"/>
+          </a:p>
+        </p:txBody>
+      </p:sp>
+      <p:sp>
+        <p:nvSpPr>
+          <p:cNvPr id="9" name="Content Placeholder 8"/>
+          <p:cNvSpPr>
+            <a:spLocks noGrp="1"/>
+          </p:cNvSpPr>
+          <p:nvPr>
+            <p:ph sz="quarter" idx="1"/>
+          </p:nvPr>
+        </p:nvSpPr>
+        <p:spPr>
+          <a:xfrm>
+            <a:off x="457200" y="914400"/>
+            <a:ext cx="4041648" cy="3703320"/>
+          </a:xfrm>
+        </p:spPr>
+        <p:txBody>
+          <a:bodyPr/>
+          <a:lstStyle/>
+          <a:p>
+            <a:pPr lvl="0" eaLnBrk="1" latinLnBrk="0" hangingPunct="1"/>
+            <a:r>
+              <a:rPr lang="en-US"/>
+              <a:t>Click to edit Master text styles</a:t>
+            </a:r>
+          </a:p>
+          <a:p>
+            <a:pPr lvl="1" eaLnBrk="1" latinLnBrk="0" hangingPunct="1"/>
+            <a:r>
+              <a:rPr lang="en-US"/>
+              <a:t>Second level</a:t>
+            </a:r>
+          </a:p>
+          <a:p>
+            <a:pPr lvl="2" eaLnBrk="1" latinLnBrk="0" hangingPunct="1"/>
+            <a:r>
+              <a:rPr lang="en-US"/>
+              <a:t>Third level</a:t>
+            </a:r>
+          </a:p>
+          <a:p>
+            <a:pPr lvl="3" eaLnBrk="1" latinLnBrk="0" hangingPunct="1"/>
+            <a:r>
+              <a:rPr lang="en-US"/>
+              <a:t>Fourth level</a:t>
+            </a:r>
+          </a:p>
+          <a:p>
+            <a:pPr lvl="4" eaLnBrk="1" latinLnBrk="0" hangingPunct="1"/>
+            <a:r>
+              <a:rPr lang="en-US"/>
+              <a:t>Fifth level</a:t>
+            </a:r>
+            <a:endParaRPr kumimoji="0" lang="en-US"/>
+          </a:p>
+        </p:txBody>
+      </p:sp>
+      <p:sp>
+        <p:nvSpPr>
+          <p:cNvPr id="11" name="Content Placeholder 10"/>
+          <p:cNvSpPr>
+            <a:spLocks noGrp="1"/>
+          </p:cNvSpPr>
+          <p:nvPr>
+            <p:ph sz="quarter" idx="2"/>
+          </p:nvPr>
+        </p:nvSpPr>
+        <p:spPr>
+          <a:xfrm>
+            <a:off x="4632198" y="912114"/>
+            <a:ext cx="4041648" cy="3703320"/>
+          </a:xfrm>
+        </p:spPr>
+        <p:txBody>
+          <a:bodyPr/>
+          <a:lstStyle/>
+          <a:p>
+            <a:pPr lvl="0" eaLnBrk="1" latinLnBrk="0" hangingPunct="1"/>
+            <a:r>
+              <a:rPr lang="en-US"/>
+              <a:t>Click to edit Master text styles</a:t>
+            </a:r>
+          </a:p>
+          <a:p>
+            <a:pPr lvl="1" eaLnBrk="1" latinLnBrk="0" hangingPunct="1"/>
+            <a:r>
+              <a:rPr lang="en-US"/>
+              <a:t>Second level</a:t>
+            </a:r>
+          </a:p>
+          <a:p>
+            <a:pPr lvl="2" eaLnBrk="1" latinLnBrk="0" hangingPunct="1"/>
+            <a:r>
+              <a:rPr lang="en-US"/>
+              <a:t>Third level</a:t>
+            </a:r>
+          </a:p>
+          <a:p>
+            <a:pPr lvl="3" eaLnBrk="1" latinLnBrk="0" hangingPunct="1"/>
+            <a:r>
+              <a:rPr lang="en-US"/>
+              <a:t>Fourth level</a:t>
+            </a:r>
+          </a:p>
+          <a:p>
+            <a:pPr lvl="4" eaLnBrk="1" latinLnBrk="0" hangingPunct="1"/>
+            <a:r>
+              <a:rPr lang="en-US"/>
+              <a:t>Fifth level</a:t>
+            </a:r>
+            <a:endParaRPr kumimoji="0" lang="en-US"/>
+          </a:p>
+        </p:txBody>
+      </p:sp>
+    </p:spTree>
+    <p:extLst>
+      <p:ext uri="{BB962C8B-B14F-4D97-AF65-F5344CB8AC3E}">
+        <p14:creationId xmlns:p14="http://schemas.microsoft.com/office/powerpoint/2010/main" val="2294580040"/>
+      </p:ext>
+    </p:extLst>
+  </p:cSld>
+  <p:clrMapOvr>
+    <a:masterClrMapping/>
+  </p:clrMapOvr>
+</p:sldLayout>
+</file>
+
+<file path=ppt/slideLayouts/slideLayout25.xml><?xml version="1.0" encoding="utf-8"?>
+<p:sldLayout xmlns:a="http://schemas.openxmlformats.org/drawingml/2006/main" xmlns:r="http://schemas.openxmlformats.org/officeDocument/2006/relationships" xmlns:p="http://schemas.openxmlformats.org/presentationml/2006/main" type="twoTxTwoObj" preserve="1">
+  <p:cSld name="Comparison">
+    <p:spTree>
+      <p:nvGrpSpPr>
+        <p:cNvPr id="1" name=""/>
+        <p:cNvGrpSpPr/>
+        <p:nvPr/>
+      </p:nvGrpSpPr>
+      <p:grpSpPr>
+        <a:xfrm>
+          <a:off x="0" y="0"/>
+          <a:ext cx="0" cy="0"/>
+          <a:chOff x="0" y="0"/>
+          <a:chExt cx="0" cy="0"/>
+        </a:xfrm>
+      </p:grpSpPr>
+      <p:sp>
+        <p:nvSpPr>
+          <p:cNvPr id="2" name="Title 1"/>
+          <p:cNvSpPr>
+            <a:spLocks noGrp="1"/>
+          </p:cNvSpPr>
+          <p:nvPr>
+            <p:ph type="title"/>
+          </p:nvPr>
+        </p:nvSpPr>
+        <p:spPr>
+          <a:xfrm>
+            <a:off x="457200" y="171450"/>
+            <a:ext cx="8229600" cy="685800"/>
+          </a:xfrm>
+        </p:spPr>
+        <p:txBody>
+          <a:bodyPr anchor="ctr"/>
+          <a:lstStyle>
+            <a:lvl1pPr>
+              <a:defRPr/>
+            </a:lvl1pPr>
+          </a:lstStyle>
+          <a:p>
+            <a:r>
+              <a:rPr kumimoji="0" lang="en-US"/>
+              <a:t>Click to edit Master title style</a:t>
+            </a:r>
+          </a:p>
+        </p:txBody>
+      </p:sp>
+      <p:sp>
+        <p:nvSpPr>
+          <p:cNvPr id="3" name="Text Placeholder 2"/>
+          <p:cNvSpPr>
+            <a:spLocks noGrp="1"/>
+          </p:cNvSpPr>
+          <p:nvPr>
+            <p:ph type="body" idx="1"/>
+          </p:nvPr>
+        </p:nvSpPr>
+        <p:spPr>
+          <a:xfrm>
+            <a:off x="457200" y="964406"/>
+            <a:ext cx="4040188" cy="514350"/>
+          </a:xfrm>
+          <a:noFill/>
+          <a:ln>
+            <a:noFill/>
+          </a:ln>
+        </p:spPr>
+        <p:txBody>
+          <a:bodyPr lIns="91440" anchor="b" anchorCtr="0">
+            <a:noAutofit/>
+          </a:bodyPr>
+          <a:lstStyle>
+            <a:lvl1pPr marL="0" indent="0">
+              <a:buNone/>
+              <a:defRPr sz="1800" b="1">
+                <a:solidFill>
+                  <a:schemeClr val="accent2"/>
+                </a:solidFill>
+              </a:defRPr>
+            </a:lvl1pPr>
+            <a:lvl2pPr>
+              <a:buNone/>
+              <a:defRPr sz="1500" b="1"/>
+            </a:lvl2pPr>
+            <a:lvl3pPr>
+              <a:buNone/>
+              <a:defRPr sz="1350" b="1"/>
+            </a:lvl3pPr>
+            <a:lvl4pPr>
+              <a:buNone/>
+              <a:defRPr sz="1200" b="1"/>
+            </a:lvl4pPr>
+            <a:lvl5pPr>
+              <a:buNone/>
+              <a:defRPr sz="1200" b="1"/>
+            </a:lvl5pPr>
+          </a:lstStyle>
+          <a:p>
+            <a:pPr lvl="0" eaLnBrk="1" latinLnBrk="0" hangingPunct="1"/>
+            <a:r>
+              <a:rPr kumimoji="0" lang="en-US"/>
+              <a:t>Click to edit Master text styles</a:t>
+            </a:r>
+          </a:p>
+        </p:txBody>
+      </p:sp>
+      <p:sp>
+        <p:nvSpPr>
+          <p:cNvPr id="4" name="Text Placeholder 3"/>
+          <p:cNvSpPr>
+            <a:spLocks noGrp="1"/>
+          </p:cNvSpPr>
+          <p:nvPr>
+            <p:ph type="body" sz="half" idx="3"/>
+          </p:nvPr>
+        </p:nvSpPr>
+        <p:spPr>
+          <a:xfrm>
+            <a:off x="4648201" y="971550"/>
+            <a:ext cx="4041775" cy="514350"/>
+          </a:xfrm>
+          <a:noFill/>
+          <a:ln>
+            <a:noFill/>
+          </a:ln>
+        </p:spPr>
+        <p:txBody>
+          <a:bodyPr lIns="91440" anchor="b" anchorCtr="0"/>
+          <a:lstStyle>
+            <a:lvl1pPr marL="0" indent="0">
+              <a:buNone/>
+              <a:defRPr sz="1800" b="1">
+                <a:solidFill>
+                  <a:schemeClr val="accent2"/>
+                </a:solidFill>
+              </a:defRPr>
+            </a:lvl1pPr>
+            <a:lvl2pPr>
+              <a:buNone/>
+              <a:defRPr sz="1500" b="1"/>
+            </a:lvl2pPr>
+            <a:lvl3pPr>
+              <a:buNone/>
+              <a:defRPr sz="1350" b="1"/>
+            </a:lvl3pPr>
+            <a:lvl4pPr>
+              <a:buNone/>
+              <a:defRPr sz="1200" b="1"/>
+            </a:lvl4pPr>
+            <a:lvl5pPr>
+              <a:buNone/>
+              <a:defRPr sz="1200" b="1"/>
+            </a:lvl5pPr>
+          </a:lstStyle>
+          <a:p>
+            <a:pPr lvl="0" eaLnBrk="1" latinLnBrk="0" hangingPunct="1"/>
+            <a:r>
+              <a:rPr kumimoji="0" lang="en-US"/>
+              <a:t>Click to edit Master text styles</a:t>
+            </a:r>
+          </a:p>
+        </p:txBody>
+      </p:sp>
+      <p:sp>
+        <p:nvSpPr>
+          <p:cNvPr id="7" name="Date Placeholder 6"/>
+          <p:cNvSpPr>
+            <a:spLocks noGrp="1"/>
+          </p:cNvSpPr>
+          <p:nvPr>
+            <p:ph type="dt" sz="half" idx="10"/>
+          </p:nvPr>
+        </p:nvSpPr>
+        <p:spPr/>
+        <p:txBody>
+          <a:bodyPr/>
+          <a:lstStyle/>
+          <a:p>
+            <a:pPr eaLnBrk="1" latinLnBrk="0" hangingPunct="1"/>
+            <a:fld id="{FDF404D0-E306-4E90-90E3-E44D26246FFC}" type="datetime1">
+              <a:rPr lang="en-US" smtClean="0"/>
+              <a:pPr eaLnBrk="1" latinLnBrk="0" hangingPunct="1"/>
+              <a:t>3/30/2026</a:t>
+            </a:fld>
+            <a:endParaRPr lang="en-US"/>
+          </a:p>
+        </p:txBody>
+      </p:sp>
+      <p:sp>
+        <p:nvSpPr>
+          <p:cNvPr id="8" name="Footer Placeholder 7"/>
+          <p:cNvSpPr>
+            <a:spLocks noGrp="1"/>
+          </p:cNvSpPr>
+          <p:nvPr>
+            <p:ph type="ftr" sz="quarter" idx="11"/>
+          </p:nvPr>
+        </p:nvSpPr>
+        <p:spPr/>
+        <p:txBody>
+          <a:bodyPr/>
+          <a:lstStyle/>
+          <a:p>
+            <a:endParaRPr kumimoji="0" lang="en-US"/>
+          </a:p>
+        </p:txBody>
+      </p:sp>
+      <p:sp>
+        <p:nvSpPr>
+          <p:cNvPr id="9" name="Slide Number Placeholder 8"/>
+          <p:cNvSpPr>
+            <a:spLocks noGrp="1"/>
+          </p:cNvSpPr>
+          <p:nvPr>
+            <p:ph type="sldNum" sz="quarter" idx="12"/>
+          </p:nvPr>
+        </p:nvSpPr>
+        <p:spPr/>
+        <p:txBody>
+          <a:bodyPr/>
+          <a:lstStyle/>
+          <a:p>
+            <a:fld id="{EA7C8D44-3667-46F6-9772-CC52308E2A7F}" type="slidenum">
+              <a:rPr kumimoji="0" lang="en-US" smtClean="0"/>
+              <a:pPr/>
+              <a:t>‹#›</a:t>
+            </a:fld>
+            <a:endParaRPr kumimoji="0" lang="en-US"/>
+          </a:p>
+        </p:txBody>
+      </p:sp>
+      <p:sp>
+        <p:nvSpPr>
+          <p:cNvPr id="11" name="Content Placeholder 10"/>
+          <p:cNvSpPr>
+            <a:spLocks noGrp="1"/>
+          </p:cNvSpPr>
+          <p:nvPr>
+            <p:ph sz="quarter" idx="2"/>
+          </p:nvPr>
+        </p:nvSpPr>
+        <p:spPr>
+          <a:xfrm>
+            <a:off x="457200" y="1600200"/>
+            <a:ext cx="4038600" cy="3028950"/>
+          </a:xfrm>
+        </p:spPr>
+        <p:txBody>
+          <a:bodyPr/>
+          <a:lstStyle/>
+          <a:p>
+            <a:pPr lvl="0" eaLnBrk="1" latinLnBrk="0" hangingPunct="1"/>
+            <a:r>
+              <a:rPr lang="en-US"/>
+              <a:t>Click to edit Master text styles</a:t>
+            </a:r>
+          </a:p>
+          <a:p>
+            <a:pPr lvl="1" eaLnBrk="1" latinLnBrk="0" hangingPunct="1"/>
+            <a:r>
+              <a:rPr lang="en-US"/>
+              <a:t>Second level</a:t>
+            </a:r>
+          </a:p>
+          <a:p>
+            <a:pPr lvl="2" eaLnBrk="1" latinLnBrk="0" hangingPunct="1"/>
+            <a:r>
+              <a:rPr lang="en-US"/>
+              <a:t>Third level</a:t>
+            </a:r>
+          </a:p>
+          <a:p>
+            <a:pPr lvl="3" eaLnBrk="1" latinLnBrk="0" hangingPunct="1"/>
+            <a:r>
+              <a:rPr lang="en-US"/>
+              <a:t>Fourth level</a:t>
+            </a:r>
+          </a:p>
+          <a:p>
+            <a:pPr lvl="4" eaLnBrk="1" latinLnBrk="0" hangingPunct="1"/>
+            <a:r>
+              <a:rPr lang="en-US"/>
+              <a:t>Fifth level</a:t>
+            </a:r>
+            <a:endParaRPr kumimoji="0" lang="en-US"/>
+          </a:p>
+        </p:txBody>
+      </p:sp>
+      <p:sp>
+        <p:nvSpPr>
+          <p:cNvPr id="13" name="Content Placeholder 12"/>
+          <p:cNvSpPr>
+            <a:spLocks noGrp="1"/>
+          </p:cNvSpPr>
+          <p:nvPr>
+            <p:ph sz="quarter" idx="4"/>
+          </p:nvPr>
+        </p:nvSpPr>
+        <p:spPr>
+          <a:xfrm>
+            <a:off x="4648200" y="1600200"/>
+            <a:ext cx="4038600" cy="3028950"/>
+          </a:xfrm>
+        </p:spPr>
+        <p:txBody>
+          <a:bodyPr/>
+          <a:lstStyle/>
+          <a:p>
+            <a:pPr lvl="0" eaLnBrk="1" latinLnBrk="0" hangingPunct="1"/>
+            <a:r>
+              <a:rPr lang="en-US"/>
+              <a:t>Click to edit Master text styles</a:t>
+            </a:r>
+          </a:p>
+          <a:p>
+            <a:pPr lvl="1" eaLnBrk="1" latinLnBrk="0" hangingPunct="1"/>
+            <a:r>
+              <a:rPr lang="en-US"/>
+              <a:t>Second level</a:t>
+            </a:r>
+          </a:p>
+          <a:p>
+            <a:pPr lvl="2" eaLnBrk="1" latinLnBrk="0" hangingPunct="1"/>
+            <a:r>
+              <a:rPr lang="en-US"/>
+              <a:t>Third level</a:t>
+            </a:r>
+          </a:p>
+          <a:p>
+            <a:pPr lvl="3" eaLnBrk="1" latinLnBrk="0" hangingPunct="1"/>
+            <a:r>
+              <a:rPr lang="en-US"/>
+              <a:t>Fourth level</a:t>
+            </a:r>
+          </a:p>
+          <a:p>
+            <a:pPr lvl="4" eaLnBrk="1" latinLnBrk="0" hangingPunct="1"/>
+            <a:r>
+              <a:rPr lang="en-US"/>
+              <a:t>Fifth level</a:t>
+            </a:r>
+            <a:endParaRPr kumimoji="0" lang="en-US"/>
+          </a:p>
+        </p:txBody>
+      </p:sp>
+    </p:spTree>
+    <p:extLst>
+      <p:ext uri="{BB962C8B-B14F-4D97-AF65-F5344CB8AC3E}">
+        <p14:creationId xmlns:p14="http://schemas.microsoft.com/office/powerpoint/2010/main" val="3492710670"/>
+      </p:ext>
+    </p:extLst>
+  </p:cSld>
+  <p:clrMapOvr>
+    <a:masterClrMapping/>
+  </p:clrMapOvr>
+</p:sldLayout>
+</file>
+
+<file path=ppt/slideLayouts/slideLayout26.xml><?xml version="1.0" encoding="utf-8"?>
+<p:sldLayout xmlns:a="http://schemas.openxmlformats.org/drawingml/2006/main" xmlns:r="http://schemas.openxmlformats.org/officeDocument/2006/relationships" xmlns:p="http://schemas.openxmlformats.org/presentationml/2006/main" type="titleOnly" preserve="1">
+  <p:cSld name="Title Only">
+    <p:spTree>
+      <p:nvGrpSpPr>
+        <p:cNvPr id="1" name=""/>
+        <p:cNvGrpSpPr/>
+        <p:nvPr/>
+      </p:nvGrpSpPr>
+      <p:grpSpPr>
+        <a:xfrm>
+          <a:off x="0" y="0"/>
+          <a:ext cx="0" cy="0"/>
+          <a:chOff x="0" y="0"/>
+          <a:chExt cx="0" cy="0"/>
+        </a:xfrm>
+      </p:grpSpPr>
+      <p:sp>
+        <p:nvSpPr>
+          <p:cNvPr id="2" name="Title 1"/>
+          <p:cNvSpPr>
+            <a:spLocks noGrp="1"/>
+          </p:cNvSpPr>
+          <p:nvPr>
+            <p:ph type="title"/>
+          </p:nvPr>
+        </p:nvSpPr>
+        <p:spPr>
+          <a:xfrm>
+            <a:off x="457200" y="171450"/>
+            <a:ext cx="8229600" cy="685800"/>
+          </a:xfrm>
+        </p:spPr>
+        <p:txBody>
+          <a:bodyPr/>
+          <a:lstStyle/>
+          <a:p>
+            <a:r>
+              <a:rPr kumimoji="0" lang="en-US"/>
+              <a:t>Click to edit Master title style</a:t>
+            </a:r>
+          </a:p>
+        </p:txBody>
+      </p:sp>
+      <p:sp>
+        <p:nvSpPr>
+          <p:cNvPr id="3" name="Date Placeholder 2"/>
+          <p:cNvSpPr>
+            <a:spLocks noGrp="1"/>
+          </p:cNvSpPr>
+          <p:nvPr>
+            <p:ph type="dt" sz="half" idx="10"/>
+          </p:nvPr>
+        </p:nvSpPr>
+        <p:spPr/>
+        <p:txBody>
+          <a:bodyPr/>
+          <a:lstStyle/>
+          <a:p>
+            <a:pPr eaLnBrk="1" latinLnBrk="0" hangingPunct="1"/>
+            <a:fld id="{1485DA14-76F0-4D93-83FB-7878C79A1986}" type="datetime1">
+              <a:rPr lang="en-US" smtClean="0"/>
+              <a:pPr eaLnBrk="1" latinLnBrk="0" hangingPunct="1"/>
+              <a:t>3/30/2026</a:t>
+            </a:fld>
+            <a:endParaRPr lang="en-US"/>
+          </a:p>
+        </p:txBody>
+      </p:sp>
+      <p:sp>
+        <p:nvSpPr>
+          <p:cNvPr id="4" name="Footer Placeholder 3"/>
+          <p:cNvSpPr>
+            <a:spLocks noGrp="1"/>
+          </p:cNvSpPr>
+          <p:nvPr>
+            <p:ph type="ftr" sz="quarter" idx="11"/>
+          </p:nvPr>
+        </p:nvSpPr>
+        <p:spPr/>
+        <p:txBody>
+          <a:bodyPr/>
+          <a:lstStyle/>
+          <a:p>
+            <a:endParaRPr kumimoji="0" lang="en-US"/>
+          </a:p>
+        </p:txBody>
+      </p:sp>
+      <p:sp>
+        <p:nvSpPr>
+          <p:cNvPr id="5" name="Slide Number Placeholder 4"/>
+          <p:cNvSpPr>
+            <a:spLocks noGrp="1"/>
+          </p:cNvSpPr>
+          <p:nvPr>
+            <p:ph type="sldNum" sz="quarter" idx="12"/>
+          </p:nvPr>
+        </p:nvSpPr>
+        <p:spPr/>
+        <p:txBody>
+          <a:bodyPr/>
+          <a:lstStyle/>
+          <a:p>
+            <a:fld id="{EA7C8D44-3667-46F6-9772-CC52308E2A7F}" type="slidenum">
+              <a:rPr kumimoji="0" lang="en-US" smtClean="0"/>
+              <a:pPr/>
+              <a:t>‹#›</a:t>
+            </a:fld>
+            <a:endParaRPr kumimoji="0" lang="en-US"/>
+          </a:p>
+        </p:txBody>
+      </p:sp>
+      <p:sp>
+        <p:nvSpPr>
+          <p:cNvPr id="6" name="Isosceles Triangle 5"/>
+          <p:cNvSpPr>
+            <a:spLocks noChangeAspect="1"/>
+          </p:cNvSpPr>
+          <p:nvPr/>
+        </p:nvSpPr>
+        <p:spPr>
+          <a:xfrm rot="5400000">
+            <a:off x="442957" y="4835568"/>
+            <a:ext cx="143137" cy="120314"/>
+          </a:xfrm>
+          <a:prstGeom prst="triangle">
+            <a:avLst>
+              <a:gd name="adj" fmla="val 50000"/>
+            </a:avLst>
+          </a:prstGeom>
+          <a:solidFill>
+            <a:schemeClr val="accent2"/>
+          </a:solidFill>
+          <a:ln w="25400" cap="rnd" cmpd="sng" algn="ctr">
+            <a:noFill/>
+            <a:prstDash val="solid"/>
+          </a:ln>
+          <a:effectLst/>
+        </p:spPr>
+        <p:style>
+          <a:lnRef idx="3">
+            <a:schemeClr val="lt1"/>
+          </a:lnRef>
+          <a:fillRef idx="1">
+            <a:schemeClr val="accent1"/>
+          </a:fillRef>
+          <a:effectRef idx="1">
+            <a:schemeClr val="accent1"/>
+          </a:effectRef>
+          <a:fontRef idx="minor">
+            <a:schemeClr val="lt1"/>
+          </a:fontRef>
+        </p:style>
+        <p:txBody>
+          <a:bodyPr anchor="ctr"/>
+          <a:lstStyle/>
+          <a:p>
+            <a:pPr algn="ctr" eaLnBrk="1" latinLnBrk="0" hangingPunct="1"/>
+            <a:endParaRPr kumimoji="0" lang="en-US" sz="1350"/>
+          </a:p>
+        </p:txBody>
+      </p:sp>
+    </p:spTree>
+    <p:extLst>
+      <p:ext uri="{BB962C8B-B14F-4D97-AF65-F5344CB8AC3E}">
+        <p14:creationId xmlns:p14="http://schemas.microsoft.com/office/powerpoint/2010/main" val="301590736"/>
+      </p:ext>
+    </p:extLst>
+  </p:cSld>
+  <p:clrMapOvr>
+    <a:masterClrMapping/>
+  </p:clrMapOvr>
+</p:sldLayout>
+</file>
+
+<file path=ppt/slideLayouts/slideLayout27.xml><?xml version="1.0" encoding="utf-8"?>
+<p:sldLayout xmlns:a="http://schemas.openxmlformats.org/drawingml/2006/main" xmlns:r="http://schemas.openxmlformats.org/officeDocument/2006/relationships" xmlns:p="http://schemas.openxmlformats.org/presentationml/2006/main" showMasterSp="0" type="blank" preserve="1">
+  <p:cSld name="Blank">
+    <p:spTree>
+      <p:nvGrpSpPr>
+        <p:cNvPr id="1" name=""/>
+        <p:cNvGrpSpPr/>
+        <p:nvPr/>
+      </p:nvGrpSpPr>
+      <p:grpSpPr>
+        <a:xfrm>
+          <a:off x="0" y="0"/>
+          <a:ext cx="0" cy="0"/>
+          <a:chOff x="0" y="0"/>
+          <a:chExt cx="0" cy="0"/>
+        </a:xfrm>
+      </p:grpSpPr>
+      <p:sp>
+        <p:nvSpPr>
+          <p:cNvPr id="2" name="Date Placeholder 1"/>
+          <p:cNvSpPr>
+            <a:spLocks noGrp="1"/>
+          </p:cNvSpPr>
+          <p:nvPr>
+            <p:ph type="dt" sz="half" idx="10"/>
+          </p:nvPr>
+        </p:nvSpPr>
+        <p:spPr/>
+        <p:txBody>
+          <a:bodyPr/>
+          <a:lstStyle/>
+          <a:p>
+            <a:pPr eaLnBrk="1" latinLnBrk="0" hangingPunct="1"/>
+            <a:fld id="{A15E552D-49E1-496B-B79C-E100986B8B5F}" type="datetime1">
+              <a:rPr lang="en-US" smtClean="0"/>
+              <a:pPr eaLnBrk="1" latinLnBrk="0" hangingPunct="1"/>
+              <a:t>3/30/2026</a:t>
+            </a:fld>
+            <a:endParaRPr lang="en-US"/>
+          </a:p>
+        </p:txBody>
+      </p:sp>
+      <p:sp>
+        <p:nvSpPr>
+          <p:cNvPr id="3" name="Footer Placeholder 2"/>
+          <p:cNvSpPr>
+            <a:spLocks noGrp="1"/>
+          </p:cNvSpPr>
+          <p:nvPr>
+            <p:ph type="ftr" sz="quarter" idx="11"/>
+          </p:nvPr>
+        </p:nvSpPr>
+        <p:spPr/>
+        <p:txBody>
+          <a:bodyPr/>
+          <a:lstStyle/>
+          <a:p>
+            <a:endParaRPr kumimoji="0" lang="en-US"/>
+          </a:p>
+        </p:txBody>
+      </p:sp>
+      <p:sp>
+        <p:nvSpPr>
+          <p:cNvPr id="4" name="Slide Number Placeholder 3"/>
+          <p:cNvSpPr>
+            <a:spLocks noGrp="1"/>
+          </p:cNvSpPr>
+          <p:nvPr>
+            <p:ph type="sldNum" sz="quarter" idx="12"/>
+          </p:nvPr>
+        </p:nvSpPr>
+        <p:spPr/>
+        <p:txBody>
+          <a:bodyPr/>
+          <a:lstStyle/>
+          <a:p>
+            <a:fld id="{EA7C8D44-3667-46F6-9772-CC52308E2A7F}" type="slidenum">
+              <a:rPr kumimoji="0" lang="en-US" smtClean="0"/>
+              <a:pPr/>
+              <a:t>‹#›</a:t>
+            </a:fld>
+            <a:endParaRPr kumimoji="0" lang="en-US"/>
+          </a:p>
+        </p:txBody>
+      </p:sp>
+      <p:sp>
+        <p:nvSpPr>
+          <p:cNvPr id="5" name="Straight Connector 4"/>
+          <p:cNvSpPr>
+            <a:spLocks noChangeShapeType="1"/>
+          </p:cNvSpPr>
+          <p:nvPr/>
+        </p:nvSpPr>
+        <p:spPr bwMode="auto">
+          <a:xfrm>
+            <a:off x="457200" y="4764881"/>
+            <a:ext cx="8229600" cy="0"/>
+          </a:xfrm>
+          <a:prstGeom prst="line">
+            <a:avLst/>
+          </a:prstGeom>
+          <a:noFill/>
+          <a:ln w="9525" cap="flat" cmpd="sng" algn="ctr">
+            <a:solidFill>
+              <a:schemeClr val="accent2"/>
+            </a:solidFill>
+            <a:prstDash val="dash"/>
+            <a:round/>
+            <a:headEnd type="none" w="med" len="med"/>
+            <a:tailEnd type="none" w="med" len="med"/>
+          </a:ln>
+          <a:effectLst/>
+        </p:spPr>
+        <p:txBody>
+          <a:bodyPr vert="horz" wrap="square" lIns="68580" tIns="34290" rIns="68580" bIns="34290" anchor="t" compatLnSpc="1"/>
+          <a:lstStyle/>
+          <a:p>
+            <a:endParaRPr kumimoji="0" lang="en-US" sz="1350"/>
+          </a:p>
+        </p:txBody>
+      </p:sp>
+      <p:sp>
+        <p:nvSpPr>
+          <p:cNvPr id="6" name="Isosceles Triangle 5"/>
+          <p:cNvSpPr>
+            <a:spLocks noChangeAspect="1"/>
+          </p:cNvSpPr>
+          <p:nvPr/>
+        </p:nvSpPr>
+        <p:spPr>
+          <a:xfrm rot="5400000">
+            <a:off x="442957" y="4835568"/>
+            <a:ext cx="143137" cy="120314"/>
+          </a:xfrm>
+          <a:prstGeom prst="triangle">
+            <a:avLst>
+              <a:gd name="adj" fmla="val 50000"/>
+            </a:avLst>
+          </a:prstGeom>
+          <a:solidFill>
+            <a:schemeClr val="accent2"/>
+          </a:solidFill>
+          <a:ln w="25400" cap="rnd" cmpd="sng" algn="ctr">
+            <a:noFill/>
+            <a:prstDash val="solid"/>
+          </a:ln>
+          <a:effectLst/>
+        </p:spPr>
+        <p:style>
+          <a:lnRef idx="3">
+            <a:schemeClr val="lt1"/>
+          </a:lnRef>
+          <a:fillRef idx="1">
+            <a:schemeClr val="accent1"/>
+          </a:fillRef>
+          <a:effectRef idx="1">
+            <a:schemeClr val="accent1"/>
+          </a:effectRef>
+          <a:fontRef idx="minor">
+            <a:schemeClr val="lt1"/>
+          </a:fontRef>
+        </p:style>
+        <p:txBody>
+          <a:bodyPr anchor="ctr"/>
+          <a:lstStyle/>
+          <a:p>
+            <a:pPr algn="ctr" eaLnBrk="1" latinLnBrk="0" hangingPunct="1"/>
+            <a:endParaRPr kumimoji="0" lang="en-US" sz="1350"/>
+          </a:p>
+        </p:txBody>
+      </p:sp>
+    </p:spTree>
+    <p:extLst>
+      <p:ext uri="{BB962C8B-B14F-4D97-AF65-F5344CB8AC3E}">
+        <p14:creationId xmlns:p14="http://schemas.microsoft.com/office/powerpoint/2010/main" val="1463114563"/>
+      </p:ext>
+    </p:extLst>
+  </p:cSld>
+  <p:clrMapOvr>
+    <a:masterClrMapping/>
+  </p:clrMapOvr>
+</p:sldLayout>
+</file>
+
+<file path=ppt/slideLayouts/slideLayout28.xml><?xml version="1.0" encoding="utf-8"?>
+<p:sldLayout xmlns:a="http://schemas.openxmlformats.org/drawingml/2006/main" xmlns:r="http://schemas.openxmlformats.org/officeDocument/2006/relationships" xmlns:p="http://schemas.openxmlformats.org/presentationml/2006/main" showMasterSp="0" type="objTx" preserve="1">
+  <p:cSld name="Content with Caption">
+    <p:spTree>
+      <p:nvGrpSpPr>
+        <p:cNvPr id="1" name=""/>
+        <p:cNvGrpSpPr/>
+        <p:nvPr/>
+      </p:nvGrpSpPr>
+      <p:grpSpPr>
+        <a:xfrm>
+          <a:off x="0" y="0"/>
+          <a:ext cx="0" cy="0"/>
+          <a:chOff x="0" y="0"/>
+          <a:chExt cx="0" cy="0"/>
+        </a:xfrm>
+      </p:grpSpPr>
+      <p:sp>
+        <p:nvSpPr>
+          <p:cNvPr id="2" name="Title 1"/>
+          <p:cNvSpPr>
+            <a:spLocks noGrp="1"/>
+          </p:cNvSpPr>
+          <p:nvPr>
+            <p:ph type="title"/>
+          </p:nvPr>
+        </p:nvSpPr>
+        <p:spPr>
+          <a:xfrm>
+            <a:off x="6324600" y="228600"/>
+            <a:ext cx="2514600" cy="628650"/>
+          </a:xfrm>
+        </p:spPr>
+        <p:txBody>
+          <a:bodyPr anchor="b" anchorCtr="0">
+            <a:noAutofit/>
+          </a:bodyPr>
+          <a:lstStyle>
+            <a:lvl1pPr algn="l">
+              <a:buNone/>
+              <a:defRPr sz="1500" b="1">
+                <a:solidFill>
+                  <a:schemeClr val="tx2"/>
+                </a:solidFill>
+                <a:latin typeface="+mn-lt"/>
+                <a:ea typeface="+mn-ea"/>
+                <a:cs typeface="+mn-cs"/>
+              </a:defRPr>
+            </a:lvl1pPr>
+          </a:lstStyle>
+          <a:p>
+            <a:r>
+              <a:rPr kumimoji="0" lang="en-US"/>
+              <a:t>Click to edit Master title style</a:t>
+            </a:r>
+          </a:p>
+        </p:txBody>
+      </p:sp>
+      <p:sp>
+        <p:nvSpPr>
+          <p:cNvPr id="3" name="Text Placeholder 2"/>
+          <p:cNvSpPr>
+            <a:spLocks noGrp="1"/>
+          </p:cNvSpPr>
+          <p:nvPr>
+            <p:ph type="body" idx="2"/>
+          </p:nvPr>
+        </p:nvSpPr>
+        <p:spPr>
+          <a:xfrm>
+            <a:off x="6324600" y="914401"/>
+            <a:ext cx="2514600" cy="3632597"/>
+          </a:xfrm>
+        </p:spPr>
+        <p:txBody>
+          <a:bodyPr/>
+          <a:lstStyle>
+            <a:lvl1pPr marL="0" indent="0">
+              <a:lnSpc>
+                <a:spcPts val="1650"/>
+              </a:lnSpc>
+              <a:spcAft>
+                <a:spcPts val="750"/>
+              </a:spcAft>
+              <a:buNone/>
+              <a:defRPr sz="1200">
+                <a:solidFill>
+                  <a:schemeClr val="tx2"/>
+                </a:solidFill>
+              </a:defRPr>
+            </a:lvl1pPr>
+            <a:lvl2pPr>
+              <a:buNone/>
+              <a:defRPr sz="900"/>
+            </a:lvl2pPr>
+            <a:lvl3pPr>
+              <a:buNone/>
+              <a:defRPr sz="750"/>
+            </a:lvl3pPr>
+            <a:lvl4pPr>
+              <a:buNone/>
+              <a:defRPr sz="675"/>
+            </a:lvl4pPr>
+            <a:lvl5pPr>
+              <a:buNone/>
+              <a:defRPr sz="675"/>
+            </a:lvl5pPr>
+          </a:lstStyle>
+          <a:p>
+            <a:pPr lvl="0" eaLnBrk="1" latinLnBrk="0" hangingPunct="1"/>
+            <a:r>
+              <a:rPr kumimoji="0" lang="en-US"/>
+              <a:t>Click to edit Master text styles</a:t>
+            </a:r>
+          </a:p>
+        </p:txBody>
+      </p:sp>
+      <p:sp>
+        <p:nvSpPr>
+          <p:cNvPr id="5" name="Date Placeholder 4"/>
+          <p:cNvSpPr>
+            <a:spLocks noGrp="1"/>
+          </p:cNvSpPr>
+          <p:nvPr>
+            <p:ph type="dt" sz="half" idx="10"/>
+          </p:nvPr>
+        </p:nvSpPr>
+        <p:spPr/>
+        <p:txBody>
+          <a:bodyPr/>
+          <a:lstStyle/>
+          <a:p>
+            <a:pPr eaLnBrk="1" latinLnBrk="0" hangingPunct="1"/>
+            <a:fld id="{CEC72505-1551-4A98-97CD-F520B07184AD}" type="datetime1">
+              <a:rPr lang="en-US" smtClean="0"/>
+              <a:pPr eaLnBrk="1" latinLnBrk="0" hangingPunct="1"/>
+              <a:t>3/30/2026</a:t>
+            </a:fld>
+            <a:endParaRPr lang="en-US"/>
+          </a:p>
+        </p:txBody>
+      </p:sp>
+      <p:sp>
+        <p:nvSpPr>
+          <p:cNvPr id="6" name="Footer Placeholder 5"/>
+          <p:cNvSpPr>
+            <a:spLocks noGrp="1"/>
+          </p:cNvSpPr>
+          <p:nvPr>
+            <p:ph type="ftr" sz="quarter" idx="11"/>
+          </p:nvPr>
+        </p:nvSpPr>
+        <p:spPr/>
+        <p:txBody>
+          <a:bodyPr/>
+          <a:lstStyle/>
+          <a:p>
+            <a:endParaRPr kumimoji="0" lang="en-US"/>
+          </a:p>
+        </p:txBody>
+      </p:sp>
+      <p:sp>
+        <p:nvSpPr>
+          <p:cNvPr id="7" name="Slide Number Placeholder 6"/>
+          <p:cNvSpPr>
+            <a:spLocks noGrp="1"/>
+          </p:cNvSpPr>
+          <p:nvPr>
+            <p:ph type="sldNum" sz="quarter" idx="12"/>
+          </p:nvPr>
+        </p:nvSpPr>
+        <p:spPr/>
+        <p:txBody>
+          <a:bodyPr/>
+          <a:lstStyle/>
+          <a:p>
+            <a:fld id="{EA7C8D44-3667-46F6-9772-CC52308E2A7F}" type="slidenum">
+              <a:rPr kumimoji="0" lang="en-US" smtClean="0"/>
+              <a:pPr/>
+              <a:t>‹#›</a:t>
+            </a:fld>
+            <a:endParaRPr kumimoji="0" lang="en-US"/>
+          </a:p>
+        </p:txBody>
+      </p:sp>
+      <p:sp>
+        <p:nvSpPr>
+          <p:cNvPr id="8" name="Straight Connector 7"/>
+          <p:cNvSpPr>
+            <a:spLocks noChangeShapeType="1"/>
+          </p:cNvSpPr>
+          <p:nvPr/>
+        </p:nvSpPr>
+        <p:spPr bwMode="auto">
+          <a:xfrm>
+            <a:off x="457200" y="4764881"/>
+            <a:ext cx="8229600" cy="0"/>
+          </a:xfrm>
+          <a:prstGeom prst="line">
+            <a:avLst/>
+          </a:prstGeom>
+          <a:noFill/>
+          <a:ln w="9525" cap="flat" cmpd="sng" algn="ctr">
+            <a:solidFill>
+              <a:schemeClr val="accent2"/>
+            </a:solidFill>
+            <a:prstDash val="dash"/>
+            <a:round/>
+            <a:headEnd type="none" w="med" len="med"/>
+            <a:tailEnd type="none" w="med" len="med"/>
+          </a:ln>
+          <a:effectLst/>
+        </p:spPr>
+        <p:txBody>
+          <a:bodyPr vert="horz" wrap="square" lIns="68580" tIns="34290" rIns="68580" bIns="34290" anchor="t" compatLnSpc="1"/>
+          <a:lstStyle/>
+          <a:p>
+            <a:endParaRPr kumimoji="0" lang="en-US" sz="1350"/>
+          </a:p>
+        </p:txBody>
+      </p:sp>
+      <p:sp>
+        <p:nvSpPr>
+          <p:cNvPr id="10" name="Straight Connector 9"/>
+          <p:cNvSpPr>
+            <a:spLocks noChangeShapeType="1"/>
+          </p:cNvSpPr>
+          <p:nvPr/>
+        </p:nvSpPr>
+        <p:spPr bwMode="auto">
+          <a:xfrm rot="5400000">
+            <a:off x="3915025" y="2493169"/>
+            <a:ext cx="4526280" cy="0"/>
+          </a:xfrm>
+          <a:prstGeom prst="line">
+            <a:avLst/>
+          </a:prstGeom>
+          <a:noFill/>
+          <a:ln w="9525" cap="flat" cmpd="sng" algn="ctr">
+            <a:solidFill>
+              <a:schemeClr val="accent2"/>
+            </a:solidFill>
+            <a:prstDash val="dash"/>
+            <a:round/>
+            <a:headEnd type="none" w="med" len="med"/>
+            <a:tailEnd type="none" w="med" len="med"/>
+          </a:ln>
+          <a:effectLst/>
+        </p:spPr>
+        <p:txBody>
+          <a:bodyPr vert="horz" wrap="square" lIns="68580" tIns="34290" rIns="68580" bIns="34290" anchor="t" compatLnSpc="1"/>
+          <a:lstStyle/>
+          <a:p>
+            <a:endParaRPr kumimoji="0" lang="en-US" sz="1350" dirty="0"/>
+          </a:p>
+        </p:txBody>
+      </p:sp>
+      <p:sp>
+        <p:nvSpPr>
+          <p:cNvPr id="9" name="Isosceles Triangle 8"/>
+          <p:cNvSpPr>
+            <a:spLocks noChangeAspect="1"/>
+          </p:cNvSpPr>
+          <p:nvPr/>
+        </p:nvSpPr>
+        <p:spPr>
+          <a:xfrm rot="5400000">
+            <a:off x="442957" y="4835568"/>
+            <a:ext cx="143137" cy="120314"/>
+          </a:xfrm>
+          <a:prstGeom prst="triangle">
+            <a:avLst>
+              <a:gd name="adj" fmla="val 50000"/>
+            </a:avLst>
+          </a:prstGeom>
+          <a:solidFill>
+            <a:schemeClr val="accent2"/>
+          </a:solidFill>
+          <a:ln w="25400" cap="rnd" cmpd="sng" algn="ctr">
+            <a:noFill/>
+            <a:prstDash val="solid"/>
+          </a:ln>
+          <a:effectLst/>
+        </p:spPr>
+        <p:style>
+          <a:lnRef idx="3">
+            <a:schemeClr val="lt1"/>
+          </a:lnRef>
+          <a:fillRef idx="1">
+            <a:schemeClr val="accent1"/>
+          </a:fillRef>
+          <a:effectRef idx="1">
+            <a:schemeClr val="accent1"/>
+          </a:effectRef>
+          <a:fontRef idx="minor">
+            <a:schemeClr val="lt1"/>
+          </a:fontRef>
+        </p:style>
+        <p:txBody>
+          <a:bodyPr anchor="ctr"/>
+          <a:lstStyle/>
+          <a:p>
+            <a:pPr algn="ctr" eaLnBrk="1" latinLnBrk="0" hangingPunct="1"/>
+            <a:endParaRPr kumimoji="0" lang="en-US" sz="1350"/>
+          </a:p>
+        </p:txBody>
+      </p:sp>
+      <p:sp>
+        <p:nvSpPr>
+          <p:cNvPr id="12" name="Content Placeholder 11"/>
+          <p:cNvSpPr>
+            <a:spLocks noGrp="1"/>
+          </p:cNvSpPr>
+          <p:nvPr>
+            <p:ph sz="quarter" idx="1"/>
+          </p:nvPr>
+        </p:nvSpPr>
+        <p:spPr>
+          <a:xfrm>
+            <a:off x="304800" y="228600"/>
+            <a:ext cx="5715000" cy="4286250"/>
+          </a:xfrm>
+        </p:spPr>
+        <p:txBody>
+          <a:bodyPr/>
+          <a:lstStyle/>
+          <a:p>
+            <a:pPr lvl="0" eaLnBrk="1" latinLnBrk="0" hangingPunct="1"/>
+            <a:r>
+              <a:rPr lang="en-US"/>
+              <a:t>Click to edit Master text styles</a:t>
+            </a:r>
+          </a:p>
+          <a:p>
+            <a:pPr lvl="1" eaLnBrk="1" latinLnBrk="0" hangingPunct="1"/>
+            <a:r>
+              <a:rPr lang="en-US"/>
+              <a:t>Second level</a:t>
+            </a:r>
+          </a:p>
+          <a:p>
+            <a:pPr lvl="2" eaLnBrk="1" latinLnBrk="0" hangingPunct="1"/>
+            <a:r>
+              <a:rPr lang="en-US"/>
+              <a:t>Third level</a:t>
+            </a:r>
+          </a:p>
+          <a:p>
+            <a:pPr lvl="3" eaLnBrk="1" latinLnBrk="0" hangingPunct="1"/>
+            <a:r>
+              <a:rPr lang="en-US"/>
+              <a:t>Fourth level</a:t>
+            </a:r>
+          </a:p>
+          <a:p>
+            <a:pPr lvl="4" eaLnBrk="1" latinLnBrk="0" hangingPunct="1"/>
+            <a:r>
+              <a:rPr lang="en-US"/>
+              <a:t>Fifth level</a:t>
+            </a:r>
+            <a:endParaRPr kumimoji="0" lang="en-US"/>
+          </a:p>
+        </p:txBody>
+      </p:sp>
+    </p:spTree>
+    <p:extLst>
+      <p:ext uri="{BB962C8B-B14F-4D97-AF65-F5344CB8AC3E}">
+        <p14:creationId xmlns:p14="http://schemas.microsoft.com/office/powerpoint/2010/main" val="1065474090"/>
+      </p:ext>
+    </p:extLst>
+  </p:cSld>
+  <p:clrMapOvr>
+    <a:masterClrMapping/>
+  </p:clrMapOvr>
+</p:sldLayout>
+</file>
+
+<file path=ppt/slideLayouts/slideLayout29.xml><?xml version="1.0" encoding="utf-8"?>
+<p:sldLayout xmlns:a="http://schemas.openxmlformats.org/drawingml/2006/main" xmlns:r="http://schemas.openxmlformats.org/officeDocument/2006/relationships" xmlns:p="http://schemas.openxmlformats.org/presentationml/2006/main" showMasterSp="0" type="picTx" preserve="1">
+  <p:cSld name="Picture with Caption">
+    <p:bg>
+      <p:bgRef idx="1001">
+        <a:schemeClr val="bg2"/>
+      </p:bgRef>
+    </p:bg>
+    <p:spTree>
+      <p:nvGrpSpPr>
+        <p:cNvPr id="1" name=""/>
+        <p:cNvGrpSpPr/>
+        <p:nvPr/>
+      </p:nvGrpSpPr>
+      <p:grpSpPr>
+        <a:xfrm>
+          <a:off x="0" y="0"/>
+          <a:ext cx="0" cy="0"/>
+          <a:chOff x="0" y="0"/>
+          <a:chExt cx="0" cy="0"/>
+        </a:xfrm>
+      </p:grpSpPr>
+      <p:sp>
+        <p:nvSpPr>
+          <p:cNvPr id="2" name="Title 1"/>
+          <p:cNvSpPr>
+            <a:spLocks noGrp="1"/>
+          </p:cNvSpPr>
+          <p:nvPr>
+            <p:ph type="title"/>
+          </p:nvPr>
+        </p:nvSpPr>
+        <p:spPr>
+          <a:xfrm>
+            <a:off x="457200" y="375642"/>
+            <a:ext cx="8229600" cy="506016"/>
+          </a:xfrm>
+          <a:ln>
+            <a:solidFill>
+              <a:schemeClr val="accent1"/>
+            </a:solidFill>
+          </a:ln>
+        </p:spPr>
+        <p:txBody>
+          <a:bodyPr lIns="274320" anchor="ctr"/>
+          <a:lstStyle>
+            <a:lvl1pPr algn="r">
+              <a:buNone/>
+              <a:defRPr sz="1500" b="0">
+                <a:solidFill>
+                  <a:schemeClr val="tx1"/>
+                </a:solidFill>
+              </a:defRPr>
+            </a:lvl1pPr>
+          </a:lstStyle>
+          <a:p>
+            <a:r>
+              <a:rPr kumimoji="0" lang="en-US"/>
+              <a:t>Click to edit Master title style</a:t>
+            </a:r>
+          </a:p>
+        </p:txBody>
+      </p:sp>
+      <p:sp>
+        <p:nvSpPr>
+          <p:cNvPr id="3" name="Picture Placeholder 2"/>
+          <p:cNvSpPr>
+            <a:spLocks noGrp="1"/>
+          </p:cNvSpPr>
+          <p:nvPr>
+            <p:ph type="pic" idx="1"/>
+          </p:nvPr>
+        </p:nvSpPr>
+        <p:spPr>
+          <a:xfrm>
+            <a:off x="457200" y="1428750"/>
+            <a:ext cx="8229600" cy="3202686"/>
+          </a:xfrm>
+          <a:solidFill>
+            <a:schemeClr val="tx1">
+              <a:shade val="50000"/>
+            </a:schemeClr>
+          </a:solidFill>
+          <a:ln>
+            <a:noFill/>
+          </a:ln>
+          <a:effectLst/>
+        </p:spPr>
+        <p:txBody>
+          <a:bodyPr/>
+          <a:lstStyle>
+            <a:lvl1pPr marL="0" indent="0">
+              <a:spcBef>
+                <a:spcPts val="450"/>
+              </a:spcBef>
+              <a:buNone/>
+              <a:defRPr sz="2400"/>
+            </a:lvl1pPr>
+          </a:lstStyle>
+          <a:p>
+            <a:r>
+              <a:rPr kumimoji="0" lang="en-US"/>
+              <a:t>Click icon to add picture</a:t>
+            </a:r>
+            <a:endParaRPr kumimoji="0" lang="en-US" dirty="0"/>
+          </a:p>
+        </p:txBody>
+      </p:sp>
+      <p:sp>
+        <p:nvSpPr>
+          <p:cNvPr id="4" name="Text Placeholder 3"/>
+          <p:cNvSpPr>
+            <a:spLocks noGrp="1"/>
+          </p:cNvSpPr>
+          <p:nvPr>
+            <p:ph type="body" sz="half" idx="2"/>
+          </p:nvPr>
+        </p:nvSpPr>
+        <p:spPr>
+          <a:xfrm>
+            <a:off x="457200" y="914400"/>
+            <a:ext cx="8229600" cy="400050"/>
+          </a:xfrm>
+        </p:spPr>
+        <p:txBody>
+          <a:bodyPr anchor="ctr" anchorCtr="0"/>
+          <a:lstStyle>
+            <a:lvl1pPr marL="0" indent="0" algn="l">
+              <a:buFontTx/>
+              <a:buNone/>
+              <a:defRPr sz="1050"/>
+            </a:lvl1pPr>
+            <a:lvl2pPr>
+              <a:defRPr sz="900"/>
+            </a:lvl2pPr>
+            <a:lvl3pPr>
+              <a:defRPr sz="750"/>
+            </a:lvl3pPr>
+            <a:lvl4pPr>
+              <a:defRPr sz="675"/>
+            </a:lvl4pPr>
+            <a:lvl5pPr>
+              <a:defRPr sz="675"/>
+            </a:lvl5pPr>
+          </a:lstStyle>
+          <a:p>
+            <a:pPr lvl="0" eaLnBrk="1" latinLnBrk="0" hangingPunct="1"/>
+            <a:r>
+              <a:rPr kumimoji="0" lang="en-US"/>
+              <a:t>Click to edit Master text styles</a:t>
+            </a:r>
+          </a:p>
+        </p:txBody>
+      </p:sp>
+      <p:sp>
+        <p:nvSpPr>
+          <p:cNvPr id="5" name="Date Placeholder 4"/>
+          <p:cNvSpPr>
+            <a:spLocks noGrp="1"/>
+          </p:cNvSpPr>
+          <p:nvPr>
+            <p:ph type="dt" sz="half" idx="10"/>
+          </p:nvPr>
+        </p:nvSpPr>
+        <p:spPr/>
+        <p:txBody>
+          <a:bodyPr/>
+          <a:lstStyle/>
+          <a:p>
+            <a:pPr eaLnBrk="1" latinLnBrk="0" hangingPunct="1"/>
+            <a:fld id="{7218F47B-BA16-4F20-B5BA-73F598D94B51}" type="datetime1">
+              <a:rPr lang="en-US" smtClean="0"/>
+              <a:pPr eaLnBrk="1" latinLnBrk="0" hangingPunct="1"/>
+              <a:t>3/30/2026</a:t>
+            </a:fld>
+            <a:endParaRPr lang="en-US"/>
+          </a:p>
+        </p:txBody>
+      </p:sp>
+      <p:sp>
+        <p:nvSpPr>
+          <p:cNvPr id="6" name="Footer Placeholder 5"/>
+          <p:cNvSpPr>
+            <a:spLocks noGrp="1"/>
+          </p:cNvSpPr>
+          <p:nvPr>
+            <p:ph type="ftr" sz="quarter" idx="11"/>
+          </p:nvPr>
+        </p:nvSpPr>
+        <p:spPr/>
+        <p:txBody>
+          <a:bodyPr/>
+          <a:lstStyle/>
+          <a:p>
+            <a:endParaRPr kumimoji="0" lang="en-US"/>
+          </a:p>
+        </p:txBody>
+      </p:sp>
+      <p:sp>
+        <p:nvSpPr>
+          <p:cNvPr id="7" name="Slide Number Placeholder 6"/>
+          <p:cNvSpPr>
+            <a:spLocks noGrp="1"/>
+          </p:cNvSpPr>
+          <p:nvPr>
+            <p:ph type="sldNum" sz="quarter" idx="12"/>
+          </p:nvPr>
+        </p:nvSpPr>
+        <p:spPr/>
+        <p:txBody>
+          <a:bodyPr/>
+          <a:lstStyle/>
+          <a:p>
+            <a:fld id="{EA7C8D44-3667-46F6-9772-CC52308E2A7F}" type="slidenum">
+              <a:rPr kumimoji="0" lang="en-US" smtClean="0"/>
+              <a:pPr/>
+              <a:t>‹#›</a:t>
+            </a:fld>
+            <a:endParaRPr kumimoji="0" lang="en-US"/>
+          </a:p>
+        </p:txBody>
+      </p:sp>
+      <p:sp>
+        <p:nvSpPr>
+          <p:cNvPr id="8" name="Straight Connector 7"/>
+          <p:cNvSpPr>
+            <a:spLocks noChangeShapeType="1"/>
+          </p:cNvSpPr>
+          <p:nvPr/>
+        </p:nvSpPr>
+        <p:spPr bwMode="auto">
+          <a:xfrm>
+            <a:off x="457200" y="4764881"/>
+            <a:ext cx="8229600" cy="0"/>
+          </a:xfrm>
+          <a:prstGeom prst="line">
+            <a:avLst/>
+          </a:prstGeom>
+          <a:noFill/>
+          <a:ln w="9525" cap="flat" cmpd="sng" algn="ctr">
+            <a:solidFill>
+              <a:schemeClr val="accent2"/>
+            </a:solidFill>
+            <a:prstDash val="dash"/>
+            <a:round/>
+            <a:headEnd type="none" w="med" len="med"/>
+            <a:tailEnd type="none" w="med" len="med"/>
+          </a:ln>
+          <a:effectLst/>
+        </p:spPr>
+        <p:txBody>
+          <a:bodyPr vert="horz" wrap="square" lIns="68580" tIns="34290" rIns="68580" bIns="34290" anchor="t" compatLnSpc="1"/>
+          <a:lstStyle/>
+          <a:p>
+            <a:endParaRPr kumimoji="0" lang="en-US" sz="1350"/>
+          </a:p>
+        </p:txBody>
+      </p:sp>
+      <p:sp>
+        <p:nvSpPr>
+          <p:cNvPr id="9" name="Isosceles Triangle 8"/>
+          <p:cNvSpPr>
+            <a:spLocks noChangeAspect="1"/>
+          </p:cNvSpPr>
+          <p:nvPr/>
+        </p:nvSpPr>
+        <p:spPr>
+          <a:xfrm rot="5400000">
+            <a:off x="442957" y="4835568"/>
+            <a:ext cx="143137" cy="120314"/>
+          </a:xfrm>
+          <a:prstGeom prst="triangle">
+            <a:avLst>
+              <a:gd name="adj" fmla="val 50000"/>
+            </a:avLst>
+          </a:prstGeom>
+          <a:solidFill>
+            <a:schemeClr val="accent2"/>
+          </a:solidFill>
+          <a:ln w="25400" cap="rnd" cmpd="sng" algn="ctr">
+            <a:noFill/>
+            <a:prstDash val="solid"/>
+          </a:ln>
+          <a:effectLst/>
+        </p:spPr>
+        <p:style>
+          <a:lnRef idx="3">
+            <a:schemeClr val="lt1"/>
+          </a:lnRef>
+          <a:fillRef idx="1">
+            <a:schemeClr val="accent1"/>
+          </a:fillRef>
+          <a:effectRef idx="1">
+            <a:schemeClr val="accent1"/>
+          </a:effectRef>
+          <a:fontRef idx="minor">
+            <a:schemeClr val="lt1"/>
+          </a:fontRef>
+        </p:style>
+        <p:txBody>
+          <a:bodyPr anchor="ctr"/>
+          <a:lstStyle/>
+          <a:p>
+            <a:pPr algn="ctr" eaLnBrk="1" latinLnBrk="0" hangingPunct="1"/>
+            <a:endParaRPr kumimoji="0" lang="en-US" sz="1350"/>
+          </a:p>
+        </p:txBody>
+      </p:sp>
+      <p:sp>
+        <p:nvSpPr>
+          <p:cNvPr id="10" name="Rectangle 9"/>
+          <p:cNvSpPr/>
+          <p:nvPr/>
+        </p:nvSpPr>
+        <p:spPr>
+          <a:xfrm>
+            <a:off x="457200" y="375642"/>
+            <a:ext cx="182880" cy="514350"/>
+          </a:xfrm>
+          <a:prstGeom prst="rect">
+            <a:avLst/>
+          </a:prstGeom>
+          <a:solidFill>
+            <a:schemeClr val="accent1"/>
+          </a:solidFill>
+          <a:ln w="6350" cap="rnd" cmpd="sng" algn="ctr">
+            <a:noFill/>
+            <a:prstDash val="solid"/>
+          </a:ln>
+          <a:effectLst/>
+        </p:spPr>
+        <p:style>
+          <a:lnRef idx="3">
+            <a:schemeClr val="lt1"/>
+          </a:lnRef>
+          <a:fillRef idx="1">
+            <a:schemeClr val="accent1"/>
+          </a:fillRef>
+          <a:effectRef idx="1">
+            <a:schemeClr val="accent1"/>
+          </a:effectRef>
+          <a:fontRef idx="minor">
+            <a:schemeClr val="lt1"/>
+          </a:fontRef>
+        </p:style>
+        <p:txBody>
+          <a:bodyPr anchor="ctr"/>
+          <a:lstStyle/>
+          <a:p>
+            <a:pPr algn="ctr" eaLnBrk="1" latinLnBrk="0" hangingPunct="1"/>
+            <a:endParaRPr kumimoji="0" lang="en-US" sz="1350"/>
+          </a:p>
+        </p:txBody>
+      </p:sp>
+    </p:spTree>
+    <p:extLst>
+      <p:ext uri="{BB962C8B-B14F-4D97-AF65-F5344CB8AC3E}">
+        <p14:creationId xmlns:p14="http://schemas.microsoft.com/office/powerpoint/2010/main" val="2437959684"/>
+      </p:ext>
+    </p:extLst>
+  </p:cSld>
+  <p:clrMapOvr>
+    <a:overrideClrMapping bg1="dk1" tx1="lt1" bg2="dk2" tx2="lt2" accent1="accent1" accent2="accent2" accent3="accent3" accent4="accent4" accent5="accent5" accent6="accent6" hlink="hlink" folHlink="folHlink"/>
+  </p:clrMapOvr>
+</p:sldLayout>
+</file>
+
 <file path=ppt/slideLayouts/slideLayout3.xml><?xml version="1.0" encoding="utf-8"?>
 <p:sldLayout xmlns:a="http://schemas.openxmlformats.org/drawingml/2006/main" xmlns:r="http://schemas.openxmlformats.org/officeDocument/2006/relationships" xmlns:p="http://schemas.openxmlformats.org/presentationml/2006/main" matchingName="Title and body" type="tx">
   <p:cSld name="TITLE_AND_BODY">
@@ -7908,6 +10692,482 @@
         </p:spPr>
       </p:cxnSp>
     </p:spTree>
+  </p:cSld>
+  <p:clrMapOvr>
+    <a:masterClrMapping/>
+  </p:clrMapOvr>
+</p:sldLayout>
+</file>
+
+<file path=ppt/slideLayouts/slideLayout30.xml><?xml version="1.0" encoding="utf-8"?>
+<p:sldLayout xmlns:a="http://schemas.openxmlformats.org/drawingml/2006/main" xmlns:r="http://schemas.openxmlformats.org/officeDocument/2006/relationships" xmlns:p="http://schemas.openxmlformats.org/presentationml/2006/main" type="vertTx" preserve="1">
+  <p:cSld name="Title and Vertical Text">
+    <p:spTree>
+      <p:nvGrpSpPr>
+        <p:cNvPr id="1" name=""/>
+        <p:cNvGrpSpPr/>
+        <p:nvPr/>
+      </p:nvGrpSpPr>
+      <p:grpSpPr>
+        <a:xfrm>
+          <a:off x="0" y="0"/>
+          <a:ext cx="0" cy="0"/>
+          <a:chOff x="0" y="0"/>
+          <a:chExt cx="0" cy="0"/>
+        </a:xfrm>
+      </p:grpSpPr>
+      <p:sp>
+        <p:nvSpPr>
+          <p:cNvPr id="2" name="Title 1"/>
+          <p:cNvSpPr>
+            <a:spLocks noGrp="1"/>
+          </p:cNvSpPr>
+          <p:nvPr>
+            <p:ph type="title"/>
+          </p:nvPr>
+        </p:nvSpPr>
+        <p:spPr/>
+        <p:txBody>
+          <a:bodyPr/>
+          <a:lstStyle/>
+          <a:p>
+            <a:r>
+              <a:rPr kumimoji="0" lang="en-US"/>
+              <a:t>Click to edit Master title style</a:t>
+            </a:r>
+          </a:p>
+        </p:txBody>
+      </p:sp>
+      <p:sp>
+        <p:nvSpPr>
+          <p:cNvPr id="3" name="Vertical Text Placeholder 2"/>
+          <p:cNvSpPr>
+            <a:spLocks noGrp="1"/>
+          </p:cNvSpPr>
+          <p:nvPr>
+            <p:ph type="body" orient="vert" idx="1"/>
+          </p:nvPr>
+        </p:nvSpPr>
+        <p:spPr/>
+        <p:txBody>
+          <a:bodyPr vert="eaVert"/>
+          <a:lstStyle/>
+          <a:p>
+            <a:pPr lvl="0" eaLnBrk="1" latinLnBrk="0" hangingPunct="1"/>
+            <a:r>
+              <a:rPr lang="en-US"/>
+              <a:t>Click to edit Master text styles</a:t>
+            </a:r>
+          </a:p>
+          <a:p>
+            <a:pPr lvl="1" eaLnBrk="1" latinLnBrk="0" hangingPunct="1"/>
+            <a:r>
+              <a:rPr lang="en-US"/>
+              <a:t>Second level</a:t>
+            </a:r>
+          </a:p>
+          <a:p>
+            <a:pPr lvl="2" eaLnBrk="1" latinLnBrk="0" hangingPunct="1"/>
+            <a:r>
+              <a:rPr lang="en-US"/>
+              <a:t>Third level</a:t>
+            </a:r>
+          </a:p>
+          <a:p>
+            <a:pPr lvl="3" eaLnBrk="1" latinLnBrk="0" hangingPunct="1"/>
+            <a:r>
+              <a:rPr lang="en-US"/>
+              <a:t>Fourth level</a:t>
+            </a:r>
+          </a:p>
+          <a:p>
+            <a:pPr lvl="4" eaLnBrk="1" latinLnBrk="0" hangingPunct="1"/>
+            <a:r>
+              <a:rPr lang="en-US"/>
+              <a:t>Fifth level</a:t>
+            </a:r>
+            <a:endParaRPr kumimoji="0" lang="en-US"/>
+          </a:p>
+        </p:txBody>
+      </p:sp>
+      <p:sp>
+        <p:nvSpPr>
+          <p:cNvPr id="4" name="Date Placeholder 3"/>
+          <p:cNvSpPr>
+            <a:spLocks noGrp="1"/>
+          </p:cNvSpPr>
+          <p:nvPr>
+            <p:ph type="dt" sz="half" idx="10"/>
+          </p:nvPr>
+        </p:nvSpPr>
+        <p:spPr/>
+        <p:txBody>
+          <a:bodyPr/>
+          <a:lstStyle/>
+          <a:p>
+            <a:pPr eaLnBrk="1" latinLnBrk="0" hangingPunct="1"/>
+            <a:fld id="{9B2E7711-0BE3-4AFC-959B-CB5C31A7AE48}" type="datetime1">
+              <a:rPr lang="en-US" smtClean="0"/>
+              <a:pPr eaLnBrk="1" latinLnBrk="0" hangingPunct="1"/>
+              <a:t>3/30/2026</a:t>
+            </a:fld>
+            <a:endParaRPr lang="en-US"/>
+          </a:p>
+        </p:txBody>
+      </p:sp>
+      <p:sp>
+        <p:nvSpPr>
+          <p:cNvPr id="5" name="Footer Placeholder 4"/>
+          <p:cNvSpPr>
+            <a:spLocks noGrp="1"/>
+          </p:cNvSpPr>
+          <p:nvPr>
+            <p:ph type="ftr" sz="quarter" idx="11"/>
+          </p:nvPr>
+        </p:nvSpPr>
+        <p:spPr/>
+        <p:txBody>
+          <a:bodyPr/>
+          <a:lstStyle/>
+          <a:p>
+            <a:endParaRPr kumimoji="0" lang="en-US"/>
+          </a:p>
+        </p:txBody>
+      </p:sp>
+      <p:sp>
+        <p:nvSpPr>
+          <p:cNvPr id="6" name="Slide Number Placeholder 5"/>
+          <p:cNvSpPr>
+            <a:spLocks noGrp="1"/>
+          </p:cNvSpPr>
+          <p:nvPr>
+            <p:ph type="sldNum" sz="quarter" idx="12"/>
+          </p:nvPr>
+        </p:nvSpPr>
+        <p:spPr/>
+        <p:txBody>
+          <a:bodyPr/>
+          <a:lstStyle/>
+          <a:p>
+            <a:fld id="{EA7C8D44-3667-46F6-9772-CC52308E2A7F}" type="slidenum">
+              <a:rPr kumimoji="0" lang="en-US" smtClean="0"/>
+              <a:pPr/>
+              <a:t>‹#›</a:t>
+            </a:fld>
+            <a:endParaRPr kumimoji="0" lang="en-US"/>
+          </a:p>
+        </p:txBody>
+      </p:sp>
+    </p:spTree>
+    <p:extLst>
+      <p:ext uri="{BB962C8B-B14F-4D97-AF65-F5344CB8AC3E}">
+        <p14:creationId xmlns:p14="http://schemas.microsoft.com/office/powerpoint/2010/main" val="189666251"/>
+      </p:ext>
+    </p:extLst>
+  </p:cSld>
+  <p:clrMapOvr>
+    <a:masterClrMapping/>
+  </p:clrMapOvr>
+</p:sldLayout>
+</file>
+
+<file path=ppt/slideLayouts/slideLayout31.xml><?xml version="1.0" encoding="utf-8"?>
+<p:sldLayout xmlns:a="http://schemas.openxmlformats.org/drawingml/2006/main" xmlns:r="http://schemas.openxmlformats.org/officeDocument/2006/relationships" xmlns:p="http://schemas.openxmlformats.org/presentationml/2006/main" showMasterSp="0" type="vertTitleAndTx" preserve="1">
+  <p:cSld name="Vertical Title and Text">
+    <p:spTree>
+      <p:nvGrpSpPr>
+        <p:cNvPr id="1" name=""/>
+        <p:cNvGrpSpPr/>
+        <p:nvPr/>
+      </p:nvGrpSpPr>
+      <p:grpSpPr>
+        <a:xfrm>
+          <a:off x="0" y="0"/>
+          <a:ext cx="0" cy="0"/>
+          <a:chOff x="0" y="0"/>
+          <a:chExt cx="0" cy="0"/>
+        </a:xfrm>
+      </p:grpSpPr>
+      <p:sp>
+        <p:nvSpPr>
+          <p:cNvPr id="2" name="Vertical Title 1"/>
+          <p:cNvSpPr>
+            <a:spLocks noGrp="1"/>
+          </p:cNvSpPr>
+          <p:nvPr>
+            <p:ph type="title" orient="vert"/>
+          </p:nvPr>
+        </p:nvSpPr>
+        <p:spPr>
+          <a:xfrm>
+            <a:off x="6629400" y="205980"/>
+            <a:ext cx="2057400" cy="4388644"/>
+          </a:xfrm>
+        </p:spPr>
+        <p:txBody>
+          <a:bodyPr vert="eaVert"/>
+          <a:lstStyle/>
+          <a:p>
+            <a:r>
+              <a:rPr kumimoji="0" lang="en-US"/>
+              <a:t>Click to edit Master title style</a:t>
+            </a:r>
+          </a:p>
+        </p:txBody>
+      </p:sp>
+      <p:sp>
+        <p:nvSpPr>
+          <p:cNvPr id="3" name="Vertical Text Placeholder 2"/>
+          <p:cNvSpPr>
+            <a:spLocks noGrp="1"/>
+          </p:cNvSpPr>
+          <p:nvPr>
+            <p:ph type="body" orient="vert" idx="1"/>
+          </p:nvPr>
+        </p:nvSpPr>
+        <p:spPr>
+          <a:xfrm>
+            <a:off x="457200" y="205980"/>
+            <a:ext cx="6019800" cy="4388644"/>
+          </a:xfrm>
+        </p:spPr>
+        <p:txBody>
+          <a:bodyPr vert="eaVert"/>
+          <a:lstStyle/>
+          <a:p>
+            <a:pPr lvl="0" eaLnBrk="1" latinLnBrk="0" hangingPunct="1"/>
+            <a:r>
+              <a:rPr lang="en-US"/>
+              <a:t>Click to edit Master text styles</a:t>
+            </a:r>
+          </a:p>
+          <a:p>
+            <a:pPr lvl="1" eaLnBrk="1" latinLnBrk="0" hangingPunct="1"/>
+            <a:r>
+              <a:rPr lang="en-US"/>
+              <a:t>Second level</a:t>
+            </a:r>
+          </a:p>
+          <a:p>
+            <a:pPr lvl="2" eaLnBrk="1" latinLnBrk="0" hangingPunct="1"/>
+            <a:r>
+              <a:rPr lang="en-US"/>
+              <a:t>Third level</a:t>
+            </a:r>
+          </a:p>
+          <a:p>
+            <a:pPr lvl="3" eaLnBrk="1" latinLnBrk="0" hangingPunct="1"/>
+            <a:r>
+              <a:rPr lang="en-US"/>
+              <a:t>Fourth level</a:t>
+            </a:r>
+          </a:p>
+          <a:p>
+            <a:pPr lvl="4" eaLnBrk="1" latinLnBrk="0" hangingPunct="1"/>
+            <a:r>
+              <a:rPr lang="en-US"/>
+              <a:t>Fifth level</a:t>
+            </a:r>
+            <a:endParaRPr kumimoji="0" lang="en-US"/>
+          </a:p>
+        </p:txBody>
+      </p:sp>
+      <p:sp>
+        <p:nvSpPr>
+          <p:cNvPr id="4" name="Date Placeholder 3"/>
+          <p:cNvSpPr>
+            <a:spLocks noGrp="1"/>
+          </p:cNvSpPr>
+          <p:nvPr>
+            <p:ph type="dt" sz="half" idx="10"/>
+          </p:nvPr>
+        </p:nvSpPr>
+        <p:spPr/>
+        <p:txBody>
+          <a:bodyPr/>
+          <a:lstStyle/>
+          <a:p>
+            <a:pPr eaLnBrk="1" latinLnBrk="0" hangingPunct="1"/>
+            <a:fld id="{825AAB62-A572-4E37-B772-B4A75ADE0B18}" type="datetime1">
+              <a:rPr lang="en-US" smtClean="0"/>
+              <a:pPr eaLnBrk="1" latinLnBrk="0" hangingPunct="1"/>
+              <a:t>3/30/2026</a:t>
+            </a:fld>
+            <a:endParaRPr lang="en-US"/>
+          </a:p>
+        </p:txBody>
+      </p:sp>
+      <p:sp>
+        <p:nvSpPr>
+          <p:cNvPr id="5" name="Footer Placeholder 4"/>
+          <p:cNvSpPr>
+            <a:spLocks noGrp="1"/>
+          </p:cNvSpPr>
+          <p:nvPr>
+            <p:ph type="ftr" sz="quarter" idx="11"/>
+          </p:nvPr>
+        </p:nvSpPr>
+        <p:spPr/>
+        <p:txBody>
+          <a:bodyPr/>
+          <a:lstStyle/>
+          <a:p>
+            <a:endParaRPr kumimoji="0" lang="en-US"/>
+          </a:p>
+        </p:txBody>
+      </p:sp>
+      <p:sp>
+        <p:nvSpPr>
+          <p:cNvPr id="6" name="Slide Number Placeholder 5"/>
+          <p:cNvSpPr>
+            <a:spLocks noGrp="1"/>
+          </p:cNvSpPr>
+          <p:nvPr>
+            <p:ph type="sldNum" sz="quarter" idx="12"/>
+          </p:nvPr>
+        </p:nvSpPr>
+        <p:spPr/>
+        <p:txBody>
+          <a:bodyPr/>
+          <a:lstStyle/>
+          <a:p>
+            <a:fld id="{EA7C8D44-3667-46F6-9772-CC52308E2A7F}" type="slidenum">
+              <a:rPr kumimoji="0" lang="en-US" smtClean="0"/>
+              <a:pPr/>
+              <a:t>‹#›</a:t>
+            </a:fld>
+            <a:endParaRPr kumimoji="0" lang="en-US"/>
+          </a:p>
+        </p:txBody>
+      </p:sp>
+      <p:sp>
+        <p:nvSpPr>
+          <p:cNvPr id="7" name="Straight Connector 6"/>
+          <p:cNvSpPr>
+            <a:spLocks noChangeShapeType="1"/>
+          </p:cNvSpPr>
+          <p:nvPr/>
+        </p:nvSpPr>
+        <p:spPr bwMode="auto">
+          <a:xfrm>
+            <a:off x="457200" y="4764881"/>
+            <a:ext cx="8229600" cy="0"/>
+          </a:xfrm>
+          <a:prstGeom prst="line">
+            <a:avLst/>
+          </a:prstGeom>
+          <a:noFill/>
+          <a:ln w="9525" cap="flat" cmpd="sng" algn="ctr">
+            <a:solidFill>
+              <a:schemeClr val="accent2"/>
+            </a:solidFill>
+            <a:prstDash val="dash"/>
+            <a:round/>
+            <a:headEnd type="none" w="med" len="med"/>
+            <a:tailEnd type="none" w="med" len="med"/>
+          </a:ln>
+          <a:effectLst/>
+        </p:spPr>
+        <p:txBody>
+          <a:bodyPr vert="horz" wrap="square" lIns="68580" tIns="34290" rIns="68580" bIns="34290" anchor="t" compatLnSpc="1"/>
+          <a:lstStyle/>
+          <a:p>
+            <a:endParaRPr kumimoji="0" lang="en-US" sz="1350"/>
+          </a:p>
+        </p:txBody>
+      </p:sp>
+      <p:sp>
+        <p:nvSpPr>
+          <p:cNvPr id="8" name="Isosceles Triangle 7"/>
+          <p:cNvSpPr>
+            <a:spLocks noChangeAspect="1"/>
+          </p:cNvSpPr>
+          <p:nvPr/>
+        </p:nvSpPr>
+        <p:spPr>
+          <a:xfrm rot="5400000">
+            <a:off x="442957" y="4835568"/>
+            <a:ext cx="143137" cy="120314"/>
+          </a:xfrm>
+          <a:prstGeom prst="triangle">
+            <a:avLst>
+              <a:gd name="adj" fmla="val 50000"/>
+            </a:avLst>
+          </a:prstGeom>
+          <a:solidFill>
+            <a:schemeClr val="accent2"/>
+          </a:solidFill>
+          <a:ln w="25400" cap="rnd" cmpd="sng" algn="ctr">
+            <a:noFill/>
+            <a:prstDash val="solid"/>
+          </a:ln>
+          <a:effectLst/>
+        </p:spPr>
+        <p:style>
+          <a:lnRef idx="3">
+            <a:schemeClr val="lt1"/>
+          </a:lnRef>
+          <a:fillRef idx="1">
+            <a:schemeClr val="accent1"/>
+          </a:fillRef>
+          <a:effectRef idx="1">
+            <a:schemeClr val="accent1"/>
+          </a:effectRef>
+          <a:fontRef idx="minor">
+            <a:schemeClr val="lt1"/>
+          </a:fontRef>
+        </p:style>
+        <p:txBody>
+          <a:bodyPr anchor="ctr"/>
+          <a:lstStyle/>
+          <a:p>
+            <a:pPr algn="ctr" eaLnBrk="1" latinLnBrk="0" hangingPunct="1"/>
+            <a:endParaRPr kumimoji="0" lang="en-US" sz="1350"/>
+          </a:p>
+        </p:txBody>
+      </p:sp>
+      <p:sp>
+        <p:nvSpPr>
+          <p:cNvPr id="9" name="Straight Connector 8"/>
+          <p:cNvSpPr>
+            <a:spLocks noChangeShapeType="1"/>
+          </p:cNvSpPr>
+          <p:nvPr/>
+        </p:nvSpPr>
+        <p:spPr bwMode="auto">
+          <a:xfrm rot="5400000">
+            <a:off x="4361127" y="2401464"/>
+            <a:ext cx="4389120" cy="0"/>
+          </a:xfrm>
+          <a:prstGeom prst="line">
+            <a:avLst/>
+          </a:prstGeom>
+          <a:noFill/>
+          <a:ln w="9525" cap="flat" cmpd="sng" algn="ctr">
+            <a:solidFill>
+              <a:schemeClr val="accent2"/>
+            </a:solidFill>
+            <a:prstDash val="dash"/>
+            <a:round/>
+            <a:headEnd type="none" w="med" len="med"/>
+            <a:tailEnd type="none" w="med" len="med"/>
+          </a:ln>
+          <a:effectLst/>
+        </p:spPr>
+        <p:txBody>
+          <a:bodyPr vert="horz" wrap="square" lIns="68580" tIns="34290" rIns="68580" bIns="34290" anchor="t" compatLnSpc="1"/>
+          <a:lstStyle/>
+          <a:p>
+            <a:endParaRPr kumimoji="0" lang="en-US" sz="1350"/>
+          </a:p>
+        </p:txBody>
+      </p:sp>
+    </p:spTree>
+    <p:extLst>
+      <p:ext uri="{BB962C8B-B14F-4D97-AF65-F5344CB8AC3E}">
+        <p14:creationId xmlns:p14="http://schemas.microsoft.com/office/powerpoint/2010/main" val="149671124"/>
+      </p:ext>
+    </p:extLst>
   </p:cSld>
   <p:clrMapOvr>
     <a:masterClrMapping/>
@@ -13539,6 +16799,691 @@
 </p:sldMaster>
 </file>
 
+<file path=ppt/slideMasters/slideMaster2.xml><?xml version="1.0" encoding="utf-8"?>
+<p:sldMaster xmlns:a="http://schemas.openxmlformats.org/drawingml/2006/main" xmlns:r="http://schemas.openxmlformats.org/officeDocument/2006/relationships" xmlns:p="http://schemas.openxmlformats.org/presentationml/2006/main">
+  <p:cSld>
+    <p:bg>
+      <p:bgRef idx="1001">
+        <a:schemeClr val="bg1"/>
+      </p:bgRef>
+    </p:bg>
+    <p:spTree>
+      <p:nvGrpSpPr>
+        <p:cNvPr id="1" name=""/>
+        <p:cNvGrpSpPr/>
+        <p:nvPr/>
+      </p:nvGrpSpPr>
+      <p:grpSpPr>
+        <a:xfrm>
+          <a:off x="0" y="0"/>
+          <a:ext cx="0" cy="0"/>
+          <a:chOff x="0" y="0"/>
+          <a:chExt cx="0" cy="0"/>
+        </a:xfrm>
+      </p:grpSpPr>
+      <p:sp>
+        <p:nvSpPr>
+          <p:cNvPr id="22" name="Title Placeholder 21"/>
+          <p:cNvSpPr>
+            <a:spLocks noGrp="1"/>
+          </p:cNvSpPr>
+          <p:nvPr>
+            <p:ph type="title"/>
+          </p:nvPr>
+        </p:nvSpPr>
+        <p:spPr>
+          <a:xfrm>
+            <a:off x="457200" y="114300"/>
+            <a:ext cx="8229600" cy="742950"/>
+          </a:xfrm>
+          <a:prstGeom prst="rect">
+            <a:avLst/>
+          </a:prstGeom>
+        </p:spPr>
+        <p:txBody>
+          <a:bodyPr vert="horz" anchor="b" anchorCtr="0">
+            <a:normAutofit/>
+          </a:bodyPr>
+          <a:lstStyle/>
+          <a:p>
+            <a:r>
+              <a:rPr kumimoji="0" lang="en-US"/>
+              <a:t>Click to edit Master title style</a:t>
+            </a:r>
+          </a:p>
+        </p:txBody>
+      </p:sp>
+      <p:sp>
+        <p:nvSpPr>
+          <p:cNvPr id="13" name="Text Placeholder 12"/>
+          <p:cNvSpPr>
+            <a:spLocks noGrp="1"/>
+          </p:cNvSpPr>
+          <p:nvPr>
+            <p:ph type="body" idx="1"/>
+          </p:nvPr>
+        </p:nvSpPr>
+        <p:spPr>
+          <a:xfrm>
+            <a:off x="457200" y="914400"/>
+            <a:ext cx="8229600" cy="3682746"/>
+          </a:xfrm>
+          <a:prstGeom prst="rect">
+            <a:avLst/>
+          </a:prstGeom>
+        </p:spPr>
+        <p:txBody>
+          <a:bodyPr vert="horz">
+            <a:normAutofit/>
+          </a:bodyPr>
+          <a:lstStyle/>
+          <a:p>
+            <a:pPr lvl="0" eaLnBrk="1" latinLnBrk="0" hangingPunct="1"/>
+            <a:r>
+              <a:rPr kumimoji="0" lang="en-US"/>
+              <a:t>Click to edit Master text styles</a:t>
+            </a:r>
+          </a:p>
+          <a:p>
+            <a:pPr lvl="1" eaLnBrk="1" latinLnBrk="0" hangingPunct="1"/>
+            <a:r>
+              <a:rPr kumimoji="0" lang="en-US"/>
+              <a:t>Second level</a:t>
+            </a:r>
+          </a:p>
+          <a:p>
+            <a:pPr lvl="2" eaLnBrk="1" latinLnBrk="0" hangingPunct="1"/>
+            <a:r>
+              <a:rPr kumimoji="0" lang="en-US"/>
+              <a:t>Third level</a:t>
+            </a:r>
+          </a:p>
+          <a:p>
+            <a:pPr lvl="3" eaLnBrk="1" latinLnBrk="0" hangingPunct="1"/>
+            <a:r>
+              <a:rPr kumimoji="0" lang="en-US"/>
+              <a:t>Fourth level</a:t>
+            </a:r>
+          </a:p>
+          <a:p>
+            <a:pPr lvl="4" eaLnBrk="1" latinLnBrk="0" hangingPunct="1"/>
+            <a:r>
+              <a:rPr kumimoji="0" lang="en-US"/>
+              <a:t>Fifth level</a:t>
+            </a:r>
+          </a:p>
+        </p:txBody>
+      </p:sp>
+      <p:sp>
+        <p:nvSpPr>
+          <p:cNvPr id="14" name="Date Placeholder 13"/>
+          <p:cNvSpPr>
+            <a:spLocks noGrp="1"/>
+          </p:cNvSpPr>
+          <p:nvPr>
+            <p:ph type="dt" sz="half" idx="2"/>
+          </p:nvPr>
+        </p:nvSpPr>
+        <p:spPr>
+          <a:xfrm>
+            <a:off x="6400800" y="4767263"/>
+            <a:ext cx="2289048" cy="274320"/>
+          </a:xfrm>
+          <a:prstGeom prst="rect">
+            <a:avLst/>
+          </a:prstGeom>
+        </p:spPr>
+        <p:txBody>
+          <a:bodyPr vert="horz"/>
+          <a:lstStyle>
+            <a:lvl1pPr algn="l" eaLnBrk="1" latinLnBrk="0" hangingPunct="1">
+              <a:defRPr kumimoji="0" sz="1050">
+                <a:solidFill>
+                  <a:schemeClr val="tx2"/>
+                </a:solidFill>
+              </a:defRPr>
+            </a:lvl1pPr>
+          </a:lstStyle>
+          <a:p>
+            <a:pPr eaLnBrk="1" latinLnBrk="0" hangingPunct="1"/>
+            <a:fld id="{4F3CB514-9CA6-4E48-9463-A430D31CFDE3}" type="datetime1">
+              <a:rPr lang="en-US" smtClean="0"/>
+              <a:pPr eaLnBrk="1" latinLnBrk="0" hangingPunct="1"/>
+              <a:t>3/30/2026</a:t>
+            </a:fld>
+            <a:endParaRPr lang="en-US" sz="1050" dirty="0">
+              <a:solidFill>
+                <a:schemeClr val="tx2"/>
+              </a:solidFill>
+            </a:endParaRPr>
+          </a:p>
+        </p:txBody>
+      </p:sp>
+      <p:sp>
+        <p:nvSpPr>
+          <p:cNvPr id="3" name="Footer Placeholder 2"/>
+          <p:cNvSpPr>
+            <a:spLocks noGrp="1"/>
+          </p:cNvSpPr>
+          <p:nvPr>
+            <p:ph type="ftr" sz="quarter" idx="3"/>
+          </p:nvPr>
+        </p:nvSpPr>
+        <p:spPr>
+          <a:xfrm>
+            <a:off x="2898648" y="4767263"/>
+            <a:ext cx="3505200" cy="274320"/>
+          </a:xfrm>
+          <a:prstGeom prst="rect">
+            <a:avLst/>
+          </a:prstGeom>
+        </p:spPr>
+        <p:txBody>
+          <a:bodyPr vert="horz"/>
+          <a:lstStyle>
+            <a:lvl1pPr algn="r" eaLnBrk="1" latinLnBrk="0" hangingPunct="1">
+              <a:defRPr kumimoji="0" sz="1050">
+                <a:solidFill>
+                  <a:schemeClr val="tx2"/>
+                </a:solidFill>
+              </a:defRPr>
+            </a:lvl1pPr>
+          </a:lstStyle>
+          <a:p>
+            <a:pPr algn="r" eaLnBrk="1" latinLnBrk="0" hangingPunct="1"/>
+            <a:endParaRPr kumimoji="0" lang="en-US" sz="1050" dirty="0">
+              <a:solidFill>
+                <a:schemeClr val="tx2"/>
+              </a:solidFill>
+            </a:endParaRPr>
+          </a:p>
+        </p:txBody>
+      </p:sp>
+      <p:sp>
+        <p:nvSpPr>
+          <p:cNvPr id="23" name="Slide Number Placeholder 22"/>
+          <p:cNvSpPr>
+            <a:spLocks noGrp="1"/>
+          </p:cNvSpPr>
+          <p:nvPr>
+            <p:ph type="sldNum" sz="quarter" idx="4"/>
+          </p:nvPr>
+        </p:nvSpPr>
+        <p:spPr>
+          <a:xfrm>
+            <a:off x="612648" y="4767263"/>
+            <a:ext cx="1981200" cy="274320"/>
+          </a:xfrm>
+          <a:prstGeom prst="rect">
+            <a:avLst/>
+          </a:prstGeom>
+        </p:spPr>
+        <p:txBody>
+          <a:bodyPr vert="horz"/>
+          <a:lstStyle>
+            <a:lvl1pPr algn="l" eaLnBrk="1" latinLnBrk="0" hangingPunct="1">
+              <a:defRPr kumimoji="0" sz="1050">
+                <a:solidFill>
+                  <a:schemeClr val="tx2"/>
+                </a:solidFill>
+              </a:defRPr>
+            </a:lvl1pPr>
+          </a:lstStyle>
+          <a:p>
+            <a:pPr algn="l" eaLnBrk="1" latinLnBrk="0" hangingPunct="1"/>
+            <a:fld id="{EA7C8D44-3667-46F6-9772-CC52308E2A7F}" type="slidenum">
+              <a:rPr kumimoji="0" lang="en-US" smtClean="0"/>
+              <a:pPr algn="l" eaLnBrk="1" latinLnBrk="0" hangingPunct="1"/>
+              <a:t>‹#›</a:t>
+            </a:fld>
+            <a:endParaRPr kumimoji="0" lang="en-US" sz="1200" dirty="0">
+              <a:solidFill>
+                <a:schemeClr val="tx2"/>
+              </a:solidFill>
+            </a:endParaRPr>
+          </a:p>
+        </p:txBody>
+      </p:sp>
+      <p:sp>
+        <p:nvSpPr>
+          <p:cNvPr id="28" name="Straight Connector 27"/>
+          <p:cNvSpPr>
+            <a:spLocks noChangeShapeType="1"/>
+          </p:cNvSpPr>
+          <p:nvPr/>
+        </p:nvSpPr>
+        <p:spPr bwMode="auto">
+          <a:xfrm>
+            <a:off x="457200" y="4764881"/>
+            <a:ext cx="8229600" cy="0"/>
+          </a:xfrm>
+          <a:prstGeom prst="line">
+            <a:avLst/>
+          </a:prstGeom>
+          <a:noFill/>
+          <a:ln w="9525" cap="flat" cmpd="sng" algn="ctr">
+            <a:solidFill>
+              <a:schemeClr val="accent2"/>
+            </a:solidFill>
+            <a:prstDash val="dash"/>
+            <a:round/>
+            <a:headEnd type="none" w="med" len="med"/>
+            <a:tailEnd type="none" w="med" len="med"/>
+          </a:ln>
+          <a:effectLst/>
+        </p:spPr>
+        <p:txBody>
+          <a:bodyPr vert="horz" wrap="square" lIns="68580" tIns="34290" rIns="68580" bIns="34290" anchor="t" compatLnSpc="1"/>
+          <a:lstStyle/>
+          <a:p>
+            <a:endParaRPr kumimoji="0" lang="en-US" sz="1350"/>
+          </a:p>
+        </p:txBody>
+      </p:sp>
+      <p:sp>
+        <p:nvSpPr>
+          <p:cNvPr id="29" name="Straight Connector 28"/>
+          <p:cNvSpPr>
+            <a:spLocks noChangeShapeType="1"/>
+          </p:cNvSpPr>
+          <p:nvPr/>
+        </p:nvSpPr>
+        <p:spPr bwMode="auto">
+          <a:xfrm>
+            <a:off x="457200" y="857250"/>
+            <a:ext cx="8229600" cy="0"/>
+          </a:xfrm>
+          <a:prstGeom prst="line">
+            <a:avLst/>
+          </a:prstGeom>
+          <a:noFill/>
+          <a:ln w="9525" cap="flat" cmpd="sng" algn="ctr">
+            <a:solidFill>
+              <a:schemeClr val="accent2"/>
+            </a:solidFill>
+            <a:prstDash val="dash"/>
+            <a:round/>
+            <a:headEnd type="none" w="med" len="med"/>
+            <a:tailEnd type="none" w="med" len="med"/>
+          </a:ln>
+          <a:effectLst/>
+        </p:spPr>
+        <p:txBody>
+          <a:bodyPr vert="horz" wrap="square" lIns="68580" tIns="34290" rIns="68580" bIns="34290" anchor="t" compatLnSpc="1"/>
+          <a:lstStyle/>
+          <a:p>
+            <a:endParaRPr kumimoji="0" lang="en-US" sz="1350"/>
+          </a:p>
+        </p:txBody>
+      </p:sp>
+      <p:sp>
+        <p:nvSpPr>
+          <p:cNvPr id="10" name="Isosceles Triangle 9"/>
+          <p:cNvSpPr>
+            <a:spLocks noChangeAspect="1"/>
+          </p:cNvSpPr>
+          <p:nvPr/>
+        </p:nvSpPr>
+        <p:spPr>
+          <a:xfrm rot="5400000">
+            <a:off x="442957" y="4835568"/>
+            <a:ext cx="143137" cy="120314"/>
+          </a:xfrm>
+          <a:prstGeom prst="triangle">
+            <a:avLst>
+              <a:gd name="adj" fmla="val 50000"/>
+            </a:avLst>
+          </a:prstGeom>
+          <a:solidFill>
+            <a:schemeClr val="accent2"/>
+          </a:solidFill>
+          <a:ln w="25400" cap="rnd" cmpd="sng" algn="ctr">
+            <a:noFill/>
+            <a:prstDash val="solid"/>
+          </a:ln>
+          <a:effectLst/>
+        </p:spPr>
+        <p:style>
+          <a:lnRef idx="3">
+            <a:schemeClr val="lt1"/>
+          </a:lnRef>
+          <a:fillRef idx="1">
+            <a:schemeClr val="accent1"/>
+          </a:fillRef>
+          <a:effectRef idx="1">
+            <a:schemeClr val="accent1"/>
+          </a:effectRef>
+          <a:fontRef idx="minor">
+            <a:schemeClr val="lt1"/>
+          </a:fontRef>
+        </p:style>
+        <p:txBody>
+          <a:bodyPr anchor="ctr"/>
+          <a:lstStyle/>
+          <a:p>
+            <a:pPr algn="ctr" eaLnBrk="1" latinLnBrk="0" hangingPunct="1"/>
+            <a:endParaRPr kumimoji="0" lang="en-US" sz="1350"/>
+          </a:p>
+        </p:txBody>
+      </p:sp>
+    </p:spTree>
+    <p:extLst>
+      <p:ext uri="{BB962C8B-B14F-4D97-AF65-F5344CB8AC3E}">
+        <p14:creationId xmlns:p14="http://schemas.microsoft.com/office/powerpoint/2010/main" val="853466973"/>
+      </p:ext>
+    </p:extLst>
+  </p:cSld>
+  <p:clrMap bg1="lt1" tx1="dk1" bg2="lt2" tx2="dk2" accent1="accent1" accent2="accent2" accent3="accent3" accent4="accent4" accent5="accent5" accent6="accent6" hlink="hlink" folHlink="folHlink"/>
+  <p:sldLayoutIdLst>
+    <p:sldLayoutId id="2147483673" r:id="rId1"/>
+    <p:sldLayoutId id="2147483674" r:id="rId2"/>
+    <p:sldLayoutId id="2147483675" r:id="rId3"/>
+    <p:sldLayoutId id="2147483676" r:id="rId4"/>
+    <p:sldLayoutId id="2147483677" r:id="rId5"/>
+    <p:sldLayoutId id="2147483678" r:id="rId6"/>
+    <p:sldLayoutId id="2147483679" r:id="rId7"/>
+    <p:sldLayoutId id="2147483680" r:id="rId8"/>
+    <p:sldLayoutId id="2147483681" r:id="rId9"/>
+    <p:sldLayoutId id="2147483682" r:id="rId10"/>
+    <p:sldLayoutId id="2147483683" r:id="rId11"/>
+  </p:sldLayoutIdLst>
+  <p:hf hdr="0" ftr="0" dt="0"/>
+  <p:txStyles>
+    <p:titleStyle>
+      <a:lvl1pPr algn="l" rtl="0" eaLnBrk="1" latinLnBrk="0" hangingPunct="1">
+        <a:spcBef>
+          <a:spcPct val="0"/>
+        </a:spcBef>
+        <a:buNone/>
+        <a:defRPr kumimoji="0" sz="2400" kern="1200">
+          <a:solidFill>
+            <a:schemeClr val="tx2"/>
+          </a:solidFill>
+          <a:latin typeface="+mj-lt"/>
+          <a:ea typeface="+mj-ea"/>
+          <a:cs typeface="+mj-cs"/>
+        </a:defRPr>
+      </a:lvl1pPr>
+    </p:titleStyle>
+    <p:bodyStyle>
+      <a:lvl1pPr marL="205740" indent="-205740" algn="l" rtl="0" eaLnBrk="1" latinLnBrk="0" hangingPunct="1">
+        <a:spcBef>
+          <a:spcPts val="450"/>
+        </a:spcBef>
+        <a:buClr>
+          <a:schemeClr val="accent1"/>
+        </a:buClr>
+        <a:buSzPct val="76000"/>
+        <a:buFont typeface="Wingdings 3"/>
+        <a:buChar char=""/>
+        <a:defRPr kumimoji="0" sz="1950" kern="1200">
+          <a:solidFill>
+            <a:schemeClr val="tx1"/>
+          </a:solidFill>
+          <a:latin typeface="+mn-lt"/>
+          <a:ea typeface="+mn-ea"/>
+          <a:cs typeface="+mn-cs"/>
+        </a:defRPr>
+      </a:lvl1pPr>
+      <a:lvl2pPr marL="411480" indent="-205740" algn="l" rtl="0" eaLnBrk="1" latinLnBrk="0" hangingPunct="1">
+        <a:spcBef>
+          <a:spcPts val="375"/>
+        </a:spcBef>
+        <a:buClr>
+          <a:schemeClr val="accent2"/>
+        </a:buClr>
+        <a:buSzPct val="76000"/>
+        <a:buFont typeface="Wingdings 3"/>
+        <a:buChar char=""/>
+        <a:defRPr kumimoji="0" sz="1725" kern="1200">
+          <a:solidFill>
+            <a:schemeClr val="tx2"/>
+          </a:solidFill>
+          <a:latin typeface="+mn-lt"/>
+          <a:ea typeface="+mn-ea"/>
+          <a:cs typeface="+mn-cs"/>
+        </a:defRPr>
+      </a:lvl2pPr>
+      <a:lvl3pPr marL="617220" indent="-171450" algn="l" rtl="0" eaLnBrk="1" latinLnBrk="0" hangingPunct="1">
+        <a:spcBef>
+          <a:spcPts val="375"/>
+        </a:spcBef>
+        <a:buClr>
+          <a:schemeClr val="bg1">
+            <a:shade val="50000"/>
+          </a:schemeClr>
+        </a:buClr>
+        <a:buSzPct val="76000"/>
+        <a:buFont typeface="Wingdings 3"/>
+        <a:buChar char=""/>
+        <a:defRPr kumimoji="0" sz="1500" kern="1200">
+          <a:solidFill>
+            <a:schemeClr val="tx1"/>
+          </a:solidFill>
+          <a:latin typeface="+mn-lt"/>
+          <a:ea typeface="+mn-ea"/>
+          <a:cs typeface="+mn-cs"/>
+        </a:defRPr>
+      </a:lvl3pPr>
+      <a:lvl4pPr marL="822960" indent="-171450" algn="l" rtl="0" eaLnBrk="1" latinLnBrk="0" hangingPunct="1">
+        <a:spcBef>
+          <a:spcPts val="300"/>
+        </a:spcBef>
+        <a:buClr>
+          <a:schemeClr val="accent2">
+            <a:shade val="75000"/>
+          </a:schemeClr>
+        </a:buClr>
+        <a:buSzPct val="70000"/>
+        <a:buFont typeface="Wingdings"/>
+        <a:buChar char=""/>
+        <a:defRPr kumimoji="0" sz="1350" kern="1200">
+          <a:solidFill>
+            <a:schemeClr val="tx1"/>
+          </a:solidFill>
+          <a:latin typeface="+mn-lt"/>
+          <a:ea typeface="+mn-ea"/>
+          <a:cs typeface="+mn-cs"/>
+        </a:defRPr>
+      </a:lvl4pPr>
+      <a:lvl5pPr marL="1028700" indent="-171450" algn="l" rtl="0" eaLnBrk="1" latinLnBrk="0" hangingPunct="1">
+        <a:spcBef>
+          <a:spcPts val="225"/>
+        </a:spcBef>
+        <a:buClr>
+          <a:schemeClr val="accent2"/>
+        </a:buClr>
+        <a:buSzPct val="70000"/>
+        <a:buFont typeface="Wingdings"/>
+        <a:buChar char=""/>
+        <a:defRPr kumimoji="0" sz="1200" kern="1200">
+          <a:solidFill>
+            <a:schemeClr val="tx1"/>
+          </a:solidFill>
+          <a:latin typeface="+mn-lt"/>
+          <a:ea typeface="+mn-ea"/>
+          <a:cs typeface="+mn-cs"/>
+        </a:defRPr>
+      </a:lvl5pPr>
+      <a:lvl6pPr marL="1234440" indent="-137160" algn="l" rtl="0" eaLnBrk="1" latinLnBrk="0" hangingPunct="1">
+        <a:spcBef>
+          <a:spcPts val="225"/>
+        </a:spcBef>
+        <a:buClr>
+          <a:srgbClr val="9FB8CD">
+            <a:shade val="75000"/>
+          </a:srgbClr>
+        </a:buClr>
+        <a:buSzPct val="75000"/>
+        <a:buFont typeface="Wingdings 3"/>
+        <a:buChar char=""/>
+        <a:defRPr kumimoji="0" lang="en-US" sz="1200" kern="1200" smtClean="0">
+          <a:solidFill>
+            <a:schemeClr val="tx1"/>
+          </a:solidFill>
+          <a:latin typeface="+mn-lt"/>
+          <a:ea typeface="+mn-ea"/>
+          <a:cs typeface="+mn-cs"/>
+        </a:defRPr>
+      </a:lvl6pPr>
+      <a:lvl7pPr marL="1371600" indent="-137160" algn="l" rtl="0" eaLnBrk="1" latinLnBrk="0" hangingPunct="1">
+        <a:spcBef>
+          <a:spcPts val="225"/>
+        </a:spcBef>
+        <a:buClr>
+          <a:srgbClr val="727CA3">
+            <a:shade val="75000"/>
+          </a:srgbClr>
+        </a:buClr>
+        <a:buSzPct val="75000"/>
+        <a:buFont typeface="Wingdings 3"/>
+        <a:buChar char=""/>
+        <a:defRPr kumimoji="0" lang="en-US" sz="1050" kern="1200" smtClean="0">
+          <a:solidFill>
+            <a:schemeClr val="tx1"/>
+          </a:solidFill>
+          <a:latin typeface="+mn-lt"/>
+          <a:ea typeface="+mn-ea"/>
+          <a:cs typeface="+mn-cs"/>
+        </a:defRPr>
+      </a:lvl7pPr>
+      <a:lvl8pPr marL="1508760" indent="-137160" algn="l" rtl="0" eaLnBrk="1" latinLnBrk="0" hangingPunct="1">
+        <a:spcBef>
+          <a:spcPts val="225"/>
+        </a:spcBef>
+        <a:buClr>
+          <a:prstClr val="white">
+            <a:shade val="50000"/>
+          </a:prstClr>
+        </a:buClr>
+        <a:buSzPct val="75000"/>
+        <a:buFont typeface="Wingdings 3"/>
+        <a:buChar char=""/>
+        <a:defRPr kumimoji="0" lang="en-US" sz="1050" kern="1200" smtClean="0">
+          <a:solidFill>
+            <a:schemeClr val="tx1"/>
+          </a:solidFill>
+          <a:latin typeface="+mn-lt"/>
+          <a:ea typeface="+mn-ea"/>
+          <a:cs typeface="+mn-cs"/>
+        </a:defRPr>
+      </a:lvl8pPr>
+      <a:lvl9pPr marL="1645920" indent="-137160" algn="l" rtl="0" eaLnBrk="1" latinLnBrk="0" hangingPunct="1">
+        <a:spcBef>
+          <a:spcPts val="225"/>
+        </a:spcBef>
+        <a:buClr>
+          <a:srgbClr val="9FB8CD"/>
+        </a:buClr>
+        <a:buSzPct val="75000"/>
+        <a:buFont typeface="Wingdings 3"/>
+        <a:buChar char=""/>
+        <a:defRPr kumimoji="0" lang="en-US" sz="900" kern="1200" smtClean="0">
+          <a:solidFill>
+            <a:schemeClr val="tx1"/>
+          </a:solidFill>
+          <a:latin typeface="+mn-lt"/>
+          <a:ea typeface="+mn-ea"/>
+          <a:cs typeface="+mn-cs"/>
+        </a:defRPr>
+      </a:lvl9pPr>
+    </p:bodyStyle>
+    <p:otherStyle>
+      <a:lvl1pPr marL="0" algn="l" rtl="0" eaLnBrk="1" latinLnBrk="0" hangingPunct="1">
+        <a:defRPr kumimoji="0" kern="1200">
+          <a:solidFill>
+            <a:schemeClr val="tx1"/>
+          </a:solidFill>
+          <a:latin typeface="+mn-lt"/>
+          <a:ea typeface="+mn-ea"/>
+          <a:cs typeface="+mn-cs"/>
+        </a:defRPr>
+      </a:lvl1pPr>
+      <a:lvl2pPr marL="342900" algn="l" rtl="0" eaLnBrk="1" latinLnBrk="0" hangingPunct="1">
+        <a:defRPr kumimoji="0" kern="1200">
+          <a:solidFill>
+            <a:schemeClr val="tx1"/>
+          </a:solidFill>
+          <a:latin typeface="+mn-lt"/>
+          <a:ea typeface="+mn-ea"/>
+          <a:cs typeface="+mn-cs"/>
+        </a:defRPr>
+      </a:lvl2pPr>
+      <a:lvl3pPr marL="685800" algn="l" rtl="0" eaLnBrk="1" latinLnBrk="0" hangingPunct="1">
+        <a:defRPr kumimoji="0" kern="1200">
+          <a:solidFill>
+            <a:schemeClr val="tx1"/>
+          </a:solidFill>
+          <a:latin typeface="+mn-lt"/>
+          <a:ea typeface="+mn-ea"/>
+          <a:cs typeface="+mn-cs"/>
+        </a:defRPr>
+      </a:lvl3pPr>
+      <a:lvl4pPr marL="1028700" algn="l" rtl="0" eaLnBrk="1" latinLnBrk="0" hangingPunct="1">
+        <a:defRPr kumimoji="0" kern="1200">
+          <a:solidFill>
+            <a:schemeClr val="tx1"/>
+          </a:solidFill>
+          <a:latin typeface="+mn-lt"/>
+          <a:ea typeface="+mn-ea"/>
+          <a:cs typeface="+mn-cs"/>
+        </a:defRPr>
+      </a:lvl4pPr>
+      <a:lvl5pPr marL="1371600" algn="l" rtl="0" eaLnBrk="1" latinLnBrk="0" hangingPunct="1">
+        <a:defRPr kumimoji="0" kern="1200">
+          <a:solidFill>
+            <a:schemeClr val="tx1"/>
+          </a:solidFill>
+          <a:latin typeface="+mn-lt"/>
+          <a:ea typeface="+mn-ea"/>
+          <a:cs typeface="+mn-cs"/>
+        </a:defRPr>
+      </a:lvl5pPr>
+      <a:lvl6pPr marL="1714500" algn="l" rtl="0" eaLnBrk="1" latinLnBrk="0" hangingPunct="1">
+        <a:defRPr kumimoji="0" kern="1200">
+          <a:solidFill>
+            <a:schemeClr val="tx1"/>
+          </a:solidFill>
+          <a:latin typeface="+mn-lt"/>
+          <a:ea typeface="+mn-ea"/>
+          <a:cs typeface="+mn-cs"/>
+        </a:defRPr>
+      </a:lvl6pPr>
+      <a:lvl7pPr marL="2057400" algn="l" rtl="0" eaLnBrk="1" latinLnBrk="0" hangingPunct="1">
+        <a:defRPr kumimoji="0" kern="1200">
+          <a:solidFill>
+            <a:schemeClr val="tx1"/>
+          </a:solidFill>
+          <a:latin typeface="+mn-lt"/>
+          <a:ea typeface="+mn-ea"/>
+          <a:cs typeface="+mn-cs"/>
+        </a:defRPr>
+      </a:lvl7pPr>
+      <a:lvl8pPr marL="2400300" algn="l" rtl="0" eaLnBrk="1" latinLnBrk="0" hangingPunct="1">
+        <a:defRPr kumimoji="0" kern="1200">
+          <a:solidFill>
+            <a:schemeClr val="tx1"/>
+          </a:solidFill>
+          <a:latin typeface="+mn-lt"/>
+          <a:ea typeface="+mn-ea"/>
+          <a:cs typeface="+mn-cs"/>
+        </a:defRPr>
+      </a:lvl8pPr>
+      <a:lvl9pPr marL="2743200" algn="l" rtl="0" eaLnBrk="1" latinLnBrk="0" hangingPunct="1">
+        <a:defRPr kumimoji="0" kern="1200">
+          <a:solidFill>
+            <a:schemeClr val="tx1"/>
+          </a:solidFill>
+          <a:latin typeface="+mn-lt"/>
+          <a:ea typeface="+mn-ea"/>
+          <a:cs typeface="+mn-cs"/>
+        </a:defRPr>
+      </a:lvl9pPr>
+    </p:otherStyle>
+  </p:txStyles>
+</p:sldMaster>
+</file>
+
 <file path=ppt/slides/slide1.xml><?xml version="1.0" encoding="utf-8"?>
 <p:sld xmlns:a="http://schemas.openxmlformats.org/drawingml/2006/main" xmlns:r="http://schemas.openxmlformats.org/officeDocument/2006/relationships" xmlns:p="http://schemas.openxmlformats.org/presentationml/2006/main">
   <p:cSld>
@@ -13832,7 +17777,7 @@
           <a:p>
             <a:r>
               <a:rPr lang="en-US" dirty="0"/>
-              <a:t>Q1. Longest Prefix Matching </a:t>
+              <a:t>Q1 Longest Prefix Matching </a:t>
             </a:r>
           </a:p>
         </p:txBody>
@@ -14110,7 +18055,7 @@
           <a:p>
             <a:r>
               <a:rPr lang="en-US" dirty="0"/>
-              <a:t>Q1. Longest Prefix Matching ANS</a:t>
+              <a:t>Q1 Longest Prefix Matching ANS</a:t>
             </a:r>
           </a:p>
         </p:txBody>
@@ -14351,15 +18296,7 @@
             </a:r>
             <a:r>
               <a:rPr lang="en-US" dirty="0"/>
-              <a:t>. This means the next 28 bits can each be either 0 or 1, </a:t>
-            </a:r>
-            <a:r>
-              <a:rPr lang="en-US" dirty="0" err="1"/>
-              <a:t>totalling</a:t>
-            </a:r>
-            <a:r>
-              <a:rPr lang="en-US" dirty="0"/>
-              <a:t> to 2</a:t>
+              <a:t>. This means the next 28 bits can each be either 0 or 1,  with a total of to 2</a:t>
             </a:r>
             <a:r>
               <a:rPr lang="en-US" baseline="30000" dirty="0"/>
@@ -14630,7 +18567,7 @@
             </a:r>
             <a:r>
               <a:rPr lang="en-US" sz="1100" dirty="0"/>
-              <a:t>’.</a:t>
+              <a:t>.</a:t>
             </a:r>
           </a:p>
         </p:txBody>
@@ -15269,6 +19206,2652 @@
 </p:sld>
 </file>
 
+<file path=ppt/slides/slide4.xml><?xml version="1.0" encoding="utf-8"?>
+<p:sld xmlns:a="http://schemas.openxmlformats.org/drawingml/2006/main" xmlns:r="http://schemas.openxmlformats.org/officeDocument/2006/relationships" xmlns:p="http://schemas.openxmlformats.org/presentationml/2006/main">
+  <p:cSld>
+    <p:spTree>
+      <p:nvGrpSpPr>
+        <p:cNvPr id="1" name=""/>
+        <p:cNvGrpSpPr/>
+        <p:nvPr/>
+      </p:nvGrpSpPr>
+      <p:grpSpPr>
+        <a:xfrm>
+          <a:off x="0" y="0"/>
+          <a:ext cx="0" cy="0"/>
+          <a:chOff x="0" y="0"/>
+          <a:chExt cx="0" cy="0"/>
+        </a:xfrm>
+      </p:grpSpPr>
+      <p:sp>
+        <p:nvSpPr>
+          <p:cNvPr id="2" name="Title 1">
+            <a:extLst>
+              <a:ext uri="{FF2B5EF4-FFF2-40B4-BE49-F238E27FC236}">
+                <a16:creationId xmlns:a16="http://schemas.microsoft.com/office/drawing/2014/main" id="{2C28BD5B-C4F0-53EA-12F2-2853D15B07E4}"/>
+              </a:ext>
+            </a:extLst>
+          </p:cNvPr>
+          <p:cNvSpPr>
+            <a:spLocks noGrp="1"/>
+          </p:cNvSpPr>
+          <p:nvPr>
+            <p:ph type="title"/>
+          </p:nvPr>
+        </p:nvSpPr>
+        <p:spPr>
+          <a:xfrm>
+            <a:off x="457200" y="114300"/>
+            <a:ext cx="7223760" cy="742950"/>
+          </a:xfrm>
+        </p:spPr>
+        <p:txBody>
+          <a:bodyPr>
+            <a:normAutofit fontScale="90000"/>
+          </a:bodyPr>
+          <a:lstStyle/>
+          <a:p>
+            <a:r>
+              <a:rPr lang="en-US" altLang="zh-CN" dirty="0"/>
+              <a:t>Q2 Longest Prefix Matching (not covered in midterm)</a:t>
+            </a:r>
+            <a:endParaRPr lang="zh-CN" altLang="en-US" dirty="0"/>
+          </a:p>
+        </p:txBody>
+      </p:sp>
+      <p:sp>
+        <p:nvSpPr>
+          <p:cNvPr id="3" name="Slide Number Placeholder 2">
+            <a:extLst>
+              <a:ext uri="{FF2B5EF4-FFF2-40B4-BE49-F238E27FC236}">
+                <a16:creationId xmlns:a16="http://schemas.microsoft.com/office/drawing/2014/main" id="{905E1E0C-775D-F978-9F6A-29D3303D6705}"/>
+              </a:ext>
+            </a:extLst>
+          </p:cNvPr>
+          <p:cNvSpPr>
+            <a:spLocks noGrp="1"/>
+          </p:cNvSpPr>
+          <p:nvPr>
+            <p:ph type="sldNum" sz="quarter" idx="12"/>
+          </p:nvPr>
+        </p:nvSpPr>
+        <p:spPr/>
+        <p:txBody>
+          <a:bodyPr/>
+          <a:lstStyle/>
+          <a:p>
+            <a:pPr defTabSz="685800">
+              <a:buClrTx/>
+            </a:pPr>
+            <a:fld id="{EA7C8D44-3667-46F6-9772-CC52308E2A7F}" type="slidenum">
+              <a:rPr lang="en-US" kern="1200">
+                <a:solidFill>
+                  <a:srgbClr val="1F497D"/>
+                </a:solidFill>
+                <a:latin typeface="Gill Sans MT"/>
+                <a:ea typeface="+mn-ea"/>
+                <a:cs typeface="+mn-cs"/>
+              </a:rPr>
+              <a:pPr defTabSz="685800">
+                <a:buClrTx/>
+              </a:pPr>
+              <a:t>4</a:t>
+            </a:fld>
+            <a:endParaRPr lang="en-US" kern="1200" dirty="0">
+              <a:solidFill>
+                <a:srgbClr val="1F497D"/>
+              </a:solidFill>
+              <a:latin typeface="Gill Sans MT"/>
+              <a:ea typeface="+mn-ea"/>
+              <a:cs typeface="+mn-cs"/>
+            </a:endParaRPr>
+          </a:p>
+        </p:txBody>
+      </p:sp>
+      <p:sp>
+        <p:nvSpPr>
+          <p:cNvPr id="4" name="Content Placeholder 3">
+            <a:extLst>
+              <a:ext uri="{FF2B5EF4-FFF2-40B4-BE49-F238E27FC236}">
+                <a16:creationId xmlns:a16="http://schemas.microsoft.com/office/drawing/2014/main" id="{79098417-EFB4-79F6-E9EE-7B3CB63586B9}"/>
+              </a:ext>
+            </a:extLst>
+          </p:cNvPr>
+          <p:cNvSpPr>
+            <a:spLocks noGrp="1"/>
+          </p:cNvSpPr>
+          <p:nvPr>
+            <p:ph sz="quarter" idx="1"/>
+          </p:nvPr>
+        </p:nvSpPr>
+        <p:spPr>
+          <a:xfrm>
+            <a:off x="457200" y="914400"/>
+            <a:ext cx="4114800" cy="3703320"/>
+          </a:xfrm>
+        </p:spPr>
+        <p:txBody>
+          <a:bodyPr>
+            <a:normAutofit lnSpcReduction="10000"/>
+          </a:bodyPr>
+          <a:lstStyle/>
+          <a:p>
+            <a:r>
+              <a:rPr lang="en-US" altLang="zh-CN" dirty="0"/>
+              <a:t>Consider a router with the following forwarding table. Fill out the table below with the port value that should be associated with each node in the prefix tree to implement the forwarding table of the router.</a:t>
+            </a:r>
+          </a:p>
+          <a:p>
+            <a:r>
+              <a:rPr lang="en-US" altLang="zh-CN" dirty="0"/>
+              <a:t>Note that some rows may not be used; put NA on any unused rows. Your tree must use the minimum number of nodes possible (meaning the fewest nodes in the tree to reach all labeled nodes)</a:t>
+            </a:r>
+            <a:endParaRPr lang="zh-CN" altLang="en-US" dirty="0"/>
+          </a:p>
+        </p:txBody>
+      </p:sp>
+      <p:pic>
+        <p:nvPicPr>
+          <p:cNvPr id="8" name="Picture 7" descr="The provided text appears to be a representation of a decision tree or flowchart, with various nodes labeled with letters (A, B, C, D, E, F, G, H, I, J, K, L, M, N, O) and numerical values. Each node is connected by lines, and some nodes have associated values (0 or 1). However, without a visual image, it's challenging to describe the specific structure or purpose of the diagram.&#10;&#10;AI-generated content may be incorrect.">
+            <a:extLst>
+              <a:ext uri="{FF2B5EF4-FFF2-40B4-BE49-F238E27FC236}">
+                <a16:creationId xmlns:a16="http://schemas.microsoft.com/office/drawing/2014/main" id="{FD25887F-C21D-3CB9-CB4A-B59B58D92F52}"/>
+              </a:ext>
+            </a:extLst>
+          </p:cNvPr>
+          <p:cNvPicPr>
+            <a:picLocks noChangeAspect="1"/>
+          </p:cNvPicPr>
+          <p:nvPr/>
+        </p:nvPicPr>
+        <p:blipFill>
+          <a:blip r:embed="rId3"/>
+          <a:stretch>
+            <a:fillRect/>
+          </a:stretch>
+        </p:blipFill>
+        <p:spPr>
+          <a:xfrm>
+            <a:off x="4351375" y="2398223"/>
+            <a:ext cx="4744280" cy="2577422"/>
+          </a:xfrm>
+          <a:prstGeom prst="rect">
+            <a:avLst/>
+          </a:prstGeom>
+        </p:spPr>
+      </p:pic>
+      <p:graphicFrame>
+        <p:nvGraphicFramePr>
+          <p:cNvPr id="10" name="Table 9">
+            <a:extLst>
+              <a:ext uri="{FF2B5EF4-FFF2-40B4-BE49-F238E27FC236}">
+                <a16:creationId xmlns:a16="http://schemas.microsoft.com/office/drawing/2014/main" id="{6731A7E7-5524-00EC-59AD-FEE2F42177DD}"/>
+              </a:ext>
+            </a:extLst>
+          </p:cNvPr>
+          <p:cNvGraphicFramePr>
+            <a:graphicFrameLocks noGrp="1"/>
+          </p:cNvGraphicFramePr>
+          <p:nvPr>
+            <p:extLst>
+              <p:ext uri="{D42A27DB-BD31-4B8C-83A1-F6EECF244321}">
+                <p14:modId xmlns:p14="http://schemas.microsoft.com/office/powerpoint/2010/main" val="1974191388"/>
+              </p:ext>
+            </p:extLst>
+          </p:nvPr>
+        </p:nvGraphicFramePr>
+        <p:xfrm>
+          <a:off x="7490962" y="527513"/>
+          <a:ext cx="1507542" cy="1813560"/>
+        </p:xfrm>
+        <a:graphic>
+          <a:graphicData uri="http://schemas.openxmlformats.org/drawingml/2006/table">
+            <a:tbl>
+              <a:tblPr firstRow="1" bandRow="1">
+                <a:tableStyleId>{E43C0DB3-A16B-4310-B7AB-6BCD390F8AB1}</a:tableStyleId>
+              </a:tblPr>
+              <a:tblGrid>
+                <a:gridCol w="1042531">
+                  <a:extLst>
+                    <a:ext uri="{9D8B030D-6E8A-4147-A177-3AD203B41FA5}">
+                      <a16:colId xmlns:a16="http://schemas.microsoft.com/office/drawing/2014/main" val="4288895764"/>
+                    </a:ext>
+                  </a:extLst>
+                </a:gridCol>
+                <a:gridCol w="465011">
+                  <a:extLst>
+                    <a:ext uri="{9D8B030D-6E8A-4147-A177-3AD203B41FA5}">
+                      <a16:colId xmlns:a16="http://schemas.microsoft.com/office/drawing/2014/main" val="979843445"/>
+                    </a:ext>
+                  </a:extLst>
+                </a:gridCol>
+              </a:tblGrid>
+              <a:tr h="220509">
+                <a:tc>
+                  <a:txBody>
+                    <a:bodyPr/>
+                    <a:lstStyle/>
+                    <a:p>
+                      <a:pPr algn="ctr"/>
+                      <a:r>
+                        <a:rPr lang="en-US" altLang="zh-CN" sz="1100" b="1" dirty="0"/>
+                        <a:t>Destination</a:t>
+                      </a:r>
+                      <a:endParaRPr lang="zh-CN" altLang="en-US" sz="1100" b="1" dirty="0"/>
+                    </a:p>
+                  </a:txBody>
+                  <a:tcPr/>
+                </a:tc>
+                <a:tc>
+                  <a:txBody>
+                    <a:bodyPr/>
+                    <a:lstStyle/>
+                    <a:p>
+                      <a:pPr algn="ctr"/>
+                      <a:r>
+                        <a:rPr lang="en-US" altLang="zh-CN" sz="1100" b="1" dirty="0"/>
+                        <a:t>Port</a:t>
+                      </a:r>
+                      <a:endParaRPr lang="zh-CN" altLang="en-US" sz="1100" b="1" dirty="0"/>
+                    </a:p>
+                  </a:txBody>
+                  <a:tcPr/>
+                </a:tc>
+                <a:extLst>
+                  <a:ext uri="{0D108BD9-81ED-4DB2-BD59-A6C34878D82A}">
+                    <a16:rowId xmlns:a16="http://schemas.microsoft.com/office/drawing/2014/main" val="3613287987"/>
+                  </a:ext>
+                </a:extLst>
+              </a:tr>
+              <a:tr h="220509">
+                <a:tc>
+                  <a:txBody>
+                    <a:bodyPr/>
+                    <a:lstStyle/>
+                    <a:p>
+                      <a:r>
+                        <a:rPr lang="en-US" altLang="zh-CN" sz="1100" dirty="0"/>
+                        <a:t>0.0.0.0/3</a:t>
+                      </a:r>
+                      <a:endParaRPr lang="zh-CN" altLang="en-US" sz="1100" dirty="0"/>
+                    </a:p>
+                  </a:txBody>
+                  <a:tcPr/>
+                </a:tc>
+                <a:tc>
+                  <a:txBody>
+                    <a:bodyPr/>
+                    <a:lstStyle/>
+                    <a:p>
+                      <a:r>
+                        <a:rPr lang="en-US" altLang="zh-CN" sz="1100" dirty="0"/>
+                        <a:t>1</a:t>
+                      </a:r>
+                      <a:endParaRPr lang="zh-CN" altLang="en-US" sz="1100" dirty="0"/>
+                    </a:p>
+                  </a:txBody>
+                  <a:tcPr/>
+                </a:tc>
+                <a:extLst>
+                  <a:ext uri="{0D108BD9-81ED-4DB2-BD59-A6C34878D82A}">
+                    <a16:rowId xmlns:a16="http://schemas.microsoft.com/office/drawing/2014/main" val="1442225972"/>
+                  </a:ext>
+                </a:extLst>
+              </a:tr>
+              <a:tr h="220509">
+                <a:tc>
+                  <a:txBody>
+                    <a:bodyPr/>
+                    <a:lstStyle/>
+                    <a:p>
+                      <a:r>
+                        <a:rPr lang="en-US" altLang="zh-CN" sz="1100" dirty="0"/>
+                        <a:t>32.0.0.0/3</a:t>
+                      </a:r>
+                      <a:endParaRPr lang="zh-CN" altLang="en-US" sz="1100" dirty="0"/>
+                    </a:p>
+                  </a:txBody>
+                  <a:tcPr/>
+                </a:tc>
+                <a:tc>
+                  <a:txBody>
+                    <a:bodyPr/>
+                    <a:lstStyle/>
+                    <a:p>
+                      <a:r>
+                        <a:rPr lang="en-US" altLang="zh-CN" sz="1100" dirty="0"/>
+                        <a:t>2</a:t>
+                      </a:r>
+                      <a:endParaRPr lang="zh-CN" altLang="en-US" sz="1100" dirty="0"/>
+                    </a:p>
+                  </a:txBody>
+                  <a:tcPr/>
+                </a:tc>
+                <a:extLst>
+                  <a:ext uri="{0D108BD9-81ED-4DB2-BD59-A6C34878D82A}">
+                    <a16:rowId xmlns:a16="http://schemas.microsoft.com/office/drawing/2014/main" val="3205567541"/>
+                  </a:ext>
+                </a:extLst>
+              </a:tr>
+              <a:tr h="220509">
+                <a:tc>
+                  <a:txBody>
+                    <a:bodyPr/>
+                    <a:lstStyle/>
+                    <a:p>
+                      <a:r>
+                        <a:rPr lang="en-US" altLang="zh-CN" sz="1100" dirty="0"/>
+                        <a:t>64.0.0.0/3</a:t>
+                      </a:r>
+                      <a:endParaRPr lang="zh-CN" altLang="en-US" sz="1100" dirty="0"/>
+                    </a:p>
+                  </a:txBody>
+                  <a:tcPr/>
+                </a:tc>
+                <a:tc>
+                  <a:txBody>
+                    <a:bodyPr/>
+                    <a:lstStyle/>
+                    <a:p>
+                      <a:r>
+                        <a:rPr lang="en-US" altLang="zh-CN" sz="1100" dirty="0"/>
+                        <a:t>2</a:t>
+                      </a:r>
+                      <a:endParaRPr lang="zh-CN" altLang="en-US" sz="1100" dirty="0"/>
+                    </a:p>
+                  </a:txBody>
+                  <a:tcPr/>
+                </a:tc>
+                <a:extLst>
+                  <a:ext uri="{0D108BD9-81ED-4DB2-BD59-A6C34878D82A}">
+                    <a16:rowId xmlns:a16="http://schemas.microsoft.com/office/drawing/2014/main" val="1625049812"/>
+                  </a:ext>
+                </a:extLst>
+              </a:tr>
+              <a:tr h="220509">
+                <a:tc>
+                  <a:txBody>
+                    <a:bodyPr/>
+                    <a:lstStyle/>
+                    <a:p>
+                      <a:r>
+                        <a:rPr lang="en-US" altLang="zh-CN" sz="1100" dirty="0"/>
+                        <a:t>96.0.0.0/3</a:t>
+                      </a:r>
+                      <a:endParaRPr lang="zh-CN" altLang="en-US" sz="1100" dirty="0"/>
+                    </a:p>
+                  </a:txBody>
+                  <a:tcPr/>
+                </a:tc>
+                <a:tc>
+                  <a:txBody>
+                    <a:bodyPr/>
+                    <a:lstStyle/>
+                    <a:p>
+                      <a:r>
+                        <a:rPr lang="en-US" altLang="zh-CN" sz="1100" dirty="0"/>
+                        <a:t>3</a:t>
+                      </a:r>
+                      <a:endParaRPr lang="zh-CN" altLang="en-US" sz="1100" dirty="0"/>
+                    </a:p>
+                  </a:txBody>
+                  <a:tcPr/>
+                </a:tc>
+                <a:extLst>
+                  <a:ext uri="{0D108BD9-81ED-4DB2-BD59-A6C34878D82A}">
+                    <a16:rowId xmlns:a16="http://schemas.microsoft.com/office/drawing/2014/main" val="2547121994"/>
+                  </a:ext>
+                </a:extLst>
+              </a:tr>
+              <a:tr h="220509">
+                <a:tc>
+                  <a:txBody>
+                    <a:bodyPr/>
+                    <a:lstStyle/>
+                    <a:p>
+                      <a:r>
+                        <a:rPr lang="en-US" altLang="zh-CN" sz="1100" dirty="0"/>
+                        <a:t>128.0.0.0/3</a:t>
+                      </a:r>
+                      <a:endParaRPr lang="zh-CN" altLang="en-US" sz="1100" dirty="0"/>
+                    </a:p>
+                  </a:txBody>
+                  <a:tcPr/>
+                </a:tc>
+                <a:tc>
+                  <a:txBody>
+                    <a:bodyPr/>
+                    <a:lstStyle/>
+                    <a:p>
+                      <a:r>
+                        <a:rPr lang="en-US" altLang="zh-CN" sz="1100" dirty="0"/>
+                        <a:t>4</a:t>
+                      </a:r>
+                      <a:endParaRPr lang="zh-CN" altLang="en-US" sz="1100" dirty="0"/>
+                    </a:p>
+                  </a:txBody>
+                  <a:tcPr/>
+                </a:tc>
+                <a:extLst>
+                  <a:ext uri="{0D108BD9-81ED-4DB2-BD59-A6C34878D82A}">
+                    <a16:rowId xmlns:a16="http://schemas.microsoft.com/office/drawing/2014/main" val="1192429653"/>
+                  </a:ext>
+                </a:extLst>
+              </a:tr>
+              <a:tr h="220509">
+                <a:tc>
+                  <a:txBody>
+                    <a:bodyPr/>
+                    <a:lstStyle/>
+                    <a:p>
+                      <a:r>
+                        <a:rPr lang="en-US" altLang="zh-CN" sz="1100" dirty="0"/>
+                        <a:t>Default</a:t>
+                      </a:r>
+                      <a:endParaRPr lang="zh-CN" altLang="en-US" sz="1100" dirty="0"/>
+                    </a:p>
+                  </a:txBody>
+                  <a:tcPr/>
+                </a:tc>
+                <a:tc>
+                  <a:txBody>
+                    <a:bodyPr/>
+                    <a:lstStyle/>
+                    <a:p>
+                      <a:r>
+                        <a:rPr lang="en-US" altLang="zh-CN" sz="1100" dirty="0"/>
+                        <a:t>1</a:t>
+                      </a:r>
+                      <a:endParaRPr lang="zh-CN" altLang="en-US" sz="1100" dirty="0"/>
+                    </a:p>
+                  </a:txBody>
+                  <a:tcPr/>
+                </a:tc>
+                <a:extLst>
+                  <a:ext uri="{0D108BD9-81ED-4DB2-BD59-A6C34878D82A}">
+                    <a16:rowId xmlns:a16="http://schemas.microsoft.com/office/drawing/2014/main" val="3454065385"/>
+                  </a:ext>
+                </a:extLst>
+              </a:tr>
+            </a:tbl>
+          </a:graphicData>
+        </a:graphic>
+      </p:graphicFrame>
+    </p:spTree>
+    <p:extLst>
+      <p:ext uri="{BB962C8B-B14F-4D97-AF65-F5344CB8AC3E}">
+        <p14:creationId xmlns:p14="http://schemas.microsoft.com/office/powerpoint/2010/main" val="3082780711"/>
+      </p:ext>
+    </p:extLst>
+  </p:cSld>
+  <p:clrMapOvr>
+    <a:masterClrMapping/>
+  </p:clrMapOvr>
+</p:sld>
+</file>
+
+<file path=ppt/slides/slide5.xml><?xml version="1.0" encoding="utf-8"?>
+<p:sld xmlns:a="http://schemas.openxmlformats.org/drawingml/2006/main" xmlns:r="http://schemas.openxmlformats.org/officeDocument/2006/relationships" xmlns:p="http://schemas.openxmlformats.org/presentationml/2006/main">
+  <p:cSld>
+    <p:spTree>
+      <p:nvGrpSpPr>
+        <p:cNvPr id="1" name="">
+          <a:extLst>
+            <a:ext uri="{FF2B5EF4-FFF2-40B4-BE49-F238E27FC236}">
+              <a16:creationId xmlns:a16="http://schemas.microsoft.com/office/drawing/2014/main" id="{F8FBB15D-B374-8F91-3759-CBE607DA4102}"/>
+            </a:ext>
+          </a:extLst>
+        </p:cNvPr>
+        <p:cNvGrpSpPr/>
+        <p:nvPr/>
+      </p:nvGrpSpPr>
+      <p:grpSpPr>
+        <a:xfrm>
+          <a:off x="0" y="0"/>
+          <a:ext cx="0" cy="0"/>
+          <a:chOff x="0" y="0"/>
+          <a:chExt cx="0" cy="0"/>
+        </a:xfrm>
+      </p:grpSpPr>
+      <p:sp>
+        <p:nvSpPr>
+          <p:cNvPr id="2" name="Title 1">
+            <a:extLst>
+              <a:ext uri="{FF2B5EF4-FFF2-40B4-BE49-F238E27FC236}">
+                <a16:creationId xmlns:a16="http://schemas.microsoft.com/office/drawing/2014/main" id="{E81FB6A5-F943-768A-42B5-A64C57222F60}"/>
+              </a:ext>
+            </a:extLst>
+          </p:cNvPr>
+          <p:cNvSpPr>
+            <a:spLocks noGrp="1"/>
+          </p:cNvSpPr>
+          <p:nvPr>
+            <p:ph type="title"/>
+          </p:nvPr>
+        </p:nvSpPr>
+        <p:spPr/>
+        <p:txBody>
+          <a:bodyPr/>
+          <a:lstStyle/>
+          <a:p>
+            <a:r>
+              <a:rPr lang="en-US" altLang="zh-CN" dirty="0"/>
+              <a:t>Q2 Longest Prefix Matching ANS</a:t>
+            </a:r>
+            <a:endParaRPr lang="zh-CN" altLang="en-US" dirty="0"/>
+          </a:p>
+        </p:txBody>
+      </p:sp>
+      <p:sp>
+        <p:nvSpPr>
+          <p:cNvPr id="3" name="Slide Number Placeholder 2">
+            <a:extLst>
+              <a:ext uri="{FF2B5EF4-FFF2-40B4-BE49-F238E27FC236}">
+                <a16:creationId xmlns:a16="http://schemas.microsoft.com/office/drawing/2014/main" id="{D846C1E6-4CF3-FF16-0E83-651894C4F938}"/>
+              </a:ext>
+            </a:extLst>
+          </p:cNvPr>
+          <p:cNvSpPr>
+            <a:spLocks noGrp="1"/>
+          </p:cNvSpPr>
+          <p:nvPr>
+            <p:ph type="sldNum" sz="quarter" idx="12"/>
+          </p:nvPr>
+        </p:nvSpPr>
+        <p:spPr/>
+        <p:txBody>
+          <a:bodyPr/>
+          <a:lstStyle/>
+          <a:p>
+            <a:pPr defTabSz="685800">
+              <a:buClrTx/>
+            </a:pPr>
+            <a:fld id="{EA7C8D44-3667-46F6-9772-CC52308E2A7F}" type="slidenum">
+              <a:rPr lang="en-US" kern="1200">
+                <a:solidFill>
+                  <a:srgbClr val="1F497D"/>
+                </a:solidFill>
+                <a:latin typeface="Gill Sans MT"/>
+                <a:ea typeface="+mn-ea"/>
+                <a:cs typeface="+mn-cs"/>
+              </a:rPr>
+              <a:pPr defTabSz="685800">
+                <a:buClrTx/>
+              </a:pPr>
+              <a:t>5</a:t>
+            </a:fld>
+            <a:endParaRPr lang="en-US" kern="1200" dirty="0">
+              <a:solidFill>
+                <a:srgbClr val="1F497D"/>
+              </a:solidFill>
+              <a:latin typeface="Gill Sans MT"/>
+              <a:ea typeface="+mn-ea"/>
+              <a:cs typeface="+mn-cs"/>
+            </a:endParaRPr>
+          </a:p>
+        </p:txBody>
+      </p:sp>
+      <p:sp>
+        <p:nvSpPr>
+          <p:cNvPr id="4" name="Content Placeholder 3">
+            <a:extLst>
+              <a:ext uri="{FF2B5EF4-FFF2-40B4-BE49-F238E27FC236}">
+                <a16:creationId xmlns:a16="http://schemas.microsoft.com/office/drawing/2014/main" id="{5EDA4540-B114-8A6C-EA5F-1F2BA3B8E28C}"/>
+              </a:ext>
+            </a:extLst>
+          </p:cNvPr>
+          <p:cNvSpPr>
+            <a:spLocks noGrp="1"/>
+          </p:cNvSpPr>
+          <p:nvPr>
+            <p:ph sz="quarter" idx="1"/>
+          </p:nvPr>
+        </p:nvSpPr>
+        <p:spPr>
+          <a:xfrm>
+            <a:off x="503573" y="864870"/>
+            <a:ext cx="4267200" cy="4114800"/>
+          </a:xfrm>
+        </p:spPr>
+        <p:txBody>
+          <a:bodyPr>
+            <a:normAutofit fontScale="92500"/>
+          </a:bodyPr>
+          <a:lstStyle/>
+          <a:p>
+            <a:r>
+              <a:rPr lang="en-US" altLang="zh-CN" sz="800" dirty="0"/>
+              <a:t>We leverage </a:t>
+            </a:r>
+            <a:r>
+              <a:rPr lang="en-US" altLang="zh-CN" sz="800" b="1" dirty="0"/>
+              <a:t>Longest Prefix Match (LPM)</a:t>
+            </a:r>
+            <a:r>
+              <a:rPr lang="en-US" altLang="zh-CN" sz="800" dirty="0"/>
+              <a:t> to group routes together and only create nodes for the exceptions.  First, let's look at the first 3 bits (the /3 subnet) of the destination networks:</a:t>
+            </a:r>
+          </a:p>
+          <a:p>
+            <a:pPr lvl="1"/>
+            <a:r>
+              <a:rPr lang="en-US" altLang="zh-CN" sz="800" b="1" dirty="0"/>
+              <a:t>0.0.0.0/3: </a:t>
+            </a:r>
+            <a:r>
+              <a:rPr lang="en-US" altLang="zh-CN" sz="800" dirty="0"/>
+              <a:t>Starts with 000 -&gt; Port 1</a:t>
+            </a:r>
+          </a:p>
+          <a:p>
+            <a:pPr lvl="1"/>
+            <a:r>
+              <a:rPr lang="en-US" altLang="zh-CN" sz="800" b="1" dirty="0"/>
+              <a:t>32.0.0.0/3:</a:t>
+            </a:r>
+            <a:r>
+              <a:rPr lang="en-US" altLang="zh-CN" sz="800" dirty="0"/>
+              <a:t> Starts with 001 -&gt; Port 2</a:t>
+            </a:r>
+          </a:p>
+          <a:p>
+            <a:pPr lvl="1"/>
+            <a:r>
+              <a:rPr lang="en-US" altLang="zh-CN" sz="800" b="1" dirty="0"/>
+              <a:t>64.0.0.0/3:</a:t>
+            </a:r>
+            <a:r>
+              <a:rPr lang="en-US" altLang="zh-CN" sz="800" dirty="0"/>
+              <a:t> Starts with 010 -&gt; Port 2</a:t>
+            </a:r>
+          </a:p>
+          <a:p>
+            <a:pPr lvl="1"/>
+            <a:r>
+              <a:rPr lang="en-US" altLang="zh-CN" sz="800" b="1" dirty="0"/>
+              <a:t>96.0.0.0/3:</a:t>
+            </a:r>
+            <a:r>
+              <a:rPr lang="en-US" altLang="zh-CN" sz="800" dirty="0"/>
+              <a:t> Starts with 011 -&gt; Port 3</a:t>
+            </a:r>
+          </a:p>
+          <a:p>
+            <a:pPr lvl="1"/>
+            <a:r>
+              <a:rPr lang="en-US" altLang="zh-CN" sz="800" b="1" dirty="0"/>
+              <a:t>128.0.0.0/3:</a:t>
+            </a:r>
+            <a:r>
+              <a:rPr lang="en-US" altLang="zh-CN" sz="800" dirty="0"/>
+              <a:t> Starts with 100 -&gt; Port 4</a:t>
+            </a:r>
+          </a:p>
+          <a:p>
+            <a:r>
+              <a:rPr lang="en-US" altLang="zh-CN" sz="800" dirty="0"/>
+              <a:t>In the provided tree, the nodes represent binary paths:</a:t>
+            </a:r>
+          </a:p>
+          <a:p>
+            <a:pPr lvl="1"/>
+            <a:r>
+              <a:rPr lang="en-US" altLang="zh-CN" sz="800" b="1" dirty="0"/>
+              <a:t>Level 0:</a:t>
+            </a:r>
+            <a:r>
+              <a:rPr lang="en-US" altLang="zh-CN" sz="800" dirty="0"/>
+              <a:t> Node A (Root, *)</a:t>
+            </a:r>
+          </a:p>
+          <a:p>
+            <a:pPr lvl="1"/>
+            <a:r>
+              <a:rPr lang="en-US" altLang="zh-CN" sz="800" b="1" dirty="0"/>
+              <a:t>Level 1 (1 bit):</a:t>
+            </a:r>
+            <a:r>
+              <a:rPr lang="en-US" altLang="zh-CN" sz="800" dirty="0"/>
+              <a:t> Node B (0), Node C (1)</a:t>
+            </a:r>
+          </a:p>
+          <a:p>
+            <a:pPr lvl="1"/>
+            <a:r>
+              <a:rPr lang="en-US" altLang="zh-CN" sz="800" b="1" dirty="0"/>
+              <a:t>Level 2 (2 bits):</a:t>
+            </a:r>
+            <a:r>
+              <a:rPr lang="en-US" altLang="zh-CN" sz="800" dirty="0"/>
+              <a:t> Node D (00), Node E (01), Node F (10), Node G (11)</a:t>
+            </a:r>
+          </a:p>
+          <a:p>
+            <a:pPr lvl="1"/>
+            <a:r>
+              <a:rPr lang="en-US" altLang="zh-CN" sz="800" b="1" dirty="0"/>
+              <a:t>Level 3 (3 bits):</a:t>
+            </a:r>
+            <a:r>
+              <a:rPr lang="en-US" altLang="zh-CN" sz="800" dirty="0"/>
+              <a:t> Node H (000), Node I (001), Node J (010), Node K (011), Node L (100), etc.</a:t>
+            </a:r>
+          </a:p>
+          <a:p>
+            <a:r>
+              <a:rPr lang="en-US" altLang="zh-CN" sz="800" dirty="0"/>
+              <a:t>Instead of explicitly creating individual entries for every /3 path, the solution aggressively compresses the rules:</a:t>
+            </a:r>
+          </a:p>
+          <a:p>
+            <a:r>
+              <a:rPr lang="en-US" altLang="zh-CN" sz="800" b="1" dirty="0"/>
+              <a:t>Node A = Port 1 (The Global Default):</a:t>
+            </a:r>
+            <a:r>
+              <a:rPr lang="en-US" altLang="zh-CN" sz="800" dirty="0"/>
+              <a:t> The root node acts as the catch-all. Anything that doesn't match a more specific rule falls back to Port 1.</a:t>
+            </a:r>
+          </a:p>
+          <a:p>
+            <a:r>
+              <a:rPr lang="en-US" altLang="zh-CN" sz="800" b="1" dirty="0"/>
+              <a:t>Node B = Port 2 (The Grouping):</a:t>
+            </a:r>
+            <a:r>
+              <a:rPr lang="en-US" altLang="zh-CN" sz="800" dirty="0"/>
+              <a:t> Both the 32.x (001) and 64.x (010) networks go to Port 2. Instead of defining Nodes I and J individually, we assign the </a:t>
+            </a:r>
+            <a:r>
+              <a:rPr lang="en-US" altLang="zh-CN" sz="800" i="1" dirty="0"/>
+              <a:t>entire</a:t>
+            </a:r>
+            <a:r>
+              <a:rPr lang="en-US" altLang="zh-CN" sz="800" dirty="0"/>
+              <a:t> 0 branch (Node B) to Port 2.</a:t>
+            </a:r>
+          </a:p>
+          <a:p>
+            <a:r>
+              <a:rPr lang="en-US" altLang="zh-CN" sz="800" b="1" dirty="0"/>
+              <a:t>Node H = Port 1 (Exception for 000):</a:t>
+            </a:r>
+            <a:r>
+              <a:rPr lang="en-US" altLang="zh-CN" sz="800" dirty="0"/>
+              <a:t> Because we assigned everything starting with 0 to Port 2, the 000 block (0.0.0.0/3) would incorrectly be routed to Port 2. We add Node H (000) and map it back to Port 1. Because H is deeper in the tree, </a:t>
+            </a:r>
+            <a:r>
+              <a:rPr lang="en-US" altLang="zh-CN" sz="800" b="1" dirty="0"/>
+              <a:t>LPM</a:t>
+            </a:r>
+            <a:r>
+              <a:rPr lang="en-US" altLang="zh-CN" sz="800" dirty="0"/>
+              <a:t> ensures it overrides Node B.</a:t>
+            </a:r>
+          </a:p>
+          <a:p>
+            <a:r>
+              <a:rPr lang="en-US" altLang="zh-CN" sz="800" b="1" dirty="0"/>
+              <a:t>Node K = Port 3 (Exception for 011):</a:t>
+            </a:r>
+            <a:r>
+              <a:rPr lang="en-US" altLang="zh-CN" sz="800" dirty="0"/>
+              <a:t> The 96.x block (011) also falls under the 0 branch, but it needs to go to Port 3. We explicitly map Node K to Port 3.</a:t>
+            </a:r>
+          </a:p>
+          <a:p>
+            <a:r>
+              <a:rPr lang="en-US" altLang="zh-CN" sz="800" b="1" dirty="0"/>
+              <a:t>Node L = Port 4 (Standalone Rule):</a:t>
+            </a:r>
+            <a:r>
+              <a:rPr lang="en-US" altLang="zh-CN" sz="800" dirty="0"/>
+              <a:t> The 128.x block (100) falls under the 1 branch. Since the 1 branch inherits Port 1 from the root (Node A), we explicitly define Node L (100) as Port 4.</a:t>
+            </a:r>
+          </a:p>
+          <a:p>
+            <a:r>
+              <a:rPr lang="en-US" altLang="zh-CN" sz="800" dirty="0"/>
+              <a:t>With </a:t>
+            </a:r>
+            <a:r>
+              <a:rPr lang="en-US" altLang="zh-CN" sz="800"/>
+              <a:t>route aggregation, </a:t>
+            </a:r>
+            <a:r>
+              <a:rPr lang="en-US" altLang="zh-CN" sz="800" dirty="0"/>
+              <a:t>the router only needs to store 5 routing entries (A, B, H, K, L) rather than defining all paths, leaving the rest of the nodes as "NA".</a:t>
+            </a:r>
+          </a:p>
+        </p:txBody>
+      </p:sp>
+      <p:pic>
+        <p:nvPicPr>
+          <p:cNvPr id="8" name="Picture 7">
+            <a:extLst>
+              <a:ext uri="{FF2B5EF4-FFF2-40B4-BE49-F238E27FC236}">
+                <a16:creationId xmlns:a16="http://schemas.microsoft.com/office/drawing/2014/main" id="{9C9F7FBB-B8B6-5223-67F6-6D5BE5A8BB57}"/>
+              </a:ext>
+            </a:extLst>
+          </p:cNvPr>
+          <p:cNvPicPr>
+            <a:picLocks noChangeAspect="1"/>
+          </p:cNvPicPr>
+          <p:nvPr/>
+        </p:nvPicPr>
+        <p:blipFill>
+          <a:blip r:embed="rId3">
+            <a:extLst>
+              <a:ext uri="{28A0092B-C50C-407E-A947-70E740481C1C}">
+                <a14:useLocalDpi xmlns:a14="http://schemas.microsoft.com/office/drawing/2010/main" val="0"/>
+              </a:ext>
+            </a:extLst>
+          </a:blip>
+          <a:srcRect/>
+          <a:stretch/>
+        </p:blipFill>
+        <p:spPr>
+          <a:xfrm>
+            <a:off x="4770773" y="2802428"/>
+            <a:ext cx="3237436" cy="1811720"/>
+          </a:xfrm>
+          <a:prstGeom prst="rect">
+            <a:avLst/>
+          </a:prstGeom>
+        </p:spPr>
+      </p:pic>
+      <p:pic>
+        <p:nvPicPr>
+          <p:cNvPr id="5" name="Picture 4" descr="The image displays a list of alphabetic labels (A-Z) followed by numerical values (1-4) and symbols (NA), indicating various ports and nodes.&#10;&#10;AI-generated content may be incorrect.">
+            <a:extLst>
+              <a:ext uri="{FF2B5EF4-FFF2-40B4-BE49-F238E27FC236}">
+                <a16:creationId xmlns:a16="http://schemas.microsoft.com/office/drawing/2014/main" id="{73997E71-DBA0-723E-B4FC-F2AFBDE629AF}"/>
+              </a:ext>
+            </a:extLst>
+          </p:cNvPr>
+          <p:cNvPicPr>
+            <a:picLocks noChangeAspect="1"/>
+          </p:cNvPicPr>
+          <p:nvPr/>
+        </p:nvPicPr>
+        <p:blipFill>
+          <a:blip r:embed="rId4"/>
+          <a:stretch>
+            <a:fillRect/>
+          </a:stretch>
+        </p:blipFill>
+        <p:spPr>
+          <a:xfrm>
+            <a:off x="8095186" y="2283479"/>
+            <a:ext cx="933798" cy="2758104"/>
+          </a:xfrm>
+          <a:prstGeom prst="rect">
+            <a:avLst/>
+          </a:prstGeom>
+        </p:spPr>
+      </p:pic>
+      <p:sp>
+        <p:nvSpPr>
+          <p:cNvPr id="9" name="Rectangle 8">
+            <a:extLst>
+              <a:ext uri="{FF2B5EF4-FFF2-40B4-BE49-F238E27FC236}">
+                <a16:creationId xmlns:a16="http://schemas.microsoft.com/office/drawing/2014/main" id="{9BDB7F73-ED8D-6E0C-B97E-5892A291E2E0}"/>
+              </a:ext>
+            </a:extLst>
+          </p:cNvPr>
+          <p:cNvSpPr/>
+          <p:nvPr/>
+        </p:nvSpPr>
+        <p:spPr>
+          <a:xfrm>
+            <a:off x="6210421" y="2790998"/>
+            <a:ext cx="358140" cy="316230"/>
+          </a:xfrm>
+          <a:prstGeom prst="rect">
+            <a:avLst/>
+          </a:prstGeom>
+          <a:noFill/>
+          <a:ln>
+            <a:solidFill>
+              <a:srgbClr val="FF0000"/>
+            </a:solidFill>
+          </a:ln>
+        </p:spPr>
+        <p:style>
+          <a:lnRef idx="2">
+            <a:schemeClr val="accent1">
+              <a:shade val="15000"/>
+            </a:schemeClr>
+          </a:lnRef>
+          <a:fillRef idx="1">
+            <a:schemeClr val="accent1"/>
+          </a:fillRef>
+          <a:effectRef idx="0">
+            <a:schemeClr val="accent1"/>
+          </a:effectRef>
+          <a:fontRef idx="minor">
+            <a:schemeClr val="lt1"/>
+          </a:fontRef>
+        </p:style>
+        <p:txBody>
+          <a:bodyPr rtlCol="0" anchor="ctr"/>
+          <a:lstStyle/>
+          <a:p>
+            <a:pPr algn="ctr"/>
+            <a:endParaRPr lang="zh-CN" altLang="en-US"/>
+          </a:p>
+        </p:txBody>
+      </p:sp>
+      <p:sp>
+        <p:nvSpPr>
+          <p:cNvPr id="10" name="Rectangle 9">
+            <a:extLst>
+              <a:ext uri="{FF2B5EF4-FFF2-40B4-BE49-F238E27FC236}">
+                <a16:creationId xmlns:a16="http://schemas.microsoft.com/office/drawing/2014/main" id="{A5ACB68F-B488-E1E7-375F-B9B6D3D8EFC1}"/>
+              </a:ext>
+            </a:extLst>
+          </p:cNvPr>
+          <p:cNvSpPr/>
+          <p:nvPr/>
+        </p:nvSpPr>
+        <p:spPr>
+          <a:xfrm>
+            <a:off x="5388453" y="3191402"/>
+            <a:ext cx="358140" cy="316230"/>
+          </a:xfrm>
+          <a:prstGeom prst="rect">
+            <a:avLst/>
+          </a:prstGeom>
+          <a:noFill/>
+          <a:ln>
+            <a:solidFill>
+              <a:srgbClr val="FF0000"/>
+            </a:solidFill>
+          </a:ln>
+        </p:spPr>
+        <p:style>
+          <a:lnRef idx="2">
+            <a:schemeClr val="accent1">
+              <a:shade val="15000"/>
+            </a:schemeClr>
+          </a:lnRef>
+          <a:fillRef idx="1">
+            <a:schemeClr val="accent1"/>
+          </a:fillRef>
+          <a:effectRef idx="0">
+            <a:schemeClr val="accent1"/>
+          </a:effectRef>
+          <a:fontRef idx="minor">
+            <a:schemeClr val="lt1"/>
+          </a:fontRef>
+        </p:style>
+        <p:txBody>
+          <a:bodyPr rtlCol="0" anchor="ctr"/>
+          <a:lstStyle/>
+          <a:p>
+            <a:pPr algn="ctr"/>
+            <a:endParaRPr lang="zh-CN" altLang="en-US"/>
+          </a:p>
+        </p:txBody>
+      </p:sp>
+      <p:sp>
+        <p:nvSpPr>
+          <p:cNvPr id="12" name="Rectangle 11">
+            <a:extLst>
+              <a:ext uri="{FF2B5EF4-FFF2-40B4-BE49-F238E27FC236}">
+                <a16:creationId xmlns:a16="http://schemas.microsoft.com/office/drawing/2014/main" id="{CED5C8B6-0A98-681C-619B-F9251E5110CB}"/>
+              </a:ext>
+            </a:extLst>
+          </p:cNvPr>
+          <p:cNvSpPr/>
+          <p:nvPr/>
+        </p:nvSpPr>
+        <p:spPr>
+          <a:xfrm>
+            <a:off x="4743441" y="4245115"/>
+            <a:ext cx="358140" cy="316230"/>
+          </a:xfrm>
+          <a:prstGeom prst="rect">
+            <a:avLst/>
+          </a:prstGeom>
+          <a:noFill/>
+          <a:ln>
+            <a:solidFill>
+              <a:srgbClr val="FF0000"/>
+            </a:solidFill>
+          </a:ln>
+        </p:spPr>
+        <p:style>
+          <a:lnRef idx="2">
+            <a:schemeClr val="accent1">
+              <a:shade val="15000"/>
+            </a:schemeClr>
+          </a:lnRef>
+          <a:fillRef idx="1">
+            <a:schemeClr val="accent1"/>
+          </a:fillRef>
+          <a:effectRef idx="0">
+            <a:schemeClr val="accent1"/>
+          </a:effectRef>
+          <a:fontRef idx="minor">
+            <a:schemeClr val="lt1"/>
+          </a:fontRef>
+        </p:style>
+        <p:txBody>
+          <a:bodyPr rtlCol="0" anchor="ctr"/>
+          <a:lstStyle/>
+          <a:p>
+            <a:pPr algn="ctr"/>
+            <a:endParaRPr lang="zh-CN" altLang="en-US"/>
+          </a:p>
+        </p:txBody>
+      </p:sp>
+      <p:sp>
+        <p:nvSpPr>
+          <p:cNvPr id="13" name="Rectangle 12">
+            <a:extLst>
+              <a:ext uri="{FF2B5EF4-FFF2-40B4-BE49-F238E27FC236}">
+                <a16:creationId xmlns:a16="http://schemas.microsoft.com/office/drawing/2014/main" id="{56B74D6C-5F6A-F9FC-A2DF-E1C6076B4923}"/>
+              </a:ext>
+            </a:extLst>
+          </p:cNvPr>
+          <p:cNvSpPr/>
+          <p:nvPr/>
+        </p:nvSpPr>
+        <p:spPr>
+          <a:xfrm>
+            <a:off x="6031351" y="4245115"/>
+            <a:ext cx="358140" cy="316230"/>
+          </a:xfrm>
+          <a:prstGeom prst="rect">
+            <a:avLst/>
+          </a:prstGeom>
+          <a:noFill/>
+          <a:ln>
+            <a:solidFill>
+              <a:srgbClr val="FF0000"/>
+            </a:solidFill>
+          </a:ln>
+        </p:spPr>
+        <p:style>
+          <a:lnRef idx="2">
+            <a:schemeClr val="accent1">
+              <a:shade val="15000"/>
+            </a:schemeClr>
+          </a:lnRef>
+          <a:fillRef idx="1">
+            <a:schemeClr val="accent1"/>
+          </a:fillRef>
+          <a:effectRef idx="0">
+            <a:schemeClr val="accent1"/>
+          </a:effectRef>
+          <a:fontRef idx="minor">
+            <a:schemeClr val="lt1"/>
+          </a:fontRef>
+        </p:style>
+        <p:txBody>
+          <a:bodyPr rtlCol="0" anchor="ctr"/>
+          <a:lstStyle/>
+          <a:p>
+            <a:pPr algn="ctr"/>
+            <a:endParaRPr lang="zh-CN" altLang="en-US"/>
+          </a:p>
+        </p:txBody>
+      </p:sp>
+      <p:sp>
+        <p:nvSpPr>
+          <p:cNvPr id="14" name="Rectangle 13">
+            <a:extLst>
+              <a:ext uri="{FF2B5EF4-FFF2-40B4-BE49-F238E27FC236}">
+                <a16:creationId xmlns:a16="http://schemas.microsoft.com/office/drawing/2014/main" id="{BEE30F67-A871-7CA4-5953-D593EE136BE3}"/>
+              </a:ext>
+            </a:extLst>
+          </p:cNvPr>
+          <p:cNvSpPr/>
+          <p:nvPr/>
+        </p:nvSpPr>
+        <p:spPr>
+          <a:xfrm>
+            <a:off x="6385270" y="4245115"/>
+            <a:ext cx="358140" cy="316230"/>
+          </a:xfrm>
+          <a:prstGeom prst="rect">
+            <a:avLst/>
+          </a:prstGeom>
+          <a:noFill/>
+          <a:ln>
+            <a:solidFill>
+              <a:srgbClr val="FF0000"/>
+            </a:solidFill>
+          </a:ln>
+        </p:spPr>
+        <p:style>
+          <a:lnRef idx="2">
+            <a:schemeClr val="accent1">
+              <a:shade val="15000"/>
+            </a:schemeClr>
+          </a:lnRef>
+          <a:fillRef idx="1">
+            <a:schemeClr val="accent1"/>
+          </a:fillRef>
+          <a:effectRef idx="0">
+            <a:schemeClr val="accent1"/>
+          </a:effectRef>
+          <a:fontRef idx="minor">
+            <a:schemeClr val="lt1"/>
+          </a:fontRef>
+        </p:style>
+        <p:txBody>
+          <a:bodyPr rtlCol="0" anchor="ctr"/>
+          <a:lstStyle/>
+          <a:p>
+            <a:pPr algn="ctr"/>
+            <a:endParaRPr lang="zh-CN" altLang="en-US"/>
+          </a:p>
+        </p:txBody>
+      </p:sp>
+      <p:sp>
+        <p:nvSpPr>
+          <p:cNvPr id="15" name="TextBox 14">
+            <a:extLst>
+              <a:ext uri="{FF2B5EF4-FFF2-40B4-BE49-F238E27FC236}">
+                <a16:creationId xmlns:a16="http://schemas.microsoft.com/office/drawing/2014/main" id="{699C7F18-46AD-80F3-F9C8-55FE645726E2}"/>
+              </a:ext>
+            </a:extLst>
+          </p:cNvPr>
+          <p:cNvSpPr txBox="1"/>
+          <p:nvPr/>
+        </p:nvSpPr>
+        <p:spPr>
+          <a:xfrm>
+            <a:off x="6105385" y="2540818"/>
+            <a:ext cx="559769" cy="261610"/>
+          </a:xfrm>
+          <a:prstGeom prst="rect">
+            <a:avLst/>
+          </a:prstGeom>
+          <a:noFill/>
+        </p:spPr>
+        <p:txBody>
+          <a:bodyPr wrap="none" rtlCol="0">
+            <a:spAutoFit/>
+          </a:bodyPr>
+          <a:lstStyle/>
+          <a:p>
+            <a:r>
+              <a:rPr lang="en-US" altLang="zh-CN" sz="1100" dirty="0"/>
+              <a:t>Port 1</a:t>
+            </a:r>
+            <a:endParaRPr lang="zh-CN" altLang="en-US" sz="1100" dirty="0"/>
+          </a:p>
+        </p:txBody>
+      </p:sp>
+      <p:sp>
+        <p:nvSpPr>
+          <p:cNvPr id="16" name="TextBox 15">
+            <a:extLst>
+              <a:ext uri="{FF2B5EF4-FFF2-40B4-BE49-F238E27FC236}">
+                <a16:creationId xmlns:a16="http://schemas.microsoft.com/office/drawing/2014/main" id="{E09CB05D-CB3A-1495-BAE9-07A515E4A31E}"/>
+              </a:ext>
+            </a:extLst>
+          </p:cNvPr>
+          <p:cNvSpPr txBox="1"/>
+          <p:nvPr/>
+        </p:nvSpPr>
+        <p:spPr>
+          <a:xfrm>
+            <a:off x="5305311" y="2949113"/>
+            <a:ext cx="559769" cy="261610"/>
+          </a:xfrm>
+          <a:prstGeom prst="rect">
+            <a:avLst/>
+          </a:prstGeom>
+          <a:noFill/>
+        </p:spPr>
+        <p:txBody>
+          <a:bodyPr wrap="none" rtlCol="0">
+            <a:spAutoFit/>
+          </a:bodyPr>
+          <a:lstStyle/>
+          <a:p>
+            <a:r>
+              <a:rPr lang="en-US" altLang="zh-CN" sz="1100" dirty="0"/>
+              <a:t>Port 2</a:t>
+            </a:r>
+            <a:endParaRPr lang="zh-CN" altLang="en-US" sz="1100" dirty="0"/>
+          </a:p>
+        </p:txBody>
+      </p:sp>
+      <p:sp>
+        <p:nvSpPr>
+          <p:cNvPr id="17" name="TextBox 16">
+            <a:extLst>
+              <a:ext uri="{FF2B5EF4-FFF2-40B4-BE49-F238E27FC236}">
+                <a16:creationId xmlns:a16="http://schemas.microsoft.com/office/drawing/2014/main" id="{31D11E7B-6DF2-985D-D06F-6AC73A38F175}"/>
+              </a:ext>
+            </a:extLst>
+          </p:cNvPr>
+          <p:cNvSpPr txBox="1"/>
+          <p:nvPr/>
+        </p:nvSpPr>
+        <p:spPr>
+          <a:xfrm>
+            <a:off x="4665737" y="4532720"/>
+            <a:ext cx="559769" cy="261610"/>
+          </a:xfrm>
+          <a:prstGeom prst="rect">
+            <a:avLst/>
+          </a:prstGeom>
+          <a:noFill/>
+        </p:spPr>
+        <p:txBody>
+          <a:bodyPr wrap="none" rtlCol="0">
+            <a:spAutoFit/>
+          </a:bodyPr>
+          <a:lstStyle/>
+          <a:p>
+            <a:r>
+              <a:rPr lang="en-US" altLang="zh-CN" sz="1100" dirty="0"/>
+              <a:t>Port 1</a:t>
+            </a:r>
+            <a:endParaRPr lang="zh-CN" altLang="en-US" sz="1100" dirty="0"/>
+          </a:p>
+        </p:txBody>
+      </p:sp>
+      <p:graphicFrame>
+        <p:nvGraphicFramePr>
+          <p:cNvPr id="18" name="Table 17">
+            <a:extLst>
+              <a:ext uri="{FF2B5EF4-FFF2-40B4-BE49-F238E27FC236}">
+                <a16:creationId xmlns:a16="http://schemas.microsoft.com/office/drawing/2014/main" id="{3E5F1172-BA99-2C90-33D9-1D5542A7070D}"/>
+              </a:ext>
+            </a:extLst>
+          </p:cNvPr>
+          <p:cNvGraphicFramePr>
+            <a:graphicFrameLocks noGrp="1"/>
+          </p:cNvGraphicFramePr>
+          <p:nvPr>
+            <p:extLst>
+              <p:ext uri="{D42A27DB-BD31-4B8C-83A1-F6EECF244321}">
+                <p14:modId xmlns:p14="http://schemas.microsoft.com/office/powerpoint/2010/main" val="78999495"/>
+              </p:ext>
+            </p:extLst>
+          </p:nvPr>
+        </p:nvGraphicFramePr>
+        <p:xfrm>
+          <a:off x="7521442" y="464204"/>
+          <a:ext cx="1507542" cy="1813560"/>
+        </p:xfrm>
+        <a:graphic>
+          <a:graphicData uri="http://schemas.openxmlformats.org/drawingml/2006/table">
+            <a:tbl>
+              <a:tblPr firstRow="1" bandRow="1">
+                <a:tableStyleId>{E43C0DB3-A16B-4310-B7AB-6BCD390F8AB1}</a:tableStyleId>
+              </a:tblPr>
+              <a:tblGrid>
+                <a:gridCol w="1042531">
+                  <a:extLst>
+                    <a:ext uri="{9D8B030D-6E8A-4147-A177-3AD203B41FA5}">
+                      <a16:colId xmlns:a16="http://schemas.microsoft.com/office/drawing/2014/main" val="4288895764"/>
+                    </a:ext>
+                  </a:extLst>
+                </a:gridCol>
+                <a:gridCol w="465011">
+                  <a:extLst>
+                    <a:ext uri="{9D8B030D-6E8A-4147-A177-3AD203B41FA5}">
+                      <a16:colId xmlns:a16="http://schemas.microsoft.com/office/drawing/2014/main" val="979843445"/>
+                    </a:ext>
+                  </a:extLst>
+                </a:gridCol>
+              </a:tblGrid>
+              <a:tr h="220509">
+                <a:tc>
+                  <a:txBody>
+                    <a:bodyPr/>
+                    <a:lstStyle/>
+                    <a:p>
+                      <a:pPr algn="ctr"/>
+                      <a:r>
+                        <a:rPr lang="en-US" altLang="zh-CN" sz="1100" b="1" dirty="0"/>
+                        <a:t>Destination</a:t>
+                      </a:r>
+                      <a:endParaRPr lang="zh-CN" altLang="en-US" sz="1100" b="1" dirty="0"/>
+                    </a:p>
+                  </a:txBody>
+                  <a:tcPr/>
+                </a:tc>
+                <a:tc>
+                  <a:txBody>
+                    <a:bodyPr/>
+                    <a:lstStyle/>
+                    <a:p>
+                      <a:pPr algn="ctr"/>
+                      <a:r>
+                        <a:rPr lang="en-US" altLang="zh-CN" sz="1100" b="1" dirty="0"/>
+                        <a:t>Port</a:t>
+                      </a:r>
+                      <a:endParaRPr lang="zh-CN" altLang="en-US" sz="1100" b="1" dirty="0"/>
+                    </a:p>
+                  </a:txBody>
+                  <a:tcPr/>
+                </a:tc>
+                <a:extLst>
+                  <a:ext uri="{0D108BD9-81ED-4DB2-BD59-A6C34878D82A}">
+                    <a16:rowId xmlns:a16="http://schemas.microsoft.com/office/drawing/2014/main" val="3613287987"/>
+                  </a:ext>
+                </a:extLst>
+              </a:tr>
+              <a:tr h="220509">
+                <a:tc>
+                  <a:txBody>
+                    <a:bodyPr/>
+                    <a:lstStyle/>
+                    <a:p>
+                      <a:r>
+                        <a:rPr lang="en-US" altLang="zh-CN" sz="1100" dirty="0"/>
+                        <a:t>0.0.0.0/3</a:t>
+                      </a:r>
+                      <a:endParaRPr lang="zh-CN" altLang="en-US" sz="1100" dirty="0"/>
+                    </a:p>
+                  </a:txBody>
+                  <a:tcPr/>
+                </a:tc>
+                <a:tc>
+                  <a:txBody>
+                    <a:bodyPr/>
+                    <a:lstStyle/>
+                    <a:p>
+                      <a:r>
+                        <a:rPr lang="en-US" altLang="zh-CN" sz="1100" dirty="0"/>
+                        <a:t>1</a:t>
+                      </a:r>
+                      <a:endParaRPr lang="zh-CN" altLang="en-US" sz="1100" dirty="0"/>
+                    </a:p>
+                  </a:txBody>
+                  <a:tcPr/>
+                </a:tc>
+                <a:extLst>
+                  <a:ext uri="{0D108BD9-81ED-4DB2-BD59-A6C34878D82A}">
+                    <a16:rowId xmlns:a16="http://schemas.microsoft.com/office/drawing/2014/main" val="1442225972"/>
+                  </a:ext>
+                </a:extLst>
+              </a:tr>
+              <a:tr h="220509">
+                <a:tc>
+                  <a:txBody>
+                    <a:bodyPr/>
+                    <a:lstStyle/>
+                    <a:p>
+                      <a:r>
+                        <a:rPr lang="en-US" altLang="zh-CN" sz="1100" dirty="0"/>
+                        <a:t>32.0.0.0/3</a:t>
+                      </a:r>
+                      <a:endParaRPr lang="zh-CN" altLang="en-US" sz="1100" dirty="0"/>
+                    </a:p>
+                  </a:txBody>
+                  <a:tcPr/>
+                </a:tc>
+                <a:tc>
+                  <a:txBody>
+                    <a:bodyPr/>
+                    <a:lstStyle/>
+                    <a:p>
+                      <a:r>
+                        <a:rPr lang="en-US" altLang="zh-CN" sz="1100" dirty="0"/>
+                        <a:t>2</a:t>
+                      </a:r>
+                      <a:endParaRPr lang="zh-CN" altLang="en-US" sz="1100" dirty="0"/>
+                    </a:p>
+                  </a:txBody>
+                  <a:tcPr/>
+                </a:tc>
+                <a:extLst>
+                  <a:ext uri="{0D108BD9-81ED-4DB2-BD59-A6C34878D82A}">
+                    <a16:rowId xmlns:a16="http://schemas.microsoft.com/office/drawing/2014/main" val="3205567541"/>
+                  </a:ext>
+                </a:extLst>
+              </a:tr>
+              <a:tr h="220509">
+                <a:tc>
+                  <a:txBody>
+                    <a:bodyPr/>
+                    <a:lstStyle/>
+                    <a:p>
+                      <a:r>
+                        <a:rPr lang="en-US" altLang="zh-CN" sz="1100" dirty="0"/>
+                        <a:t>64.0.0.0/3</a:t>
+                      </a:r>
+                      <a:endParaRPr lang="zh-CN" altLang="en-US" sz="1100" dirty="0"/>
+                    </a:p>
+                  </a:txBody>
+                  <a:tcPr/>
+                </a:tc>
+                <a:tc>
+                  <a:txBody>
+                    <a:bodyPr/>
+                    <a:lstStyle/>
+                    <a:p>
+                      <a:r>
+                        <a:rPr lang="en-US" altLang="zh-CN" sz="1100" dirty="0"/>
+                        <a:t>2</a:t>
+                      </a:r>
+                      <a:endParaRPr lang="zh-CN" altLang="en-US" sz="1100" dirty="0"/>
+                    </a:p>
+                  </a:txBody>
+                  <a:tcPr/>
+                </a:tc>
+                <a:extLst>
+                  <a:ext uri="{0D108BD9-81ED-4DB2-BD59-A6C34878D82A}">
+                    <a16:rowId xmlns:a16="http://schemas.microsoft.com/office/drawing/2014/main" val="1625049812"/>
+                  </a:ext>
+                </a:extLst>
+              </a:tr>
+              <a:tr h="220509">
+                <a:tc>
+                  <a:txBody>
+                    <a:bodyPr/>
+                    <a:lstStyle/>
+                    <a:p>
+                      <a:r>
+                        <a:rPr lang="en-US" altLang="zh-CN" sz="1100" dirty="0"/>
+                        <a:t>96.0.0.0/3</a:t>
+                      </a:r>
+                      <a:endParaRPr lang="zh-CN" altLang="en-US" sz="1100" dirty="0"/>
+                    </a:p>
+                  </a:txBody>
+                  <a:tcPr/>
+                </a:tc>
+                <a:tc>
+                  <a:txBody>
+                    <a:bodyPr/>
+                    <a:lstStyle/>
+                    <a:p>
+                      <a:r>
+                        <a:rPr lang="en-US" altLang="zh-CN" sz="1100" dirty="0"/>
+                        <a:t>3</a:t>
+                      </a:r>
+                      <a:endParaRPr lang="zh-CN" altLang="en-US" sz="1100" dirty="0"/>
+                    </a:p>
+                  </a:txBody>
+                  <a:tcPr/>
+                </a:tc>
+                <a:extLst>
+                  <a:ext uri="{0D108BD9-81ED-4DB2-BD59-A6C34878D82A}">
+                    <a16:rowId xmlns:a16="http://schemas.microsoft.com/office/drawing/2014/main" val="2547121994"/>
+                  </a:ext>
+                </a:extLst>
+              </a:tr>
+              <a:tr h="220509">
+                <a:tc>
+                  <a:txBody>
+                    <a:bodyPr/>
+                    <a:lstStyle/>
+                    <a:p>
+                      <a:r>
+                        <a:rPr lang="en-US" altLang="zh-CN" sz="1100" dirty="0"/>
+                        <a:t>128.0.0.0/3</a:t>
+                      </a:r>
+                      <a:endParaRPr lang="zh-CN" altLang="en-US" sz="1100" dirty="0"/>
+                    </a:p>
+                  </a:txBody>
+                  <a:tcPr/>
+                </a:tc>
+                <a:tc>
+                  <a:txBody>
+                    <a:bodyPr/>
+                    <a:lstStyle/>
+                    <a:p>
+                      <a:r>
+                        <a:rPr lang="en-US" altLang="zh-CN" sz="1100" dirty="0"/>
+                        <a:t>4</a:t>
+                      </a:r>
+                      <a:endParaRPr lang="zh-CN" altLang="en-US" sz="1100" dirty="0"/>
+                    </a:p>
+                  </a:txBody>
+                  <a:tcPr/>
+                </a:tc>
+                <a:extLst>
+                  <a:ext uri="{0D108BD9-81ED-4DB2-BD59-A6C34878D82A}">
+                    <a16:rowId xmlns:a16="http://schemas.microsoft.com/office/drawing/2014/main" val="1192429653"/>
+                  </a:ext>
+                </a:extLst>
+              </a:tr>
+              <a:tr h="220509">
+                <a:tc>
+                  <a:txBody>
+                    <a:bodyPr/>
+                    <a:lstStyle/>
+                    <a:p>
+                      <a:r>
+                        <a:rPr lang="en-US" altLang="zh-CN" sz="1100" dirty="0"/>
+                        <a:t>Default</a:t>
+                      </a:r>
+                      <a:endParaRPr lang="zh-CN" altLang="en-US" sz="1100" dirty="0"/>
+                    </a:p>
+                  </a:txBody>
+                  <a:tcPr/>
+                </a:tc>
+                <a:tc>
+                  <a:txBody>
+                    <a:bodyPr/>
+                    <a:lstStyle/>
+                    <a:p>
+                      <a:r>
+                        <a:rPr lang="en-US" altLang="zh-CN" sz="1100" dirty="0"/>
+                        <a:t>1</a:t>
+                      </a:r>
+                      <a:endParaRPr lang="zh-CN" altLang="en-US" sz="1100" dirty="0"/>
+                    </a:p>
+                  </a:txBody>
+                  <a:tcPr/>
+                </a:tc>
+                <a:extLst>
+                  <a:ext uri="{0D108BD9-81ED-4DB2-BD59-A6C34878D82A}">
+                    <a16:rowId xmlns:a16="http://schemas.microsoft.com/office/drawing/2014/main" val="3454065385"/>
+                  </a:ext>
+                </a:extLst>
+              </a:tr>
+            </a:tbl>
+          </a:graphicData>
+        </a:graphic>
+      </p:graphicFrame>
+      <p:sp>
+        <p:nvSpPr>
+          <p:cNvPr id="19" name="TextBox 18">
+            <a:extLst>
+              <a:ext uri="{FF2B5EF4-FFF2-40B4-BE49-F238E27FC236}">
+                <a16:creationId xmlns:a16="http://schemas.microsoft.com/office/drawing/2014/main" id="{109D90BB-B466-72A9-D3BE-E9B400DD9ABD}"/>
+              </a:ext>
+            </a:extLst>
+          </p:cNvPr>
+          <p:cNvSpPr txBox="1"/>
+          <p:nvPr/>
+        </p:nvSpPr>
+        <p:spPr>
+          <a:xfrm>
+            <a:off x="5917146" y="4532720"/>
+            <a:ext cx="559769" cy="261610"/>
+          </a:xfrm>
+          <a:prstGeom prst="rect">
+            <a:avLst/>
+          </a:prstGeom>
+          <a:noFill/>
+        </p:spPr>
+        <p:txBody>
+          <a:bodyPr wrap="none" rtlCol="0">
+            <a:spAutoFit/>
+          </a:bodyPr>
+          <a:lstStyle/>
+          <a:p>
+            <a:r>
+              <a:rPr lang="en-US" altLang="zh-CN" sz="1100" dirty="0"/>
+              <a:t>Port 3</a:t>
+            </a:r>
+            <a:endParaRPr lang="zh-CN" altLang="en-US" sz="1100" dirty="0"/>
+          </a:p>
+        </p:txBody>
+      </p:sp>
+      <p:sp>
+        <p:nvSpPr>
+          <p:cNvPr id="20" name="TextBox 19">
+            <a:extLst>
+              <a:ext uri="{FF2B5EF4-FFF2-40B4-BE49-F238E27FC236}">
+                <a16:creationId xmlns:a16="http://schemas.microsoft.com/office/drawing/2014/main" id="{1A421379-7C28-2EEA-77EC-0481519DA26D}"/>
+              </a:ext>
+            </a:extLst>
+          </p:cNvPr>
+          <p:cNvSpPr txBox="1"/>
+          <p:nvPr/>
+        </p:nvSpPr>
+        <p:spPr>
+          <a:xfrm>
+            <a:off x="6335993" y="4532720"/>
+            <a:ext cx="559769" cy="261610"/>
+          </a:xfrm>
+          <a:prstGeom prst="rect">
+            <a:avLst/>
+          </a:prstGeom>
+          <a:noFill/>
+        </p:spPr>
+        <p:txBody>
+          <a:bodyPr wrap="none" rtlCol="0">
+            <a:spAutoFit/>
+          </a:bodyPr>
+          <a:lstStyle/>
+          <a:p>
+            <a:r>
+              <a:rPr lang="en-US" altLang="zh-CN" sz="1100" dirty="0"/>
+              <a:t>Port 4</a:t>
+            </a:r>
+            <a:endParaRPr lang="zh-CN" altLang="en-US" sz="1100" dirty="0"/>
+          </a:p>
+        </p:txBody>
+      </p:sp>
+    </p:spTree>
+    <p:extLst>
+      <p:ext uri="{BB962C8B-B14F-4D97-AF65-F5344CB8AC3E}">
+        <p14:creationId xmlns:p14="http://schemas.microsoft.com/office/powerpoint/2010/main" val="1281903427"/>
+      </p:ext>
+    </p:extLst>
+  </p:cSld>
+  <p:clrMapOvr>
+    <a:masterClrMapping/>
+  </p:clrMapOvr>
+</p:sld>
+</file>
+
+<file path=ppt/slides/slide6.xml><?xml version="1.0" encoding="utf-8"?>
+<p:sld xmlns:a="http://schemas.openxmlformats.org/drawingml/2006/main" xmlns:r="http://schemas.openxmlformats.org/officeDocument/2006/relationships" xmlns:p="http://schemas.openxmlformats.org/presentationml/2006/main">
+  <p:cSld>
+    <p:spTree>
+      <p:nvGrpSpPr>
+        <p:cNvPr id="1" name=""/>
+        <p:cNvGrpSpPr/>
+        <p:nvPr/>
+      </p:nvGrpSpPr>
+      <p:grpSpPr>
+        <a:xfrm>
+          <a:off x="0" y="0"/>
+          <a:ext cx="0" cy="0"/>
+          <a:chOff x="0" y="0"/>
+          <a:chExt cx="0" cy="0"/>
+        </a:xfrm>
+      </p:grpSpPr>
+      <p:sp>
+        <p:nvSpPr>
+          <p:cNvPr id="2" name="Title 1">
+            <a:extLst>
+              <a:ext uri="{FF2B5EF4-FFF2-40B4-BE49-F238E27FC236}">
+                <a16:creationId xmlns:a16="http://schemas.microsoft.com/office/drawing/2014/main" id="{91E87D09-ABAA-DA00-BC8E-929AE146D427}"/>
+              </a:ext>
+            </a:extLst>
+          </p:cNvPr>
+          <p:cNvSpPr>
+            <a:spLocks noGrp="1"/>
+          </p:cNvSpPr>
+          <p:nvPr>
+            <p:ph type="title"/>
+          </p:nvPr>
+        </p:nvSpPr>
+        <p:spPr/>
+        <p:txBody>
+          <a:bodyPr/>
+          <a:lstStyle/>
+          <a:p>
+            <a:r>
+              <a:rPr lang="en-US" altLang="zh-CN" dirty="0"/>
+              <a:t>Q Routing 2 ANS</a:t>
+            </a:r>
+            <a:endParaRPr lang="zh-CN" altLang="en-US" dirty="0"/>
+          </a:p>
+        </p:txBody>
+      </p:sp>
+      <p:sp>
+        <p:nvSpPr>
+          <p:cNvPr id="3" name="Slide Number Placeholder 2">
+            <a:extLst>
+              <a:ext uri="{FF2B5EF4-FFF2-40B4-BE49-F238E27FC236}">
+                <a16:creationId xmlns:a16="http://schemas.microsoft.com/office/drawing/2014/main" id="{BE4F98BB-5F6B-A42E-5780-F63CDA0C2F60}"/>
+              </a:ext>
+            </a:extLst>
+          </p:cNvPr>
+          <p:cNvSpPr>
+            <a:spLocks noGrp="1"/>
+          </p:cNvSpPr>
+          <p:nvPr>
+            <p:ph type="sldNum" sz="quarter" idx="12"/>
+          </p:nvPr>
+        </p:nvSpPr>
+        <p:spPr/>
+        <p:txBody>
+          <a:bodyPr/>
+          <a:lstStyle/>
+          <a:p>
+            <a:pPr defTabSz="685800">
+              <a:buClrTx/>
+            </a:pPr>
+            <a:fld id="{EA7C8D44-3667-46F6-9772-CC52308E2A7F}" type="slidenum">
+              <a:rPr lang="en-US" kern="1200">
+                <a:solidFill>
+                  <a:srgbClr val="1F497D"/>
+                </a:solidFill>
+                <a:latin typeface="Gill Sans MT"/>
+                <a:ea typeface="+mn-ea"/>
+                <a:cs typeface="+mn-cs"/>
+              </a:rPr>
+              <a:pPr defTabSz="685800">
+                <a:buClrTx/>
+              </a:pPr>
+              <a:t>6</a:t>
+            </a:fld>
+            <a:endParaRPr lang="en-US" kern="1200" dirty="0">
+              <a:solidFill>
+                <a:srgbClr val="1F497D"/>
+              </a:solidFill>
+              <a:latin typeface="Gill Sans MT"/>
+              <a:ea typeface="+mn-ea"/>
+              <a:cs typeface="+mn-cs"/>
+            </a:endParaRPr>
+          </a:p>
+        </p:txBody>
+      </p:sp>
+      <p:sp>
+        <p:nvSpPr>
+          <p:cNvPr id="4" name="Content Placeholder 3">
+            <a:extLst>
+              <a:ext uri="{FF2B5EF4-FFF2-40B4-BE49-F238E27FC236}">
+                <a16:creationId xmlns:a16="http://schemas.microsoft.com/office/drawing/2014/main" id="{F59A9F52-C604-2C66-F245-E53EF0F14B82}"/>
+              </a:ext>
+            </a:extLst>
+          </p:cNvPr>
+          <p:cNvSpPr>
+            <a:spLocks noGrp="1"/>
+          </p:cNvSpPr>
+          <p:nvPr>
+            <p:ph sz="quarter" idx="1"/>
+          </p:nvPr>
+        </p:nvSpPr>
+        <p:spPr>
+          <a:xfrm>
+            <a:off x="457200" y="914400"/>
+            <a:ext cx="4269637" cy="4000500"/>
+          </a:xfrm>
+        </p:spPr>
+        <p:txBody>
+          <a:bodyPr>
+            <a:normAutofit fontScale="77500" lnSpcReduction="20000"/>
+          </a:bodyPr>
+          <a:lstStyle/>
+          <a:p>
+            <a:r>
+              <a:rPr lang="nl-NL" altLang="zh-CN" dirty="0"/>
+              <a:t>1. Packet: 10.0.0.1 (binary: 00001010...)</a:t>
+            </a:r>
+          </a:p>
+          <a:p>
+            <a:r>
+              <a:rPr lang="nl-NL" altLang="zh-CN" dirty="0"/>
+              <a:t>   Matches Root: Node A = Port 1 (LPM: /0)</a:t>
+            </a:r>
+          </a:p>
+          <a:p>
+            <a:r>
+              <a:rPr lang="nl-NL" altLang="zh-CN" dirty="0"/>
+              <a:t>2. Packet: 40.0.0.1 (binary: 00101000... = 32.0.0.0/3)</a:t>
+            </a:r>
+          </a:p>
+          <a:p>
+            <a:r>
+              <a:rPr lang="nl-NL" altLang="zh-CN" dirty="0"/>
+              <a:t>   Matches Node B = Port 2</a:t>
+            </a:r>
+          </a:p>
+          <a:p>
+            <a:r>
+              <a:rPr lang="nl-NL" altLang="zh-CN" dirty="0"/>
+              <a:t>3. Packet: 70.0.0.1 (binary: 01000110... = 64.0.0.0/3) </a:t>
+            </a:r>
+          </a:p>
+          <a:p>
+            <a:r>
+              <a:rPr lang="nl-NL" altLang="zh-CN" dirty="0"/>
+              <a:t>   Matches Node B = Port 2</a:t>
+            </a:r>
+          </a:p>
+          <a:p>
+            <a:r>
+              <a:rPr lang="nl-NL" altLang="zh-CN" dirty="0"/>
+              <a:t>4. Packet: 100.0.0.1 (binary: 01100100... = 96.0.0.0/3)</a:t>
+            </a:r>
+          </a:p>
+          <a:p>
+            <a:r>
+              <a:rPr lang="nl-NL" altLang="zh-CN" dirty="0"/>
+              <a:t>   Matches Node K = Port 3</a:t>
+            </a:r>
+          </a:p>
+          <a:p>
+            <a:r>
+              <a:rPr lang="nl-NL" altLang="zh-CN" dirty="0"/>
+              <a:t>5. Packet: 140.0.0.1 (binary: 10001100... = 128.0.0.0/3)</a:t>
+            </a:r>
+          </a:p>
+          <a:p>
+            <a:r>
+              <a:rPr lang="nl-NL" altLang="zh-CN" dirty="0"/>
+              <a:t>   Matches Node L = Port 4</a:t>
+            </a:r>
+          </a:p>
+          <a:p>
+            <a:r>
+              <a:rPr lang="nl-NL" altLang="zh-CN" dirty="0"/>
+              <a:t>6. Packet: 0.0.0.1 (binary: 00000000... = 0.0.0.0/3)</a:t>
+            </a:r>
+          </a:p>
+          <a:p>
+            <a:r>
+              <a:rPr lang="nl-NL" altLang="zh-CN" dirty="0"/>
+              <a:t>   Matches Node B and Node H. LPM means it matches Node H = Port 1</a:t>
+            </a:r>
+            <a:endParaRPr lang="zh-CN" altLang="en-US" dirty="0"/>
+          </a:p>
+        </p:txBody>
+      </p:sp>
+      <p:pic>
+        <p:nvPicPr>
+          <p:cNvPr id="10" name="Picture 9">
+            <a:extLst>
+              <a:ext uri="{FF2B5EF4-FFF2-40B4-BE49-F238E27FC236}">
+                <a16:creationId xmlns:a16="http://schemas.microsoft.com/office/drawing/2014/main" id="{90F65669-D4BC-D7E6-FE8D-B99E95EA32BA}"/>
+              </a:ext>
+            </a:extLst>
+          </p:cNvPr>
+          <p:cNvPicPr>
+            <a:picLocks noChangeAspect="1"/>
+          </p:cNvPicPr>
+          <p:nvPr/>
+        </p:nvPicPr>
+        <p:blipFill>
+          <a:blip r:embed="rId2">
+            <a:extLst>
+              <a:ext uri="{28A0092B-C50C-407E-A947-70E740481C1C}">
+                <a14:useLocalDpi xmlns:a14="http://schemas.microsoft.com/office/drawing/2010/main" val="0"/>
+              </a:ext>
+            </a:extLst>
+          </a:blip>
+          <a:srcRect/>
+          <a:stretch/>
+        </p:blipFill>
+        <p:spPr>
+          <a:xfrm>
+            <a:off x="4770773" y="2802428"/>
+            <a:ext cx="3237436" cy="1811720"/>
+          </a:xfrm>
+          <a:prstGeom prst="rect">
+            <a:avLst/>
+          </a:prstGeom>
+        </p:spPr>
+      </p:pic>
+      <p:pic>
+        <p:nvPicPr>
+          <p:cNvPr id="11" name="Picture 10" descr="The image displays a list of alphabetic labels (A-Z) followed by numerical values (1-4) and symbols (NA), indicating various ports and nodes.&#10;&#10;AI-generated content may be incorrect.">
+            <a:extLst>
+              <a:ext uri="{FF2B5EF4-FFF2-40B4-BE49-F238E27FC236}">
+                <a16:creationId xmlns:a16="http://schemas.microsoft.com/office/drawing/2014/main" id="{E18467E9-0892-898A-B950-3DA08715C73C}"/>
+              </a:ext>
+            </a:extLst>
+          </p:cNvPr>
+          <p:cNvPicPr>
+            <a:picLocks noChangeAspect="1"/>
+          </p:cNvPicPr>
+          <p:nvPr/>
+        </p:nvPicPr>
+        <p:blipFill>
+          <a:blip r:embed="rId3"/>
+          <a:stretch>
+            <a:fillRect/>
+          </a:stretch>
+        </p:blipFill>
+        <p:spPr>
+          <a:xfrm>
+            <a:off x="8095186" y="2283479"/>
+            <a:ext cx="933798" cy="2758104"/>
+          </a:xfrm>
+          <a:prstGeom prst="rect">
+            <a:avLst/>
+          </a:prstGeom>
+        </p:spPr>
+      </p:pic>
+      <p:sp>
+        <p:nvSpPr>
+          <p:cNvPr id="12" name="Rectangle 11">
+            <a:extLst>
+              <a:ext uri="{FF2B5EF4-FFF2-40B4-BE49-F238E27FC236}">
+                <a16:creationId xmlns:a16="http://schemas.microsoft.com/office/drawing/2014/main" id="{F959A425-6E6F-8688-509D-E2E668A8B116}"/>
+              </a:ext>
+            </a:extLst>
+          </p:cNvPr>
+          <p:cNvSpPr/>
+          <p:nvPr/>
+        </p:nvSpPr>
+        <p:spPr>
+          <a:xfrm>
+            <a:off x="6210421" y="2790998"/>
+            <a:ext cx="358140" cy="316230"/>
+          </a:xfrm>
+          <a:prstGeom prst="rect">
+            <a:avLst/>
+          </a:prstGeom>
+          <a:noFill/>
+          <a:ln>
+            <a:solidFill>
+              <a:srgbClr val="FF0000"/>
+            </a:solidFill>
+          </a:ln>
+        </p:spPr>
+        <p:style>
+          <a:lnRef idx="2">
+            <a:schemeClr val="accent1">
+              <a:shade val="15000"/>
+            </a:schemeClr>
+          </a:lnRef>
+          <a:fillRef idx="1">
+            <a:schemeClr val="accent1"/>
+          </a:fillRef>
+          <a:effectRef idx="0">
+            <a:schemeClr val="accent1"/>
+          </a:effectRef>
+          <a:fontRef idx="minor">
+            <a:schemeClr val="lt1"/>
+          </a:fontRef>
+        </p:style>
+        <p:txBody>
+          <a:bodyPr rtlCol="0" anchor="ctr"/>
+          <a:lstStyle/>
+          <a:p>
+            <a:pPr algn="ctr"/>
+            <a:endParaRPr lang="zh-CN" altLang="en-US"/>
+          </a:p>
+        </p:txBody>
+      </p:sp>
+      <p:sp>
+        <p:nvSpPr>
+          <p:cNvPr id="13" name="Rectangle 12">
+            <a:extLst>
+              <a:ext uri="{FF2B5EF4-FFF2-40B4-BE49-F238E27FC236}">
+                <a16:creationId xmlns:a16="http://schemas.microsoft.com/office/drawing/2014/main" id="{A55E7B34-F86A-BE94-3C52-B70A265001F0}"/>
+              </a:ext>
+            </a:extLst>
+          </p:cNvPr>
+          <p:cNvSpPr/>
+          <p:nvPr/>
+        </p:nvSpPr>
+        <p:spPr>
+          <a:xfrm>
+            <a:off x="5388453" y="3191402"/>
+            <a:ext cx="358140" cy="316230"/>
+          </a:xfrm>
+          <a:prstGeom prst="rect">
+            <a:avLst/>
+          </a:prstGeom>
+          <a:noFill/>
+          <a:ln>
+            <a:solidFill>
+              <a:srgbClr val="FF0000"/>
+            </a:solidFill>
+          </a:ln>
+        </p:spPr>
+        <p:style>
+          <a:lnRef idx="2">
+            <a:schemeClr val="accent1">
+              <a:shade val="15000"/>
+            </a:schemeClr>
+          </a:lnRef>
+          <a:fillRef idx="1">
+            <a:schemeClr val="accent1"/>
+          </a:fillRef>
+          <a:effectRef idx="0">
+            <a:schemeClr val="accent1"/>
+          </a:effectRef>
+          <a:fontRef idx="minor">
+            <a:schemeClr val="lt1"/>
+          </a:fontRef>
+        </p:style>
+        <p:txBody>
+          <a:bodyPr rtlCol="0" anchor="ctr"/>
+          <a:lstStyle/>
+          <a:p>
+            <a:pPr algn="ctr"/>
+            <a:endParaRPr lang="zh-CN" altLang="en-US"/>
+          </a:p>
+        </p:txBody>
+      </p:sp>
+      <p:sp>
+        <p:nvSpPr>
+          <p:cNvPr id="14" name="Rectangle 13">
+            <a:extLst>
+              <a:ext uri="{FF2B5EF4-FFF2-40B4-BE49-F238E27FC236}">
+                <a16:creationId xmlns:a16="http://schemas.microsoft.com/office/drawing/2014/main" id="{C8912A2B-7B0D-4CB1-E3C4-B692B31B0945}"/>
+              </a:ext>
+            </a:extLst>
+          </p:cNvPr>
+          <p:cNvSpPr/>
+          <p:nvPr/>
+        </p:nvSpPr>
+        <p:spPr>
+          <a:xfrm>
+            <a:off x="4743441" y="4245115"/>
+            <a:ext cx="358140" cy="316230"/>
+          </a:xfrm>
+          <a:prstGeom prst="rect">
+            <a:avLst/>
+          </a:prstGeom>
+          <a:noFill/>
+          <a:ln>
+            <a:solidFill>
+              <a:srgbClr val="FF0000"/>
+            </a:solidFill>
+          </a:ln>
+        </p:spPr>
+        <p:style>
+          <a:lnRef idx="2">
+            <a:schemeClr val="accent1">
+              <a:shade val="15000"/>
+            </a:schemeClr>
+          </a:lnRef>
+          <a:fillRef idx="1">
+            <a:schemeClr val="accent1"/>
+          </a:fillRef>
+          <a:effectRef idx="0">
+            <a:schemeClr val="accent1"/>
+          </a:effectRef>
+          <a:fontRef idx="minor">
+            <a:schemeClr val="lt1"/>
+          </a:fontRef>
+        </p:style>
+        <p:txBody>
+          <a:bodyPr rtlCol="0" anchor="ctr"/>
+          <a:lstStyle/>
+          <a:p>
+            <a:pPr algn="ctr"/>
+            <a:endParaRPr lang="zh-CN" altLang="en-US"/>
+          </a:p>
+        </p:txBody>
+      </p:sp>
+      <p:sp>
+        <p:nvSpPr>
+          <p:cNvPr id="15" name="Rectangle 14">
+            <a:extLst>
+              <a:ext uri="{FF2B5EF4-FFF2-40B4-BE49-F238E27FC236}">
+                <a16:creationId xmlns:a16="http://schemas.microsoft.com/office/drawing/2014/main" id="{823CB777-BC69-D0A9-8798-9D0BE517FEE2}"/>
+              </a:ext>
+            </a:extLst>
+          </p:cNvPr>
+          <p:cNvSpPr/>
+          <p:nvPr/>
+        </p:nvSpPr>
+        <p:spPr>
+          <a:xfrm>
+            <a:off x="6031351" y="4245115"/>
+            <a:ext cx="358140" cy="316230"/>
+          </a:xfrm>
+          <a:prstGeom prst="rect">
+            <a:avLst/>
+          </a:prstGeom>
+          <a:noFill/>
+          <a:ln>
+            <a:solidFill>
+              <a:srgbClr val="FF0000"/>
+            </a:solidFill>
+          </a:ln>
+        </p:spPr>
+        <p:style>
+          <a:lnRef idx="2">
+            <a:schemeClr val="accent1">
+              <a:shade val="15000"/>
+            </a:schemeClr>
+          </a:lnRef>
+          <a:fillRef idx="1">
+            <a:schemeClr val="accent1"/>
+          </a:fillRef>
+          <a:effectRef idx="0">
+            <a:schemeClr val="accent1"/>
+          </a:effectRef>
+          <a:fontRef idx="minor">
+            <a:schemeClr val="lt1"/>
+          </a:fontRef>
+        </p:style>
+        <p:txBody>
+          <a:bodyPr rtlCol="0" anchor="ctr"/>
+          <a:lstStyle/>
+          <a:p>
+            <a:pPr algn="ctr"/>
+            <a:endParaRPr lang="zh-CN" altLang="en-US"/>
+          </a:p>
+        </p:txBody>
+      </p:sp>
+      <p:sp>
+        <p:nvSpPr>
+          <p:cNvPr id="16" name="Rectangle 15">
+            <a:extLst>
+              <a:ext uri="{FF2B5EF4-FFF2-40B4-BE49-F238E27FC236}">
+                <a16:creationId xmlns:a16="http://schemas.microsoft.com/office/drawing/2014/main" id="{60CC5B4C-D0B8-1C86-D194-9ADFC7888CB8}"/>
+              </a:ext>
+            </a:extLst>
+          </p:cNvPr>
+          <p:cNvSpPr/>
+          <p:nvPr/>
+        </p:nvSpPr>
+        <p:spPr>
+          <a:xfrm>
+            <a:off x="6385270" y="4245115"/>
+            <a:ext cx="358140" cy="316230"/>
+          </a:xfrm>
+          <a:prstGeom prst="rect">
+            <a:avLst/>
+          </a:prstGeom>
+          <a:noFill/>
+          <a:ln>
+            <a:solidFill>
+              <a:srgbClr val="FF0000"/>
+            </a:solidFill>
+          </a:ln>
+        </p:spPr>
+        <p:style>
+          <a:lnRef idx="2">
+            <a:schemeClr val="accent1">
+              <a:shade val="15000"/>
+            </a:schemeClr>
+          </a:lnRef>
+          <a:fillRef idx="1">
+            <a:schemeClr val="accent1"/>
+          </a:fillRef>
+          <a:effectRef idx="0">
+            <a:schemeClr val="accent1"/>
+          </a:effectRef>
+          <a:fontRef idx="minor">
+            <a:schemeClr val="lt1"/>
+          </a:fontRef>
+        </p:style>
+        <p:txBody>
+          <a:bodyPr rtlCol="0" anchor="ctr"/>
+          <a:lstStyle/>
+          <a:p>
+            <a:pPr algn="ctr"/>
+            <a:endParaRPr lang="zh-CN" altLang="en-US"/>
+          </a:p>
+        </p:txBody>
+      </p:sp>
+      <p:sp>
+        <p:nvSpPr>
+          <p:cNvPr id="17" name="TextBox 16">
+            <a:extLst>
+              <a:ext uri="{FF2B5EF4-FFF2-40B4-BE49-F238E27FC236}">
+                <a16:creationId xmlns:a16="http://schemas.microsoft.com/office/drawing/2014/main" id="{94E407C5-7669-A51A-95CF-B57A4BFD7CC8}"/>
+              </a:ext>
+            </a:extLst>
+          </p:cNvPr>
+          <p:cNvSpPr txBox="1"/>
+          <p:nvPr/>
+        </p:nvSpPr>
+        <p:spPr>
+          <a:xfrm>
+            <a:off x="6105385" y="2540818"/>
+            <a:ext cx="559769" cy="261610"/>
+          </a:xfrm>
+          <a:prstGeom prst="rect">
+            <a:avLst/>
+          </a:prstGeom>
+          <a:noFill/>
+        </p:spPr>
+        <p:txBody>
+          <a:bodyPr wrap="none" rtlCol="0">
+            <a:spAutoFit/>
+          </a:bodyPr>
+          <a:lstStyle/>
+          <a:p>
+            <a:r>
+              <a:rPr lang="en-US" altLang="zh-CN" sz="1100" dirty="0"/>
+              <a:t>Port 1</a:t>
+            </a:r>
+            <a:endParaRPr lang="zh-CN" altLang="en-US" sz="1100" dirty="0"/>
+          </a:p>
+        </p:txBody>
+      </p:sp>
+      <p:sp>
+        <p:nvSpPr>
+          <p:cNvPr id="18" name="TextBox 17">
+            <a:extLst>
+              <a:ext uri="{FF2B5EF4-FFF2-40B4-BE49-F238E27FC236}">
+                <a16:creationId xmlns:a16="http://schemas.microsoft.com/office/drawing/2014/main" id="{63520785-04DC-71EF-D50D-955BB18F3350}"/>
+              </a:ext>
+            </a:extLst>
+          </p:cNvPr>
+          <p:cNvSpPr txBox="1"/>
+          <p:nvPr/>
+        </p:nvSpPr>
+        <p:spPr>
+          <a:xfrm>
+            <a:off x="5305311" y="2949113"/>
+            <a:ext cx="559769" cy="261610"/>
+          </a:xfrm>
+          <a:prstGeom prst="rect">
+            <a:avLst/>
+          </a:prstGeom>
+          <a:noFill/>
+        </p:spPr>
+        <p:txBody>
+          <a:bodyPr wrap="none" rtlCol="0">
+            <a:spAutoFit/>
+          </a:bodyPr>
+          <a:lstStyle/>
+          <a:p>
+            <a:r>
+              <a:rPr lang="en-US" altLang="zh-CN" sz="1100" dirty="0"/>
+              <a:t>Port 2</a:t>
+            </a:r>
+            <a:endParaRPr lang="zh-CN" altLang="en-US" sz="1100" dirty="0"/>
+          </a:p>
+        </p:txBody>
+      </p:sp>
+      <p:sp>
+        <p:nvSpPr>
+          <p:cNvPr id="19" name="TextBox 18">
+            <a:extLst>
+              <a:ext uri="{FF2B5EF4-FFF2-40B4-BE49-F238E27FC236}">
+                <a16:creationId xmlns:a16="http://schemas.microsoft.com/office/drawing/2014/main" id="{38EAB3B5-0844-CCD2-B4E3-84C938756A07}"/>
+              </a:ext>
+            </a:extLst>
+          </p:cNvPr>
+          <p:cNvSpPr txBox="1"/>
+          <p:nvPr/>
+        </p:nvSpPr>
+        <p:spPr>
+          <a:xfrm>
+            <a:off x="4665737" y="4532720"/>
+            <a:ext cx="559769" cy="261610"/>
+          </a:xfrm>
+          <a:prstGeom prst="rect">
+            <a:avLst/>
+          </a:prstGeom>
+          <a:noFill/>
+        </p:spPr>
+        <p:txBody>
+          <a:bodyPr wrap="none" rtlCol="0">
+            <a:spAutoFit/>
+          </a:bodyPr>
+          <a:lstStyle/>
+          <a:p>
+            <a:r>
+              <a:rPr lang="en-US" altLang="zh-CN" sz="1100" dirty="0"/>
+              <a:t>Port 1</a:t>
+            </a:r>
+            <a:endParaRPr lang="zh-CN" altLang="en-US" sz="1100" dirty="0"/>
+          </a:p>
+        </p:txBody>
+      </p:sp>
+      <p:graphicFrame>
+        <p:nvGraphicFramePr>
+          <p:cNvPr id="20" name="Table 19">
+            <a:extLst>
+              <a:ext uri="{FF2B5EF4-FFF2-40B4-BE49-F238E27FC236}">
+                <a16:creationId xmlns:a16="http://schemas.microsoft.com/office/drawing/2014/main" id="{879ADBB2-F1E7-CF6F-0225-BBE0FDF99942}"/>
+              </a:ext>
+            </a:extLst>
+          </p:cNvPr>
+          <p:cNvGraphicFramePr>
+            <a:graphicFrameLocks noGrp="1"/>
+          </p:cNvGraphicFramePr>
+          <p:nvPr>
+            <p:extLst>
+              <p:ext uri="{D42A27DB-BD31-4B8C-83A1-F6EECF244321}">
+                <p14:modId xmlns:p14="http://schemas.microsoft.com/office/powerpoint/2010/main" val="3415324229"/>
+              </p:ext>
+            </p:extLst>
+          </p:nvPr>
+        </p:nvGraphicFramePr>
+        <p:xfrm>
+          <a:off x="7521442" y="464204"/>
+          <a:ext cx="1507542" cy="1813560"/>
+        </p:xfrm>
+        <a:graphic>
+          <a:graphicData uri="http://schemas.openxmlformats.org/drawingml/2006/table">
+            <a:tbl>
+              <a:tblPr firstRow="1" bandRow="1">
+                <a:tableStyleId>{E43C0DB3-A16B-4310-B7AB-6BCD390F8AB1}</a:tableStyleId>
+              </a:tblPr>
+              <a:tblGrid>
+                <a:gridCol w="1042531">
+                  <a:extLst>
+                    <a:ext uri="{9D8B030D-6E8A-4147-A177-3AD203B41FA5}">
+                      <a16:colId xmlns:a16="http://schemas.microsoft.com/office/drawing/2014/main" val="4288895764"/>
+                    </a:ext>
+                  </a:extLst>
+                </a:gridCol>
+                <a:gridCol w="465011">
+                  <a:extLst>
+                    <a:ext uri="{9D8B030D-6E8A-4147-A177-3AD203B41FA5}">
+                      <a16:colId xmlns:a16="http://schemas.microsoft.com/office/drawing/2014/main" val="979843445"/>
+                    </a:ext>
+                  </a:extLst>
+                </a:gridCol>
+              </a:tblGrid>
+              <a:tr h="220509">
+                <a:tc>
+                  <a:txBody>
+                    <a:bodyPr/>
+                    <a:lstStyle/>
+                    <a:p>
+                      <a:pPr algn="ctr"/>
+                      <a:r>
+                        <a:rPr lang="en-US" altLang="zh-CN" sz="1100" b="1" dirty="0"/>
+                        <a:t>Destination</a:t>
+                      </a:r>
+                      <a:endParaRPr lang="zh-CN" altLang="en-US" sz="1100" b="1" dirty="0"/>
+                    </a:p>
+                  </a:txBody>
+                  <a:tcPr/>
+                </a:tc>
+                <a:tc>
+                  <a:txBody>
+                    <a:bodyPr/>
+                    <a:lstStyle/>
+                    <a:p>
+                      <a:pPr algn="ctr"/>
+                      <a:r>
+                        <a:rPr lang="en-US" altLang="zh-CN" sz="1100" b="1" dirty="0"/>
+                        <a:t>Port</a:t>
+                      </a:r>
+                      <a:endParaRPr lang="zh-CN" altLang="en-US" sz="1100" b="1" dirty="0"/>
+                    </a:p>
+                  </a:txBody>
+                  <a:tcPr/>
+                </a:tc>
+                <a:extLst>
+                  <a:ext uri="{0D108BD9-81ED-4DB2-BD59-A6C34878D82A}">
+                    <a16:rowId xmlns:a16="http://schemas.microsoft.com/office/drawing/2014/main" val="3613287987"/>
+                  </a:ext>
+                </a:extLst>
+              </a:tr>
+              <a:tr h="220509">
+                <a:tc>
+                  <a:txBody>
+                    <a:bodyPr/>
+                    <a:lstStyle/>
+                    <a:p>
+                      <a:r>
+                        <a:rPr lang="en-US" altLang="zh-CN" sz="1100" dirty="0"/>
+                        <a:t>0.0.0.0/3</a:t>
+                      </a:r>
+                      <a:endParaRPr lang="zh-CN" altLang="en-US" sz="1100" dirty="0"/>
+                    </a:p>
+                  </a:txBody>
+                  <a:tcPr/>
+                </a:tc>
+                <a:tc>
+                  <a:txBody>
+                    <a:bodyPr/>
+                    <a:lstStyle/>
+                    <a:p>
+                      <a:r>
+                        <a:rPr lang="en-US" altLang="zh-CN" sz="1100" dirty="0"/>
+                        <a:t>1</a:t>
+                      </a:r>
+                      <a:endParaRPr lang="zh-CN" altLang="en-US" sz="1100" dirty="0"/>
+                    </a:p>
+                  </a:txBody>
+                  <a:tcPr/>
+                </a:tc>
+                <a:extLst>
+                  <a:ext uri="{0D108BD9-81ED-4DB2-BD59-A6C34878D82A}">
+                    <a16:rowId xmlns:a16="http://schemas.microsoft.com/office/drawing/2014/main" val="1442225972"/>
+                  </a:ext>
+                </a:extLst>
+              </a:tr>
+              <a:tr h="220509">
+                <a:tc>
+                  <a:txBody>
+                    <a:bodyPr/>
+                    <a:lstStyle/>
+                    <a:p>
+                      <a:r>
+                        <a:rPr lang="en-US" altLang="zh-CN" sz="1100" dirty="0"/>
+                        <a:t>32.0.0.0/3</a:t>
+                      </a:r>
+                      <a:endParaRPr lang="zh-CN" altLang="en-US" sz="1100" dirty="0"/>
+                    </a:p>
+                  </a:txBody>
+                  <a:tcPr/>
+                </a:tc>
+                <a:tc>
+                  <a:txBody>
+                    <a:bodyPr/>
+                    <a:lstStyle/>
+                    <a:p>
+                      <a:r>
+                        <a:rPr lang="en-US" altLang="zh-CN" sz="1100" dirty="0"/>
+                        <a:t>2</a:t>
+                      </a:r>
+                      <a:endParaRPr lang="zh-CN" altLang="en-US" sz="1100" dirty="0"/>
+                    </a:p>
+                  </a:txBody>
+                  <a:tcPr/>
+                </a:tc>
+                <a:extLst>
+                  <a:ext uri="{0D108BD9-81ED-4DB2-BD59-A6C34878D82A}">
+                    <a16:rowId xmlns:a16="http://schemas.microsoft.com/office/drawing/2014/main" val="3205567541"/>
+                  </a:ext>
+                </a:extLst>
+              </a:tr>
+              <a:tr h="220509">
+                <a:tc>
+                  <a:txBody>
+                    <a:bodyPr/>
+                    <a:lstStyle/>
+                    <a:p>
+                      <a:r>
+                        <a:rPr lang="en-US" altLang="zh-CN" sz="1100" dirty="0"/>
+                        <a:t>64.0.0.0/3</a:t>
+                      </a:r>
+                      <a:endParaRPr lang="zh-CN" altLang="en-US" sz="1100" dirty="0"/>
+                    </a:p>
+                  </a:txBody>
+                  <a:tcPr/>
+                </a:tc>
+                <a:tc>
+                  <a:txBody>
+                    <a:bodyPr/>
+                    <a:lstStyle/>
+                    <a:p>
+                      <a:r>
+                        <a:rPr lang="en-US" altLang="zh-CN" sz="1100" dirty="0"/>
+                        <a:t>2</a:t>
+                      </a:r>
+                      <a:endParaRPr lang="zh-CN" altLang="en-US" sz="1100" dirty="0"/>
+                    </a:p>
+                  </a:txBody>
+                  <a:tcPr/>
+                </a:tc>
+                <a:extLst>
+                  <a:ext uri="{0D108BD9-81ED-4DB2-BD59-A6C34878D82A}">
+                    <a16:rowId xmlns:a16="http://schemas.microsoft.com/office/drawing/2014/main" val="1625049812"/>
+                  </a:ext>
+                </a:extLst>
+              </a:tr>
+              <a:tr h="220509">
+                <a:tc>
+                  <a:txBody>
+                    <a:bodyPr/>
+                    <a:lstStyle/>
+                    <a:p>
+                      <a:r>
+                        <a:rPr lang="en-US" altLang="zh-CN" sz="1100" dirty="0"/>
+                        <a:t>96.0.0.0/3</a:t>
+                      </a:r>
+                      <a:endParaRPr lang="zh-CN" altLang="en-US" sz="1100" dirty="0"/>
+                    </a:p>
+                  </a:txBody>
+                  <a:tcPr/>
+                </a:tc>
+                <a:tc>
+                  <a:txBody>
+                    <a:bodyPr/>
+                    <a:lstStyle/>
+                    <a:p>
+                      <a:r>
+                        <a:rPr lang="en-US" altLang="zh-CN" sz="1100" dirty="0"/>
+                        <a:t>3</a:t>
+                      </a:r>
+                      <a:endParaRPr lang="zh-CN" altLang="en-US" sz="1100" dirty="0"/>
+                    </a:p>
+                  </a:txBody>
+                  <a:tcPr/>
+                </a:tc>
+                <a:extLst>
+                  <a:ext uri="{0D108BD9-81ED-4DB2-BD59-A6C34878D82A}">
+                    <a16:rowId xmlns:a16="http://schemas.microsoft.com/office/drawing/2014/main" val="2547121994"/>
+                  </a:ext>
+                </a:extLst>
+              </a:tr>
+              <a:tr h="220509">
+                <a:tc>
+                  <a:txBody>
+                    <a:bodyPr/>
+                    <a:lstStyle/>
+                    <a:p>
+                      <a:r>
+                        <a:rPr lang="en-US" altLang="zh-CN" sz="1100" dirty="0"/>
+                        <a:t>128.0.0.0/3</a:t>
+                      </a:r>
+                      <a:endParaRPr lang="zh-CN" altLang="en-US" sz="1100" dirty="0"/>
+                    </a:p>
+                  </a:txBody>
+                  <a:tcPr/>
+                </a:tc>
+                <a:tc>
+                  <a:txBody>
+                    <a:bodyPr/>
+                    <a:lstStyle/>
+                    <a:p>
+                      <a:r>
+                        <a:rPr lang="en-US" altLang="zh-CN" sz="1100" dirty="0"/>
+                        <a:t>4</a:t>
+                      </a:r>
+                      <a:endParaRPr lang="zh-CN" altLang="en-US" sz="1100" dirty="0"/>
+                    </a:p>
+                  </a:txBody>
+                  <a:tcPr/>
+                </a:tc>
+                <a:extLst>
+                  <a:ext uri="{0D108BD9-81ED-4DB2-BD59-A6C34878D82A}">
+                    <a16:rowId xmlns:a16="http://schemas.microsoft.com/office/drawing/2014/main" val="1192429653"/>
+                  </a:ext>
+                </a:extLst>
+              </a:tr>
+              <a:tr h="220509">
+                <a:tc>
+                  <a:txBody>
+                    <a:bodyPr/>
+                    <a:lstStyle/>
+                    <a:p>
+                      <a:r>
+                        <a:rPr lang="en-US" altLang="zh-CN" sz="1100" dirty="0"/>
+                        <a:t>Default</a:t>
+                      </a:r>
+                      <a:endParaRPr lang="zh-CN" altLang="en-US" sz="1100" dirty="0"/>
+                    </a:p>
+                  </a:txBody>
+                  <a:tcPr/>
+                </a:tc>
+                <a:tc>
+                  <a:txBody>
+                    <a:bodyPr/>
+                    <a:lstStyle/>
+                    <a:p>
+                      <a:r>
+                        <a:rPr lang="en-US" altLang="zh-CN" sz="1100" dirty="0"/>
+                        <a:t>1</a:t>
+                      </a:r>
+                      <a:endParaRPr lang="zh-CN" altLang="en-US" sz="1100" dirty="0"/>
+                    </a:p>
+                  </a:txBody>
+                  <a:tcPr/>
+                </a:tc>
+                <a:extLst>
+                  <a:ext uri="{0D108BD9-81ED-4DB2-BD59-A6C34878D82A}">
+                    <a16:rowId xmlns:a16="http://schemas.microsoft.com/office/drawing/2014/main" val="3454065385"/>
+                  </a:ext>
+                </a:extLst>
+              </a:tr>
+            </a:tbl>
+          </a:graphicData>
+        </a:graphic>
+      </p:graphicFrame>
+      <p:sp>
+        <p:nvSpPr>
+          <p:cNvPr id="21" name="TextBox 20">
+            <a:extLst>
+              <a:ext uri="{FF2B5EF4-FFF2-40B4-BE49-F238E27FC236}">
+                <a16:creationId xmlns:a16="http://schemas.microsoft.com/office/drawing/2014/main" id="{4984D088-B8BD-F214-EED2-35717D695736}"/>
+              </a:ext>
+            </a:extLst>
+          </p:cNvPr>
+          <p:cNvSpPr txBox="1"/>
+          <p:nvPr/>
+        </p:nvSpPr>
+        <p:spPr>
+          <a:xfrm>
+            <a:off x="5917146" y="4532720"/>
+            <a:ext cx="559769" cy="261610"/>
+          </a:xfrm>
+          <a:prstGeom prst="rect">
+            <a:avLst/>
+          </a:prstGeom>
+          <a:noFill/>
+        </p:spPr>
+        <p:txBody>
+          <a:bodyPr wrap="none" rtlCol="0">
+            <a:spAutoFit/>
+          </a:bodyPr>
+          <a:lstStyle/>
+          <a:p>
+            <a:r>
+              <a:rPr lang="en-US" altLang="zh-CN" sz="1100" dirty="0"/>
+              <a:t>Port 3</a:t>
+            </a:r>
+            <a:endParaRPr lang="zh-CN" altLang="en-US" sz="1100" dirty="0"/>
+          </a:p>
+        </p:txBody>
+      </p:sp>
+      <p:sp>
+        <p:nvSpPr>
+          <p:cNvPr id="22" name="TextBox 21">
+            <a:extLst>
+              <a:ext uri="{FF2B5EF4-FFF2-40B4-BE49-F238E27FC236}">
+                <a16:creationId xmlns:a16="http://schemas.microsoft.com/office/drawing/2014/main" id="{5895F3C1-2F67-1BC3-8DD7-499EBCE68C6A}"/>
+              </a:ext>
+            </a:extLst>
+          </p:cNvPr>
+          <p:cNvSpPr txBox="1"/>
+          <p:nvPr/>
+        </p:nvSpPr>
+        <p:spPr>
+          <a:xfrm>
+            <a:off x="6335993" y="4532720"/>
+            <a:ext cx="559769" cy="261610"/>
+          </a:xfrm>
+          <a:prstGeom prst="rect">
+            <a:avLst/>
+          </a:prstGeom>
+          <a:noFill/>
+        </p:spPr>
+        <p:txBody>
+          <a:bodyPr wrap="none" rtlCol="0">
+            <a:spAutoFit/>
+          </a:bodyPr>
+          <a:lstStyle/>
+          <a:p>
+            <a:r>
+              <a:rPr lang="en-US" altLang="zh-CN" sz="1100" dirty="0"/>
+              <a:t>Port 4</a:t>
+            </a:r>
+            <a:endParaRPr lang="zh-CN" altLang="en-US" sz="1100" dirty="0"/>
+          </a:p>
+        </p:txBody>
+      </p:sp>
+    </p:spTree>
+    <p:extLst>
+      <p:ext uri="{BB962C8B-B14F-4D97-AF65-F5344CB8AC3E}">
+        <p14:creationId xmlns:p14="http://schemas.microsoft.com/office/powerpoint/2010/main" val="69031532"/>
+      </p:ext>
+    </p:extLst>
+  </p:cSld>
+  <p:clrMapOvr>
+    <a:masterClrMapping/>
+  </p:clrMapOvr>
+</p:sld>
+</file>
+
 <file path=ppt/theme/theme1.xml><?xml version="1.0" encoding="utf-8"?>
 <a:theme xmlns:a="http://schemas.openxmlformats.org/drawingml/2006/main" name="Simple Lecture">
   <a:themeElements>
@@ -15551,6 +22134,340 @@
 </file>
 
 <file path=ppt/theme/theme2.xml><?xml version="1.0" encoding="utf-8"?>
+<a:theme xmlns:a="http://schemas.openxmlformats.org/drawingml/2006/main" name="Origin">
+  <a:themeElements>
+    <a:clrScheme name="Office">
+      <a:dk1>
+        <a:sysClr val="windowText" lastClr="000000"/>
+      </a:dk1>
+      <a:lt1>
+        <a:sysClr val="window" lastClr="FFFFFF"/>
+      </a:lt1>
+      <a:dk2>
+        <a:srgbClr val="1F497D"/>
+      </a:dk2>
+      <a:lt2>
+        <a:srgbClr val="EEECE1"/>
+      </a:lt2>
+      <a:accent1>
+        <a:srgbClr val="4F81BD"/>
+      </a:accent1>
+      <a:accent2>
+        <a:srgbClr val="C0504D"/>
+      </a:accent2>
+      <a:accent3>
+        <a:srgbClr val="9BBB59"/>
+      </a:accent3>
+      <a:accent4>
+        <a:srgbClr val="8064A2"/>
+      </a:accent4>
+      <a:accent5>
+        <a:srgbClr val="4BACC6"/>
+      </a:accent5>
+      <a:accent6>
+        <a:srgbClr val="F79646"/>
+      </a:accent6>
+      <a:hlink>
+        <a:srgbClr val="0000FF"/>
+      </a:hlink>
+      <a:folHlink>
+        <a:srgbClr val="800080"/>
+      </a:folHlink>
+    </a:clrScheme>
+    <a:fontScheme name="Origin">
+      <a:majorFont>
+        <a:latin typeface="Bookman Old Style"/>
+        <a:ea typeface=""/>
+        <a:cs typeface=""/>
+        <a:font script="Grek" typeface="Cambria"/>
+        <a:font script="Cyrl" typeface="Cambria"/>
+        <a:font script="Jpan" typeface="HG明朝E"/>
+        <a:font script="Hang" typeface="돋움"/>
+        <a:font script="Hans" typeface="宋体"/>
+        <a:font script="Hant" typeface="標楷體"/>
+        <a:font script="Arab" typeface="Times New Roman"/>
+        <a:font script="Hebr" typeface="Times New Roman"/>
+        <a:font script="Thai" typeface="Browallia New"/>
+        <a:font script="Ethi" typeface="Nyala"/>
+        <a:font script="Beng" typeface="Vrinda"/>
+        <a:font script="Gujr" typeface="Shruti"/>
+        <a:font script="Khmr" typeface="MoolBoran"/>
+        <a:font script="Knda" typeface="Tunga"/>
+        <a:font script="Guru" typeface="Raavi"/>
+        <a:font script="Cans" typeface="Euphemia"/>
+        <a:font script="Cher" typeface="Plantagenet Cherokee"/>
+        <a:font script="Yiii" typeface="Microsoft Yi Baiti"/>
+        <a:font script="Tibt" typeface="Microsoft Himalaya"/>
+        <a:font script="Thaa" typeface="MV Boli"/>
+        <a:font script="Deva" typeface="Mangal"/>
+        <a:font script="Telu" typeface="Gautami"/>
+        <a:font script="Taml" typeface="Latha"/>
+        <a:font script="Syrc" typeface="Estrangelo Edessa"/>
+        <a:font script="Orya" typeface="Kalinga"/>
+        <a:font script="Mlym" typeface="Kartika"/>
+        <a:font script="Laoo" typeface="DokChampa"/>
+        <a:font script="Sinh" typeface="Iskoola Pota"/>
+        <a:font script="Mong" typeface="Mongolian Baiti"/>
+        <a:font script="Viet" typeface="Times New Roman"/>
+        <a:font script="Uigh" typeface="Microsoft Uighur"/>
+        <a:font script="Geor" typeface="Sylfaen"/>
+      </a:majorFont>
+      <a:minorFont>
+        <a:latin typeface="Gill Sans MT"/>
+        <a:ea typeface=""/>
+        <a:cs typeface=""/>
+        <a:font script="Grek" typeface="Calibri"/>
+        <a:font script="Cyrl" typeface="Calibri"/>
+        <a:font script="Jpan" typeface="ＭＳ Ｐゴシック"/>
+        <a:font script="Hang" typeface="맑은 고딕"/>
+        <a:font script="Hans" typeface="华文新魏"/>
+        <a:font script="Hant" typeface="新細明體"/>
+        <a:font script="Arab" typeface="Arial"/>
+        <a:font script="Hebr" typeface="Arial"/>
+        <a:font script="Thai" typeface="Cordia New"/>
+        <a:font script="Ethi" typeface="Nyala"/>
+        <a:font script="Beng" typeface="Vrinda"/>
+        <a:font script="Gujr" typeface="Shruti"/>
+        <a:font script="Khmr" typeface="DaunPenh"/>
+        <a:font script="Knda" typeface="Tunga"/>
+        <a:font script="Guru" typeface="Raavi"/>
+        <a:font script="Cans" typeface="Euphemia"/>
+        <a:font script="Cher" typeface="Plantagenet Cherokee"/>
+        <a:font script="Yiii" typeface="Microsoft Yi Baiti"/>
+        <a:font script="Tibt" typeface="Microsoft Himalaya"/>
+        <a:font script="Thaa" typeface="MV Boli"/>
+        <a:font script="Deva" typeface="Mangal"/>
+        <a:font script="Telu" typeface="Gautami"/>
+        <a:font script="Taml" typeface="Latha"/>
+        <a:font script="Syrc" typeface="Estrangelo Edessa"/>
+        <a:font script="Orya" typeface="Kalinga"/>
+        <a:font script="Mlym" typeface="Kartika"/>
+        <a:font script="Laoo" typeface="DokChampa"/>
+        <a:font script="Sinh" typeface="Iskoola Pota"/>
+        <a:font script="Mong" typeface="Mongolian Baiti"/>
+        <a:font script="Viet" typeface="Arial"/>
+        <a:font script="Uigh" typeface="Microsoft Uighur"/>
+        <a:font script="Geor" typeface="Sylfaen"/>
+      </a:minorFont>
+    </a:fontScheme>
+    <a:fmtScheme name="Origin">
+      <a:fillStyleLst>
+        <a:solidFill>
+          <a:schemeClr val="phClr"/>
+        </a:solidFill>
+        <a:gradFill rotWithShape="1">
+          <a:gsLst>
+            <a:gs pos="0">
+              <a:schemeClr val="phClr">
+                <a:tint val="45000"/>
+                <a:satMod val="200000"/>
+              </a:schemeClr>
+            </a:gs>
+            <a:gs pos="30000">
+              <a:schemeClr val="phClr">
+                <a:tint val="61000"/>
+                <a:satMod val="200000"/>
+              </a:schemeClr>
+            </a:gs>
+            <a:gs pos="45000">
+              <a:schemeClr val="phClr">
+                <a:tint val="66000"/>
+                <a:satMod val="200000"/>
+              </a:schemeClr>
+            </a:gs>
+            <a:gs pos="55000">
+              <a:schemeClr val="phClr">
+                <a:tint val="66000"/>
+                <a:satMod val="200000"/>
+              </a:schemeClr>
+            </a:gs>
+            <a:gs pos="73000">
+              <a:schemeClr val="phClr">
+                <a:tint val="61000"/>
+                <a:satMod val="200000"/>
+              </a:schemeClr>
+            </a:gs>
+            <a:gs pos="100000">
+              <a:schemeClr val="phClr">
+                <a:tint val="45000"/>
+                <a:satMod val="200000"/>
+              </a:schemeClr>
+            </a:gs>
+          </a:gsLst>
+          <a:lin ang="950000" scaled="1"/>
+        </a:gradFill>
+        <a:gradFill rotWithShape="1">
+          <a:gsLst>
+            <a:gs pos="0">
+              <a:schemeClr val="phClr">
+                <a:shade val="63000"/>
+              </a:schemeClr>
+            </a:gs>
+            <a:gs pos="30000">
+              <a:schemeClr val="phClr">
+                <a:shade val="90000"/>
+                <a:satMod val="110000"/>
+              </a:schemeClr>
+            </a:gs>
+            <a:gs pos="45000">
+              <a:schemeClr val="phClr">
+                <a:shade val="100000"/>
+                <a:satMod val="118000"/>
+              </a:schemeClr>
+            </a:gs>
+            <a:gs pos="55000">
+              <a:schemeClr val="phClr">
+                <a:shade val="100000"/>
+                <a:satMod val="118000"/>
+              </a:schemeClr>
+            </a:gs>
+            <a:gs pos="73000">
+              <a:schemeClr val="phClr">
+                <a:shade val="90000"/>
+                <a:satMod val="110000"/>
+              </a:schemeClr>
+            </a:gs>
+            <a:gs pos="100000">
+              <a:schemeClr val="phClr">
+                <a:shade val="63000"/>
+              </a:schemeClr>
+            </a:gs>
+          </a:gsLst>
+          <a:lin ang="950000" scaled="1"/>
+        </a:gradFill>
+      </a:fillStyleLst>
+      <a:lnStyleLst>
+        <a:ln w="9525" cap="flat" cmpd="sng" algn="ctr">
+          <a:solidFill>
+            <a:schemeClr val="phClr"/>
+          </a:solidFill>
+          <a:prstDash val="solid"/>
+        </a:ln>
+        <a:ln w="19050" cap="flat" cmpd="sng" algn="ctr">
+          <a:solidFill>
+            <a:schemeClr val="phClr"/>
+          </a:solidFill>
+          <a:prstDash val="solid"/>
+        </a:ln>
+        <a:ln w="25400" cap="flat" cmpd="sng" algn="ctr">
+          <a:solidFill>
+            <a:schemeClr val="phClr"/>
+          </a:solidFill>
+          <a:prstDash val="solid"/>
+        </a:ln>
+      </a:lnStyleLst>
+      <a:effectStyleLst>
+        <a:effectStyle>
+          <a:effectLst>
+            <a:outerShdw blurRad="38100" dist="25400" dir="5400000" rotWithShape="0">
+              <a:srgbClr val="000000">
+                <a:alpha val="40000"/>
+              </a:srgbClr>
+            </a:outerShdw>
+          </a:effectLst>
+        </a:effectStyle>
+        <a:effectStyle>
+          <a:effectLst>
+            <a:outerShdw blurRad="50800" dist="43000" dir="5400000" rotWithShape="0">
+              <a:srgbClr val="000000">
+                <a:alpha val="40000"/>
+              </a:srgbClr>
+            </a:outerShdw>
+          </a:effectLst>
+          <a:scene3d>
+            <a:camera prst="orthographicFront" fov="0">
+              <a:rot lat="0" lon="0" rev="0"/>
+            </a:camera>
+            <a:lightRig rig="balanced" dir="t">
+              <a:rot lat="0" lon="0" rev="0"/>
+            </a:lightRig>
+          </a:scene3d>
+          <a:sp3d prstMaterial="matte">
+            <a:bevelT w="0" h="0"/>
+            <a:contourClr>
+              <a:schemeClr val="phClr">
+                <a:tint val="100000"/>
+                <a:shade val="100000"/>
+                <a:hueMod val="100000"/>
+                <a:satMod val="100000"/>
+              </a:schemeClr>
+            </a:contourClr>
+          </a:sp3d>
+        </a:effectStyle>
+        <a:effectStyle>
+          <a:effectLst>
+            <a:outerShdw blurRad="50800" dist="25400" dir="5400000" rotWithShape="0">
+              <a:srgbClr val="000000">
+                <a:alpha val="50000"/>
+              </a:srgbClr>
+            </a:outerShdw>
+          </a:effectLst>
+          <a:scene3d>
+            <a:camera prst="orthographicFront" fov="0">
+              <a:rot lat="0" lon="0" rev="0"/>
+            </a:camera>
+            <a:lightRig rig="soft" dir="t">
+              <a:rot lat="0" lon="0" rev="2700000"/>
+            </a:lightRig>
+          </a:scene3d>
+          <a:sp3d prstMaterial="matte">
+            <a:bevelT w="50800" h="50800"/>
+            <a:contourClr>
+              <a:schemeClr val="phClr"/>
+            </a:contourClr>
+          </a:sp3d>
+        </a:effectStyle>
+      </a:effectStyleLst>
+      <a:bgFillStyleLst>
+        <a:solidFill>
+          <a:schemeClr val="phClr"/>
+        </a:solidFill>
+        <a:gradFill rotWithShape="1">
+          <a:gsLst>
+            <a:gs pos="0">
+              <a:schemeClr val="phClr">
+                <a:shade val="60000"/>
+                <a:satMod val="300000"/>
+              </a:schemeClr>
+            </a:gs>
+            <a:gs pos="30000">
+              <a:schemeClr val="phClr">
+                <a:shade val="80000"/>
+                <a:satMod val="230000"/>
+              </a:schemeClr>
+            </a:gs>
+            <a:gs pos="100000">
+              <a:schemeClr val="phClr">
+                <a:tint val="97000"/>
+                <a:satMod val="220000"/>
+              </a:schemeClr>
+            </a:gs>
+          </a:gsLst>
+          <a:lin ang="16200000" scaled="1"/>
+        </a:gradFill>
+        <a:blipFill>
+          <a:blip xmlns:r="http://schemas.openxmlformats.org/officeDocument/2006/relationships" r:embed="rId1">
+            <a:duotone>
+              <a:schemeClr val="phClr">
+                <a:shade val="6000"/>
+                <a:satMod val="120000"/>
+              </a:schemeClr>
+              <a:schemeClr val="phClr">
+                <a:tint val="90000"/>
+              </a:schemeClr>
+            </a:duotone>
+          </a:blip>
+          <a:tile tx="0" ty="0" sx="35000" sy="40000" flip="x" algn="tl"/>
+        </a:blipFill>
+      </a:bgFillStyleLst>
+    </a:fmtScheme>
+  </a:themeElements>
+  <a:objectDefaults/>
+  <a:extraClrSchemeLst/>
+</a:theme>
+</file>
+
+<file path=ppt/theme/theme3.xml><?xml version="1.0" encoding="utf-8"?>
 <a:theme xmlns:a="http://schemas.openxmlformats.org/drawingml/2006/main">
   <a:themeElements>
     <a:clrScheme name="Default">
